--- a/MiNiFi_pilot_v2.pptx
+++ b/MiNiFi_pilot_v2.pptx
@@ -5,51 +5,22 @@
     <p:sldMasterId id="2147483648" r:id="rId1"/>
   </p:sldMasterIdLst>
   <p:notesMasterIdLst>
-    <p:notesMasterId r:id="rId41"/>
+    <p:notesMasterId r:id="rId12"/>
   </p:notesMasterIdLst>
   <p:handoutMasterIdLst>
-    <p:handoutMasterId r:id="rId42"/>
+    <p:handoutMasterId r:id="rId13"/>
   </p:handoutMasterIdLst>
   <p:sldIdLst>
-    <p:sldId id="287" r:id="rId2"/>
-    <p:sldId id="258" r:id="rId3"/>
-    <p:sldId id="259" r:id="rId4"/>
-    <p:sldId id="261" r:id="rId5"/>
-    <p:sldId id="263" r:id="rId6"/>
-    <p:sldId id="264" r:id="rId7"/>
-    <p:sldId id="265" r:id="rId8"/>
-    <p:sldId id="266" r:id="rId9"/>
-    <p:sldId id="267" r:id="rId10"/>
-    <p:sldId id="268" r:id="rId11"/>
-    <p:sldId id="269" r:id="rId12"/>
-    <p:sldId id="270" r:id="rId13"/>
-    <p:sldId id="271" r:id="rId14"/>
-    <p:sldId id="272" r:id="rId15"/>
-    <p:sldId id="273" r:id="rId16"/>
-    <p:sldId id="274" r:id="rId17"/>
-    <p:sldId id="275" r:id="rId18"/>
-    <p:sldId id="276" r:id="rId19"/>
-    <p:sldId id="277" r:id="rId20"/>
-    <p:sldId id="278" r:id="rId21"/>
-    <p:sldId id="279" r:id="rId22"/>
-    <p:sldId id="280" r:id="rId23"/>
-    <p:sldId id="281" r:id="rId24"/>
-    <p:sldId id="282" r:id="rId25"/>
-    <p:sldId id="283" r:id="rId26"/>
-    <p:sldId id="284" r:id="rId27"/>
-    <p:sldId id="285" r:id="rId28"/>
-    <p:sldId id="500" r:id="rId29"/>
-    <p:sldId id="501" r:id="rId30"/>
-    <p:sldId id="503" r:id="rId31"/>
-    <p:sldId id="502" r:id="rId32"/>
-    <p:sldId id="401" r:id="rId33"/>
-    <p:sldId id="402" r:id="rId34"/>
-    <p:sldId id="504" r:id="rId35"/>
-    <p:sldId id="505" r:id="rId36"/>
-    <p:sldId id="506" r:id="rId37"/>
-    <p:sldId id="507" r:id="rId38"/>
-    <p:sldId id="508" r:id="rId39"/>
-    <p:sldId id="509" r:id="rId40"/>
+    <p:sldId id="500" r:id="rId2"/>
+    <p:sldId id="501" r:id="rId3"/>
+    <p:sldId id="503" r:id="rId4"/>
+    <p:sldId id="502" r:id="rId5"/>
+    <p:sldId id="401" r:id="rId6"/>
+    <p:sldId id="402" r:id="rId7"/>
+    <p:sldId id="504" r:id="rId8"/>
+    <p:sldId id="511" r:id="rId9"/>
+    <p:sldId id="507" r:id="rId10"/>
+    <p:sldId id="274" r:id="rId11"/>
   </p:sldIdLst>
   <p:sldSz cx="12192000" cy="6858000"/>
   <p:notesSz cx="6858000" cy="9144000"/>
@@ -16860,40 +16831,7 @@
       </p:grpSpPr>
       <p:sp>
         <p:nvSpPr>
-          <p:cNvPr id="2" name="Text Placeholder 1">
-            <a:extLst>
-              <a:ext uri="{FF2B5EF4-FFF2-40B4-BE49-F238E27FC236}">
-                <a16:creationId xmlns:a16="http://schemas.microsoft.com/office/drawing/2014/main" id="{A1BA27AC-3D01-C159-1268-E1FAFF5DA6A6}"/>
-              </a:ext>
-            </a:extLst>
-          </p:cNvPr>
-          <p:cNvSpPr>
-            <a:spLocks noGrp="1"/>
-          </p:cNvSpPr>
-          <p:nvPr>
-            <p:ph type="body" sz="quarter" idx="13"/>
-          </p:nvPr>
-        </p:nvSpPr>
-        <p:spPr/>
-        <p:txBody>
-          <a:bodyPr>
-            <a:normAutofit fontScale="85000" lnSpcReduction="20000"/>
-          </a:bodyPr>
-          <a:lstStyle/>
-          <a:p>
-            <a:endParaRPr lang="en-CZ"/>
-          </a:p>
-        </p:txBody>
-      </p:sp>
-      <p:sp>
-        <p:nvSpPr>
-          <p:cNvPr id="3" name="Text Placeholder 2">
-            <a:extLst>
-              <a:ext uri="{FF2B5EF4-FFF2-40B4-BE49-F238E27FC236}">
-                <a16:creationId xmlns:a16="http://schemas.microsoft.com/office/drawing/2014/main" id="{75025A76-9FA8-2823-6F21-80D5E256A8F8}"/>
-              </a:ext>
-            </a:extLst>
-          </p:cNvPr>
+          <p:cNvPr id="2" name="Title Placeholder"/>
           <p:cNvSpPr>
             <a:spLocks noGrp="1"/>
           </p:cNvSpPr>
@@ -16906,19 +16844,17 @@
           <a:bodyPr/>
           <a:lstStyle/>
           <a:p>
-            <a:endParaRPr lang="en-CZ"/>
-          </a:p>
-        </p:txBody>
-      </p:sp>
-      <p:sp>
-        <p:nvSpPr>
-          <p:cNvPr id="4" name="Text Placeholder 3">
-            <a:extLst>
-              <a:ext uri="{FF2B5EF4-FFF2-40B4-BE49-F238E27FC236}">
-                <a16:creationId xmlns:a16="http://schemas.microsoft.com/office/drawing/2014/main" id="{0BE7990E-8CF5-967D-2A57-6AE9B82DBA32}"/>
-              </a:ext>
-            </a:extLst>
-          </p:cNvPr>
+            <a:pPr lvl="0"/>
+            <a:r>
+              <a:rPr lang="en-GB" dirty="0"/>
+              <a:t>Ingest Tool for DataMesh</a:t>
+            </a:r>
+          </a:p>
+        </p:txBody>
+      </p:sp>
+      <p:sp>
+        <p:nvSpPr>
+          <p:cNvPr id="3" name="Subtitle Placeholder"/>
           <p:cNvSpPr>
             <a:spLocks noGrp="1"/>
           </p:cNvSpPr>
@@ -16931,14 +16867,18 @@
           <a:bodyPr/>
           <a:lstStyle/>
           <a:p>
-            <a:endParaRPr lang="en-CZ"/>
+            <a:pPr lvl="0"/>
+            <a:r>
+              <a:rPr lang="en-GB" dirty="0"/>
+              <a:t>Recommended Architecture</a:t>
+            </a:r>
           </a:p>
         </p:txBody>
       </p:sp>
     </p:spTree>
     <p:extLst>
       <p:ext uri="{BB962C8B-B14F-4D97-AF65-F5344CB8AC3E}">
-        <p14:creationId xmlns:p14="http://schemas.microsoft.com/office/powerpoint/2010/main" val="2019605107"/>
+        <p14:creationId xmlns:p14="http://schemas.microsoft.com/office/powerpoint/2010/main" val="1100000100"/>
       </p:ext>
     </p:extLst>
   </p:cSld>
@@ -16970,7 +16910,7 @@
           <p:cNvPr id="2" name="Slide Number Placeholder 1">
             <a:extLst>
               <a:ext uri="{FF2B5EF4-FFF2-40B4-BE49-F238E27FC236}">
-                <a16:creationId xmlns:a16="http://schemas.microsoft.com/office/drawing/2014/main" id="{19B93948-DEE2-FEDE-F333-9873F3E8AC7B}"/>
+                <a16:creationId xmlns:a16="http://schemas.microsoft.com/office/drawing/2014/main" id="{8C05B8EA-2916-B988-82EB-E705A5983D96}"/>
               </a:ext>
             </a:extLst>
           </p:cNvPr>
@@ -17000,7 +16940,7 @@
           <p:cNvPr id="3" name="Text Placeholder 2">
             <a:extLst>
               <a:ext uri="{FF2B5EF4-FFF2-40B4-BE49-F238E27FC236}">
-                <a16:creationId xmlns:a16="http://schemas.microsoft.com/office/drawing/2014/main" id="{E8B3C40F-82B3-24D1-BDC6-3772C5F053B3}"/>
+                <a16:creationId xmlns:a16="http://schemas.microsoft.com/office/drawing/2014/main" id="{CDBC209E-363D-173E-7DBD-48E2AED8FAA9}"/>
               </a:ext>
             </a:extLst>
           </p:cNvPr>
@@ -17016,7 +16956,10 @@
           <a:bodyPr/>
           <a:lstStyle/>
           <a:p>
-            <a:endParaRPr lang="en-CZ"/>
+            <a:r>
+              <a:rPr lang="en-GB" dirty="0"/>
+              <a:t>Planned Next Steps</a:t>
+            </a:r>
           </a:p>
         </p:txBody>
       </p:sp>
@@ -17025,7 +16968,7 @@
           <p:cNvPr id="4" name="Text Placeholder 3">
             <a:extLst>
               <a:ext uri="{FF2B5EF4-FFF2-40B4-BE49-F238E27FC236}">
-                <a16:creationId xmlns:a16="http://schemas.microsoft.com/office/drawing/2014/main" id="{37486164-E7E6-8C2E-F641-C7660CF50A2A}"/>
+                <a16:creationId xmlns:a16="http://schemas.microsoft.com/office/drawing/2014/main" id="{1273925B-454B-154E-0485-FF5B93CBFDED}"/>
               </a:ext>
             </a:extLst>
           </p:cNvPr>
@@ -17041,7 +16984,7 @@
           <a:bodyPr/>
           <a:lstStyle/>
           <a:p>
-            <a:endParaRPr lang="en-CZ"/>
+            <a:endParaRPr lang="en-GB" dirty="0"/>
           </a:p>
         </p:txBody>
       </p:sp>
@@ -17050,7 +16993,7 @@
           <p:cNvPr id="5" name="Footer Placeholder 4">
             <a:extLst>
               <a:ext uri="{FF2B5EF4-FFF2-40B4-BE49-F238E27FC236}">
-                <a16:creationId xmlns:a16="http://schemas.microsoft.com/office/drawing/2014/main" id="{D6405795-2B91-4880-FF77-DFBBFB51B853}"/>
+                <a16:creationId xmlns:a16="http://schemas.microsoft.com/office/drawing/2014/main" id="{C0C31532-F77A-B423-53E2-FD2CBF97522F}"/>
               </a:ext>
             </a:extLst>
           </p:cNvPr>
@@ -17076,18 +17019,18 @@
       </p:sp>
       <p:sp>
         <p:nvSpPr>
-          <p:cNvPr id="6" name="Text Placeholder 5">
-            <a:extLst>
-              <a:ext uri="{FF2B5EF4-FFF2-40B4-BE49-F238E27FC236}">
-                <a16:creationId xmlns:a16="http://schemas.microsoft.com/office/drawing/2014/main" id="{ED96DEA0-049C-6C30-EAA1-A6A34E3E94EB}"/>
-              </a:ext>
-            </a:extLst>
-          </p:cNvPr>
-          <p:cNvSpPr>
-            <a:spLocks noGrp="1"/>
-          </p:cNvSpPr>
-          <p:nvPr>
-            <p:ph type="body" sz="quarter" idx="20"/>
+          <p:cNvPr id="7" name="Picture Placeholder 6">
+            <a:extLst>
+              <a:ext uri="{FF2B5EF4-FFF2-40B4-BE49-F238E27FC236}">
+                <a16:creationId xmlns:a16="http://schemas.microsoft.com/office/drawing/2014/main" id="{66D0D07B-E358-EDC1-D75C-3893F004C14E}"/>
+              </a:ext>
+            </a:extLst>
+          </p:cNvPr>
+          <p:cNvSpPr>
+            <a:spLocks noGrp="1"/>
+          </p:cNvSpPr>
+          <p:nvPr>
+            <p:ph type="pic" sz="quarter" idx="19"/>
           </p:nvPr>
         </p:nvSpPr>
         <p:spPr/>
@@ -17101,1585 +17044,1066 @@
       </p:sp>
       <p:sp>
         <p:nvSpPr>
-          <p:cNvPr id="7" name="Text Placeholder 6">
-            <a:extLst>
-              <a:ext uri="{FF2B5EF4-FFF2-40B4-BE49-F238E27FC236}">
-                <a16:creationId xmlns:a16="http://schemas.microsoft.com/office/drawing/2014/main" id="{E95FCA6E-E851-6AC5-01E7-7E1EF7AF8CEC}"/>
-              </a:ext>
-            </a:extLst>
-          </p:cNvPr>
-          <p:cNvSpPr>
-            <a:spLocks noGrp="1"/>
-          </p:cNvSpPr>
-          <p:nvPr>
-            <p:ph type="body" sz="quarter" idx="21"/>
-          </p:nvPr>
-        </p:nvSpPr>
-        <p:spPr/>
+          <p:cNvPr id="10" name="Tile1 Body idx16">
+            <a:extLst>
+              <a:ext uri="{FF2B5EF4-FFF2-40B4-BE49-F238E27FC236}">
+                <a16:creationId xmlns:a16="http://schemas.microsoft.com/office/drawing/2014/main" id="{02A0E8F5-6988-E382-D8AE-5F89E7FBAB43}"/>
+              </a:ext>
+            </a:extLst>
+          </p:cNvPr>
+          <p:cNvSpPr txBox="1">
+            <a:spLocks/>
+          </p:cNvSpPr>
+          <p:nvPr/>
+        </p:nvSpPr>
+        <p:spPr>
+          <a:xfrm>
+            <a:off x="308919" y="1805651"/>
+            <a:ext cx="5706870" cy="1865699"/>
+          </a:xfrm>
+          <a:prstGeom prst="rect">
+            <a:avLst/>
+          </a:prstGeom>
+        </p:spPr>
+        <p:txBody>
+          <a:bodyPr>
+            <a:normAutofit lnSpcReduction="10000"/>
+          </a:bodyPr>
+          <a:lstStyle>
+            <a:lvl1pPr marL="266400" indent="-252000" algn="l" defTabSz="914400" rtl="0" eaLnBrk="1" latinLnBrk="0" hangingPunct="1">
+              <a:lnSpc>
+                <a:spcPct val="100000"/>
+              </a:lnSpc>
+              <a:spcBef>
+                <a:spcPts val="900"/>
+              </a:spcBef>
+              <a:buSzPct val="100000"/>
+              <a:buFontTx/>
+              <a:buBlip>
+                <a:blip>
+                  <a:extLst>
+                    <a:ext uri="{96DAC541-7B7A-43D3-8B79-37D633B846F1}">
+                      <asvg:svgBlip xmlns:asvg="http://schemas.microsoft.com/office/drawing/2016/SVG/main" r:embed="rId2"/>
+                    </a:ext>
+                  </a:extLst>
+                </a:blip>
+              </a:buBlip>
+              <a:defRPr sz="1800" b="1" i="0" kern="1200" spc="-40" baseline="0">
+                <a:solidFill>
+                  <a:schemeClr val="tx1"/>
+                </a:solidFill>
+                <a:latin typeface="Source Sans Pro SemiBold" panose="020B0503030403020204" pitchFamily="34" charset="0"/>
+                <a:ea typeface="Source Sans Pro SemiBold" panose="020B0503030403020204" pitchFamily="34" charset="0"/>
+                <a:cs typeface="+mn-cs"/>
+              </a:defRPr>
+            </a:lvl1pPr>
+            <a:lvl2pPr marL="266400" indent="-252000" algn="l" defTabSz="914400" rtl="0" eaLnBrk="1" latinLnBrk="0" hangingPunct="1">
+              <a:lnSpc>
+                <a:spcPct val="100000"/>
+              </a:lnSpc>
+              <a:spcBef>
+                <a:spcPts val="900"/>
+              </a:spcBef>
+              <a:buSzPct val="100000"/>
+              <a:buFontTx/>
+              <a:buBlip>
+                <a:blip>
+                  <a:extLst>
+                    <a:ext uri="{96DAC541-7B7A-43D3-8B79-37D633B846F1}">
+                      <asvg:svgBlip xmlns:asvg="http://schemas.microsoft.com/office/drawing/2016/SVG/main" r:embed="rId2"/>
+                    </a:ext>
+                  </a:extLst>
+                </a:blip>
+              </a:buBlip>
+              <a:defRPr sz="1800" b="1" i="0" kern="1200" spc="-40" baseline="0">
+                <a:solidFill>
+                  <a:schemeClr val="tx1"/>
+                </a:solidFill>
+                <a:latin typeface="Source Sans Pro SemiBold" panose="020B0503030403020204" pitchFamily="34" charset="0"/>
+                <a:ea typeface="Source Sans Pro SemiBold" panose="020B0503030403020204" pitchFamily="34" charset="0"/>
+                <a:cs typeface="+mn-cs"/>
+              </a:defRPr>
+            </a:lvl2pPr>
+            <a:lvl3pPr marL="266400" indent="-252000" algn="l" defTabSz="914400" rtl="0" eaLnBrk="1" latinLnBrk="0" hangingPunct="1">
+              <a:lnSpc>
+                <a:spcPct val="100000"/>
+              </a:lnSpc>
+              <a:spcBef>
+                <a:spcPts val="900"/>
+              </a:spcBef>
+              <a:buSzPct val="100000"/>
+              <a:buFontTx/>
+              <a:buBlip>
+                <a:blip>
+                  <a:extLst>
+                    <a:ext uri="{96DAC541-7B7A-43D3-8B79-37D633B846F1}">
+                      <asvg:svgBlip xmlns:asvg="http://schemas.microsoft.com/office/drawing/2016/SVG/main" r:embed="rId2"/>
+                    </a:ext>
+                  </a:extLst>
+                </a:blip>
+              </a:buBlip>
+              <a:defRPr sz="1800" b="1" i="0" kern="1200" spc="-40" baseline="0">
+                <a:solidFill>
+                  <a:schemeClr val="tx1"/>
+                </a:solidFill>
+                <a:latin typeface="Source Sans Pro SemiBold" panose="020B0503030403020204" pitchFamily="34" charset="0"/>
+                <a:ea typeface="Source Sans Pro SemiBold" panose="020B0503030403020204" pitchFamily="34" charset="0"/>
+                <a:cs typeface="+mn-cs"/>
+              </a:defRPr>
+            </a:lvl3pPr>
+            <a:lvl4pPr marL="266400" indent="-252000" algn="l" defTabSz="914400" rtl="0" eaLnBrk="1" latinLnBrk="0" hangingPunct="1">
+              <a:lnSpc>
+                <a:spcPct val="100000"/>
+              </a:lnSpc>
+              <a:spcBef>
+                <a:spcPts val="900"/>
+              </a:spcBef>
+              <a:buSzPct val="100000"/>
+              <a:buFontTx/>
+              <a:buBlip>
+                <a:blip>
+                  <a:extLst>
+                    <a:ext uri="{96DAC541-7B7A-43D3-8B79-37D633B846F1}">
+                      <asvg:svgBlip xmlns:asvg="http://schemas.microsoft.com/office/drawing/2016/SVG/main" r:embed="rId2"/>
+                    </a:ext>
+                  </a:extLst>
+                </a:blip>
+              </a:buBlip>
+              <a:defRPr sz="1800" b="1" i="0" kern="1200" spc="-40" baseline="0">
+                <a:solidFill>
+                  <a:schemeClr val="tx1"/>
+                </a:solidFill>
+                <a:latin typeface="Source Sans Pro SemiBold" panose="020B0503030403020204" pitchFamily="34" charset="0"/>
+                <a:ea typeface="Source Sans Pro SemiBold" panose="020B0503030403020204" pitchFamily="34" charset="0"/>
+                <a:cs typeface="+mn-cs"/>
+              </a:defRPr>
+            </a:lvl4pPr>
+            <a:lvl5pPr marL="266400" indent="-252000" algn="l" defTabSz="914400" rtl="0" eaLnBrk="1" latinLnBrk="0" hangingPunct="1">
+              <a:lnSpc>
+                <a:spcPct val="100000"/>
+              </a:lnSpc>
+              <a:spcBef>
+                <a:spcPts val="900"/>
+              </a:spcBef>
+              <a:buSzPct val="100000"/>
+              <a:buFontTx/>
+              <a:buBlip>
+                <a:blip>
+                  <a:extLst>
+                    <a:ext uri="{96DAC541-7B7A-43D3-8B79-37D633B846F1}">
+                      <asvg:svgBlip xmlns:asvg="http://schemas.microsoft.com/office/drawing/2016/SVG/main" r:embed="rId2"/>
+                    </a:ext>
+                  </a:extLst>
+                </a:blip>
+              </a:buBlip>
+              <a:defRPr sz="1800" b="1" i="0" kern="1200" spc="-40" baseline="0">
+                <a:solidFill>
+                  <a:schemeClr val="tx1"/>
+                </a:solidFill>
+                <a:latin typeface="Source Sans Pro SemiBold" panose="020B0503030403020204" pitchFamily="34" charset="0"/>
+                <a:ea typeface="Source Sans Pro SemiBold" panose="020B0503030403020204" pitchFamily="34" charset="0"/>
+                <a:cs typeface="+mn-cs"/>
+              </a:defRPr>
+            </a:lvl5pPr>
+            <a:lvl6pPr marL="2514600" indent="-228600" algn="l" defTabSz="914400" rtl="0" eaLnBrk="1" latinLnBrk="0" hangingPunct="1">
+              <a:lnSpc>
+                <a:spcPct val="90000"/>
+              </a:lnSpc>
+              <a:spcBef>
+                <a:spcPts val="500"/>
+              </a:spcBef>
+              <a:buFont typeface="Arial" panose="020B0604020202020204" pitchFamily="34" charset="0"/>
+              <a:buChar char="•"/>
+              <a:defRPr sz="1800" kern="1200">
+                <a:solidFill>
+                  <a:schemeClr val="tx1"/>
+                </a:solidFill>
+                <a:latin typeface="+mn-lt"/>
+                <a:ea typeface="+mn-ea"/>
+                <a:cs typeface="+mn-cs"/>
+              </a:defRPr>
+            </a:lvl6pPr>
+            <a:lvl7pPr marL="2971800" indent="-228600" algn="l" defTabSz="914400" rtl="0" eaLnBrk="1" latinLnBrk="0" hangingPunct="1">
+              <a:lnSpc>
+                <a:spcPct val="90000"/>
+              </a:lnSpc>
+              <a:spcBef>
+                <a:spcPts val="500"/>
+              </a:spcBef>
+              <a:buFont typeface="Arial" panose="020B0604020202020204" pitchFamily="34" charset="0"/>
+              <a:buChar char="•"/>
+              <a:defRPr sz="1800" kern="1200">
+                <a:solidFill>
+                  <a:schemeClr val="tx1"/>
+                </a:solidFill>
+                <a:latin typeface="+mn-lt"/>
+                <a:ea typeface="+mn-ea"/>
+                <a:cs typeface="+mn-cs"/>
+              </a:defRPr>
+            </a:lvl7pPr>
+            <a:lvl8pPr marL="3429000" indent="-228600" algn="l" defTabSz="914400" rtl="0" eaLnBrk="1" latinLnBrk="0" hangingPunct="1">
+              <a:lnSpc>
+                <a:spcPct val="90000"/>
+              </a:lnSpc>
+              <a:spcBef>
+                <a:spcPts val="500"/>
+              </a:spcBef>
+              <a:buFont typeface="Arial" panose="020B0604020202020204" pitchFamily="34" charset="0"/>
+              <a:buChar char="•"/>
+              <a:defRPr sz="1800" kern="1200">
+                <a:solidFill>
+                  <a:schemeClr val="tx1"/>
+                </a:solidFill>
+                <a:latin typeface="+mn-lt"/>
+                <a:ea typeface="+mn-ea"/>
+                <a:cs typeface="+mn-cs"/>
+              </a:defRPr>
+            </a:lvl8pPr>
+            <a:lvl9pPr marL="3886200" indent="-228600" algn="l" defTabSz="914400" rtl="0" eaLnBrk="1" latinLnBrk="0" hangingPunct="1">
+              <a:lnSpc>
+                <a:spcPct val="90000"/>
+              </a:lnSpc>
+              <a:spcBef>
+                <a:spcPts val="500"/>
+              </a:spcBef>
+              <a:buFont typeface="Arial" panose="020B0604020202020204" pitchFamily="34" charset="0"/>
+              <a:buChar char="•"/>
+              <a:defRPr sz="1800" kern="1200">
+                <a:solidFill>
+                  <a:schemeClr val="tx1"/>
+                </a:solidFill>
+                <a:latin typeface="+mn-lt"/>
+                <a:ea typeface="+mn-ea"/>
+                <a:cs typeface="+mn-cs"/>
+              </a:defRPr>
+            </a:lvl9pPr>
+          </a:lstStyle>
+          <a:p>
+            <a:pPr lvl="4"/>
+            <a:r>
+              <a:rPr lang="en-GB" dirty="0"/>
+              <a:t>CyberArk integration and password rotation (Airflow → Secret → env var)</a:t>
+            </a:r>
+          </a:p>
+          <a:p>
+            <a:pPr lvl="4"/>
+            <a:r>
+              <a:rPr lang="en-GB" dirty="0"/>
+              <a:t>Pod lifecycle (wrapper / </a:t>
+            </a:r>
+            <a:r>
+              <a:rPr lang="en-GB" dirty="0" err="1"/>
+              <a:t>NiFi</a:t>
+            </a:r>
+            <a:r>
+              <a:rPr lang="en-GB" dirty="0"/>
+              <a:t> Stateless) — reliable detection of run completion/failure</a:t>
+            </a:r>
+          </a:p>
+          <a:p>
+            <a:pPr lvl="4"/>
+            <a:r>
+              <a:rPr lang="en-US" dirty="0"/>
+              <a:t>Confirmation of the possibility to use the </a:t>
+            </a:r>
+            <a:r>
+              <a:rPr lang="en-US" dirty="0" err="1"/>
+              <a:t>KubernetesPodOperator</a:t>
+            </a:r>
+            <a:r>
+              <a:rPr lang="en-US" dirty="0"/>
+              <a:t> from GEN2.</a:t>
+            </a:r>
+            <a:r>
+              <a:rPr lang="en-GB" dirty="0"/>
+              <a:t> </a:t>
+            </a:r>
+          </a:p>
+        </p:txBody>
+      </p:sp>
+      <p:sp>
+        <p:nvSpPr>
+          <p:cNvPr id="11" name="Tile1 Header idx18">
+            <a:extLst>
+              <a:ext uri="{FF2B5EF4-FFF2-40B4-BE49-F238E27FC236}">
+                <a16:creationId xmlns:a16="http://schemas.microsoft.com/office/drawing/2014/main" id="{494445DD-3C1D-1346-B22B-1A5C1959A8AB}"/>
+              </a:ext>
+            </a:extLst>
+          </p:cNvPr>
+          <p:cNvSpPr txBox="1">
+            <a:spLocks/>
+          </p:cNvSpPr>
+          <p:nvPr/>
+        </p:nvSpPr>
+        <p:spPr>
+          <a:xfrm>
+            <a:off x="303835" y="1430793"/>
+            <a:ext cx="5706870" cy="238172"/>
+          </a:xfrm>
+          <a:prstGeom prst="rect">
+            <a:avLst/>
+          </a:prstGeom>
+        </p:spPr>
         <p:txBody>
           <a:bodyPr/>
-          <a:lstStyle/>
-          <a:p>
-            <a:endParaRPr lang="en-CZ"/>
-          </a:p>
-        </p:txBody>
-      </p:sp>
-      <p:sp>
-        <p:nvSpPr>
-          <p:cNvPr id="8" name="Text Placeholder 7">
-            <a:extLst>
-              <a:ext uri="{FF2B5EF4-FFF2-40B4-BE49-F238E27FC236}">
-                <a16:creationId xmlns:a16="http://schemas.microsoft.com/office/drawing/2014/main" id="{45637A34-BACA-C100-04A5-E883549ABFAD}"/>
-              </a:ext>
-            </a:extLst>
-          </p:cNvPr>
-          <p:cNvSpPr>
-            <a:spLocks noGrp="1"/>
-          </p:cNvSpPr>
-          <p:nvPr>
-            <p:ph type="body" sz="quarter" idx="22"/>
-          </p:nvPr>
-        </p:nvSpPr>
-        <p:spPr/>
+          <a:lstStyle>
+            <a:lvl1pPr marL="266400" indent="-252000" algn="l" defTabSz="914400" rtl="0" eaLnBrk="1" latinLnBrk="0" hangingPunct="1">
+              <a:lnSpc>
+                <a:spcPct val="100000"/>
+              </a:lnSpc>
+              <a:spcBef>
+                <a:spcPts val="900"/>
+              </a:spcBef>
+              <a:buSzPct val="100000"/>
+              <a:buFontTx/>
+              <a:buBlip>
+                <a:blip>
+                  <a:extLst>
+                    <a:ext uri="{96DAC541-7B7A-43D3-8B79-37D633B846F1}">
+                      <asvg:svgBlip xmlns:asvg="http://schemas.microsoft.com/office/drawing/2016/SVG/main" r:embed="rId2"/>
+                    </a:ext>
+                  </a:extLst>
+                </a:blip>
+              </a:buBlip>
+              <a:defRPr sz="1800" b="1" i="0" kern="1200" spc="-40" baseline="0">
+                <a:solidFill>
+                  <a:schemeClr val="tx1"/>
+                </a:solidFill>
+                <a:latin typeface="Source Sans Pro SemiBold" panose="020B0503030403020204" pitchFamily="34" charset="0"/>
+                <a:ea typeface="Source Sans Pro SemiBold" panose="020B0503030403020204" pitchFamily="34" charset="0"/>
+                <a:cs typeface="+mn-cs"/>
+              </a:defRPr>
+            </a:lvl1pPr>
+            <a:lvl2pPr marL="266400" indent="-252000" algn="l" defTabSz="914400" rtl="0" eaLnBrk="1" latinLnBrk="0" hangingPunct="1">
+              <a:lnSpc>
+                <a:spcPct val="100000"/>
+              </a:lnSpc>
+              <a:spcBef>
+                <a:spcPts val="900"/>
+              </a:spcBef>
+              <a:buSzPct val="100000"/>
+              <a:buFontTx/>
+              <a:buBlip>
+                <a:blip>
+                  <a:extLst>
+                    <a:ext uri="{96DAC541-7B7A-43D3-8B79-37D633B846F1}">
+                      <asvg:svgBlip xmlns:asvg="http://schemas.microsoft.com/office/drawing/2016/SVG/main" r:embed="rId2"/>
+                    </a:ext>
+                  </a:extLst>
+                </a:blip>
+              </a:buBlip>
+              <a:defRPr sz="1800" b="1" i="0" kern="1200" spc="-40" baseline="0">
+                <a:solidFill>
+                  <a:schemeClr val="tx1"/>
+                </a:solidFill>
+                <a:latin typeface="Source Sans Pro SemiBold" panose="020B0503030403020204" pitchFamily="34" charset="0"/>
+                <a:ea typeface="Source Sans Pro SemiBold" panose="020B0503030403020204" pitchFamily="34" charset="0"/>
+                <a:cs typeface="+mn-cs"/>
+              </a:defRPr>
+            </a:lvl2pPr>
+            <a:lvl3pPr marL="266400" indent="-252000" algn="l" defTabSz="914400" rtl="0" eaLnBrk="1" latinLnBrk="0" hangingPunct="1">
+              <a:lnSpc>
+                <a:spcPct val="100000"/>
+              </a:lnSpc>
+              <a:spcBef>
+                <a:spcPts val="900"/>
+              </a:spcBef>
+              <a:buSzPct val="100000"/>
+              <a:buFontTx/>
+              <a:buBlip>
+                <a:blip>
+                  <a:extLst>
+                    <a:ext uri="{96DAC541-7B7A-43D3-8B79-37D633B846F1}">
+                      <asvg:svgBlip xmlns:asvg="http://schemas.microsoft.com/office/drawing/2016/SVG/main" r:embed="rId2"/>
+                    </a:ext>
+                  </a:extLst>
+                </a:blip>
+              </a:buBlip>
+              <a:defRPr sz="1800" b="1" i="0" kern="1200" spc="-40" baseline="0">
+                <a:solidFill>
+                  <a:schemeClr val="tx1"/>
+                </a:solidFill>
+                <a:latin typeface="Source Sans Pro SemiBold" panose="020B0503030403020204" pitchFamily="34" charset="0"/>
+                <a:ea typeface="Source Sans Pro SemiBold" panose="020B0503030403020204" pitchFamily="34" charset="0"/>
+                <a:cs typeface="+mn-cs"/>
+              </a:defRPr>
+            </a:lvl3pPr>
+            <a:lvl4pPr marL="266400" indent="-252000" algn="l" defTabSz="914400" rtl="0" eaLnBrk="1" latinLnBrk="0" hangingPunct="1">
+              <a:lnSpc>
+                <a:spcPct val="100000"/>
+              </a:lnSpc>
+              <a:spcBef>
+                <a:spcPts val="900"/>
+              </a:spcBef>
+              <a:buSzPct val="100000"/>
+              <a:buFontTx/>
+              <a:buBlip>
+                <a:blip>
+                  <a:extLst>
+                    <a:ext uri="{96DAC541-7B7A-43D3-8B79-37D633B846F1}">
+                      <asvg:svgBlip xmlns:asvg="http://schemas.microsoft.com/office/drawing/2016/SVG/main" r:embed="rId2"/>
+                    </a:ext>
+                  </a:extLst>
+                </a:blip>
+              </a:buBlip>
+              <a:defRPr sz="1800" b="1" i="0" kern="1200" spc="-40" baseline="0">
+                <a:solidFill>
+                  <a:schemeClr val="tx1"/>
+                </a:solidFill>
+                <a:latin typeface="Source Sans Pro SemiBold" panose="020B0503030403020204" pitchFamily="34" charset="0"/>
+                <a:ea typeface="Source Sans Pro SemiBold" panose="020B0503030403020204" pitchFamily="34" charset="0"/>
+                <a:cs typeface="+mn-cs"/>
+              </a:defRPr>
+            </a:lvl4pPr>
+            <a:lvl5pPr marL="266400" indent="-252000" algn="l" defTabSz="914400" rtl="0" eaLnBrk="1" latinLnBrk="0" hangingPunct="1">
+              <a:lnSpc>
+                <a:spcPct val="100000"/>
+              </a:lnSpc>
+              <a:spcBef>
+                <a:spcPts val="900"/>
+              </a:spcBef>
+              <a:buSzPct val="100000"/>
+              <a:buFontTx/>
+              <a:buBlip>
+                <a:blip>
+                  <a:extLst>
+                    <a:ext uri="{96DAC541-7B7A-43D3-8B79-37D633B846F1}">
+                      <asvg:svgBlip xmlns:asvg="http://schemas.microsoft.com/office/drawing/2016/SVG/main" r:embed="rId2"/>
+                    </a:ext>
+                  </a:extLst>
+                </a:blip>
+              </a:buBlip>
+              <a:defRPr sz="1800" b="1" i="0" kern="1200" spc="-40" baseline="0">
+                <a:solidFill>
+                  <a:schemeClr val="tx1"/>
+                </a:solidFill>
+                <a:latin typeface="Source Sans Pro SemiBold" panose="020B0503030403020204" pitchFamily="34" charset="0"/>
+                <a:ea typeface="Source Sans Pro SemiBold" panose="020B0503030403020204" pitchFamily="34" charset="0"/>
+                <a:cs typeface="+mn-cs"/>
+              </a:defRPr>
+            </a:lvl5pPr>
+            <a:lvl6pPr marL="2514600" indent="-228600" algn="l" defTabSz="914400" rtl="0" eaLnBrk="1" latinLnBrk="0" hangingPunct="1">
+              <a:lnSpc>
+                <a:spcPct val="90000"/>
+              </a:lnSpc>
+              <a:spcBef>
+                <a:spcPts val="500"/>
+              </a:spcBef>
+              <a:buFont typeface="Arial" panose="020B0604020202020204" pitchFamily="34" charset="0"/>
+              <a:buChar char="•"/>
+              <a:defRPr sz="1800" kern="1200">
+                <a:solidFill>
+                  <a:schemeClr val="tx1"/>
+                </a:solidFill>
+                <a:latin typeface="+mn-lt"/>
+                <a:ea typeface="+mn-ea"/>
+                <a:cs typeface="+mn-cs"/>
+              </a:defRPr>
+            </a:lvl6pPr>
+            <a:lvl7pPr marL="2971800" indent="-228600" algn="l" defTabSz="914400" rtl="0" eaLnBrk="1" latinLnBrk="0" hangingPunct="1">
+              <a:lnSpc>
+                <a:spcPct val="90000"/>
+              </a:lnSpc>
+              <a:spcBef>
+                <a:spcPts val="500"/>
+              </a:spcBef>
+              <a:buFont typeface="Arial" panose="020B0604020202020204" pitchFamily="34" charset="0"/>
+              <a:buChar char="•"/>
+              <a:defRPr sz="1800" kern="1200">
+                <a:solidFill>
+                  <a:schemeClr val="tx1"/>
+                </a:solidFill>
+                <a:latin typeface="+mn-lt"/>
+                <a:ea typeface="+mn-ea"/>
+                <a:cs typeface="+mn-cs"/>
+              </a:defRPr>
+            </a:lvl7pPr>
+            <a:lvl8pPr marL="3429000" indent="-228600" algn="l" defTabSz="914400" rtl="0" eaLnBrk="1" latinLnBrk="0" hangingPunct="1">
+              <a:lnSpc>
+                <a:spcPct val="90000"/>
+              </a:lnSpc>
+              <a:spcBef>
+                <a:spcPts val="500"/>
+              </a:spcBef>
+              <a:buFont typeface="Arial" panose="020B0604020202020204" pitchFamily="34" charset="0"/>
+              <a:buChar char="•"/>
+              <a:defRPr sz="1800" kern="1200">
+                <a:solidFill>
+                  <a:schemeClr val="tx1"/>
+                </a:solidFill>
+                <a:latin typeface="+mn-lt"/>
+                <a:ea typeface="+mn-ea"/>
+                <a:cs typeface="+mn-cs"/>
+              </a:defRPr>
+            </a:lvl8pPr>
+            <a:lvl9pPr marL="3886200" indent="-228600" algn="l" defTabSz="914400" rtl="0" eaLnBrk="1" latinLnBrk="0" hangingPunct="1">
+              <a:lnSpc>
+                <a:spcPct val="90000"/>
+              </a:lnSpc>
+              <a:spcBef>
+                <a:spcPts val="500"/>
+              </a:spcBef>
+              <a:buFont typeface="Arial" panose="020B0604020202020204" pitchFamily="34" charset="0"/>
+              <a:buChar char="•"/>
+              <a:defRPr sz="1800" kern="1200">
+                <a:solidFill>
+                  <a:schemeClr val="tx1"/>
+                </a:solidFill>
+                <a:latin typeface="+mn-lt"/>
+                <a:ea typeface="+mn-ea"/>
+                <a:cs typeface="+mn-cs"/>
+              </a:defRPr>
+            </a:lvl9pPr>
+          </a:lstStyle>
+          <a:p>
+            <a:pPr marL="0" indent="0">
+              <a:buNone/>
+            </a:pPr>
+            <a:r>
+              <a:rPr lang="en-GB" sz="1500" dirty="0">
+                <a:solidFill>
+                  <a:srgbClr val="909090"/>
+                </a:solidFill>
+              </a:rPr>
+              <a:t>Technical Validation</a:t>
+            </a:r>
+          </a:p>
+        </p:txBody>
+      </p:sp>
+      <p:sp>
+        <p:nvSpPr>
+          <p:cNvPr id="14" name="Tile2 Body idx20">
+            <a:extLst>
+              <a:ext uri="{FF2B5EF4-FFF2-40B4-BE49-F238E27FC236}">
+                <a16:creationId xmlns:a16="http://schemas.microsoft.com/office/drawing/2014/main" id="{F9202BD7-5A3E-2CF4-D39E-7FDCEB660432}"/>
+              </a:ext>
+            </a:extLst>
+          </p:cNvPr>
+          <p:cNvSpPr txBox="1">
+            <a:spLocks/>
+          </p:cNvSpPr>
+          <p:nvPr/>
+        </p:nvSpPr>
+        <p:spPr>
+          <a:xfrm>
+            <a:off x="6181297" y="1805651"/>
+            <a:ext cx="5706870" cy="1865699"/>
+          </a:xfrm>
+          <a:prstGeom prst="rect">
+            <a:avLst/>
+          </a:prstGeom>
+        </p:spPr>
+        <p:txBody>
+          <a:bodyPr>
+            <a:normAutofit/>
+          </a:bodyPr>
+          <a:lstStyle>
+            <a:lvl1pPr marL="266400" indent="-252000" algn="l" defTabSz="914400" rtl="0" eaLnBrk="1" latinLnBrk="0" hangingPunct="1">
+              <a:lnSpc>
+                <a:spcPct val="100000"/>
+              </a:lnSpc>
+              <a:spcBef>
+                <a:spcPts val="900"/>
+              </a:spcBef>
+              <a:buSzPct val="100000"/>
+              <a:buFontTx/>
+              <a:buBlip>
+                <a:blip>
+                  <a:extLst>
+                    <a:ext uri="{96DAC541-7B7A-43D3-8B79-37D633B846F1}">
+                      <asvg:svgBlip xmlns:asvg="http://schemas.microsoft.com/office/drawing/2016/SVG/main" r:embed="rId2"/>
+                    </a:ext>
+                  </a:extLst>
+                </a:blip>
+              </a:buBlip>
+              <a:defRPr sz="1800" b="1" i="0" kern="1200" spc="-40" baseline="0">
+                <a:solidFill>
+                  <a:schemeClr val="tx1"/>
+                </a:solidFill>
+                <a:latin typeface="Source Sans Pro SemiBold" panose="020B0503030403020204" pitchFamily="34" charset="0"/>
+                <a:ea typeface="Source Sans Pro SemiBold" panose="020B0503030403020204" pitchFamily="34" charset="0"/>
+                <a:cs typeface="+mn-cs"/>
+              </a:defRPr>
+            </a:lvl1pPr>
+            <a:lvl2pPr marL="266400" indent="-252000" algn="l" defTabSz="914400" rtl="0" eaLnBrk="1" latinLnBrk="0" hangingPunct="1">
+              <a:lnSpc>
+                <a:spcPct val="100000"/>
+              </a:lnSpc>
+              <a:spcBef>
+                <a:spcPts val="900"/>
+              </a:spcBef>
+              <a:buSzPct val="100000"/>
+              <a:buFontTx/>
+              <a:buBlip>
+                <a:blip>
+                  <a:extLst>
+                    <a:ext uri="{96DAC541-7B7A-43D3-8B79-37D633B846F1}">
+                      <asvg:svgBlip xmlns:asvg="http://schemas.microsoft.com/office/drawing/2016/SVG/main" r:embed="rId2"/>
+                    </a:ext>
+                  </a:extLst>
+                </a:blip>
+              </a:buBlip>
+              <a:defRPr sz="1800" b="1" i="0" kern="1200" spc="-40" baseline="0">
+                <a:solidFill>
+                  <a:schemeClr val="tx1"/>
+                </a:solidFill>
+                <a:latin typeface="Source Sans Pro SemiBold" panose="020B0503030403020204" pitchFamily="34" charset="0"/>
+                <a:ea typeface="Source Sans Pro SemiBold" panose="020B0503030403020204" pitchFamily="34" charset="0"/>
+                <a:cs typeface="+mn-cs"/>
+              </a:defRPr>
+            </a:lvl2pPr>
+            <a:lvl3pPr marL="266400" indent="-252000" algn="l" defTabSz="914400" rtl="0" eaLnBrk="1" latinLnBrk="0" hangingPunct="1">
+              <a:lnSpc>
+                <a:spcPct val="100000"/>
+              </a:lnSpc>
+              <a:spcBef>
+                <a:spcPts val="900"/>
+              </a:spcBef>
+              <a:buSzPct val="100000"/>
+              <a:buFontTx/>
+              <a:buBlip>
+                <a:blip>
+                  <a:extLst>
+                    <a:ext uri="{96DAC541-7B7A-43D3-8B79-37D633B846F1}">
+                      <asvg:svgBlip xmlns:asvg="http://schemas.microsoft.com/office/drawing/2016/SVG/main" r:embed="rId2"/>
+                    </a:ext>
+                  </a:extLst>
+                </a:blip>
+              </a:buBlip>
+              <a:defRPr sz="1800" b="1" i="0" kern="1200" spc="-40" baseline="0">
+                <a:solidFill>
+                  <a:schemeClr val="tx1"/>
+                </a:solidFill>
+                <a:latin typeface="Source Sans Pro SemiBold" panose="020B0503030403020204" pitchFamily="34" charset="0"/>
+                <a:ea typeface="Source Sans Pro SemiBold" panose="020B0503030403020204" pitchFamily="34" charset="0"/>
+                <a:cs typeface="+mn-cs"/>
+              </a:defRPr>
+            </a:lvl3pPr>
+            <a:lvl4pPr marL="266400" indent="-252000" algn="l" defTabSz="914400" rtl="0" eaLnBrk="1" latinLnBrk="0" hangingPunct="1">
+              <a:lnSpc>
+                <a:spcPct val="100000"/>
+              </a:lnSpc>
+              <a:spcBef>
+                <a:spcPts val="900"/>
+              </a:spcBef>
+              <a:buSzPct val="100000"/>
+              <a:buFontTx/>
+              <a:buBlip>
+                <a:blip>
+                  <a:extLst>
+                    <a:ext uri="{96DAC541-7B7A-43D3-8B79-37D633B846F1}">
+                      <asvg:svgBlip xmlns:asvg="http://schemas.microsoft.com/office/drawing/2016/SVG/main" r:embed="rId2"/>
+                    </a:ext>
+                  </a:extLst>
+                </a:blip>
+              </a:buBlip>
+              <a:defRPr sz="1800" b="1" i="0" kern="1200" spc="-40" baseline="0">
+                <a:solidFill>
+                  <a:schemeClr val="tx1"/>
+                </a:solidFill>
+                <a:latin typeface="Source Sans Pro SemiBold" panose="020B0503030403020204" pitchFamily="34" charset="0"/>
+                <a:ea typeface="Source Sans Pro SemiBold" panose="020B0503030403020204" pitchFamily="34" charset="0"/>
+                <a:cs typeface="+mn-cs"/>
+              </a:defRPr>
+            </a:lvl4pPr>
+            <a:lvl5pPr marL="266400" indent="-252000" algn="l" defTabSz="914400" rtl="0" eaLnBrk="1" latinLnBrk="0" hangingPunct="1">
+              <a:lnSpc>
+                <a:spcPct val="100000"/>
+              </a:lnSpc>
+              <a:spcBef>
+                <a:spcPts val="900"/>
+              </a:spcBef>
+              <a:buSzPct val="100000"/>
+              <a:buFontTx/>
+              <a:buBlip>
+                <a:blip>
+                  <a:extLst>
+                    <a:ext uri="{96DAC541-7B7A-43D3-8B79-37D633B846F1}">
+                      <asvg:svgBlip xmlns:asvg="http://schemas.microsoft.com/office/drawing/2016/SVG/main" r:embed="rId2"/>
+                    </a:ext>
+                  </a:extLst>
+                </a:blip>
+              </a:buBlip>
+              <a:defRPr sz="1800" b="1" i="0" kern="1200" spc="-40" baseline="0">
+                <a:solidFill>
+                  <a:schemeClr val="tx1"/>
+                </a:solidFill>
+                <a:latin typeface="Source Sans Pro SemiBold" panose="020B0503030403020204" pitchFamily="34" charset="0"/>
+                <a:ea typeface="Source Sans Pro SemiBold" panose="020B0503030403020204" pitchFamily="34" charset="0"/>
+                <a:cs typeface="+mn-cs"/>
+              </a:defRPr>
+            </a:lvl5pPr>
+            <a:lvl6pPr marL="2514600" indent="-228600" algn="l" defTabSz="914400" rtl="0" eaLnBrk="1" latinLnBrk="0" hangingPunct="1">
+              <a:lnSpc>
+                <a:spcPct val="90000"/>
+              </a:lnSpc>
+              <a:spcBef>
+                <a:spcPts val="500"/>
+              </a:spcBef>
+              <a:buFont typeface="Arial" panose="020B0604020202020204" pitchFamily="34" charset="0"/>
+              <a:buChar char="•"/>
+              <a:defRPr sz="1800" kern="1200">
+                <a:solidFill>
+                  <a:schemeClr val="tx1"/>
+                </a:solidFill>
+                <a:latin typeface="+mn-lt"/>
+                <a:ea typeface="+mn-ea"/>
+                <a:cs typeface="+mn-cs"/>
+              </a:defRPr>
+            </a:lvl6pPr>
+            <a:lvl7pPr marL="2971800" indent="-228600" algn="l" defTabSz="914400" rtl="0" eaLnBrk="1" latinLnBrk="0" hangingPunct="1">
+              <a:lnSpc>
+                <a:spcPct val="90000"/>
+              </a:lnSpc>
+              <a:spcBef>
+                <a:spcPts val="500"/>
+              </a:spcBef>
+              <a:buFont typeface="Arial" panose="020B0604020202020204" pitchFamily="34" charset="0"/>
+              <a:buChar char="•"/>
+              <a:defRPr sz="1800" kern="1200">
+                <a:solidFill>
+                  <a:schemeClr val="tx1"/>
+                </a:solidFill>
+                <a:latin typeface="+mn-lt"/>
+                <a:ea typeface="+mn-ea"/>
+                <a:cs typeface="+mn-cs"/>
+              </a:defRPr>
+            </a:lvl7pPr>
+            <a:lvl8pPr marL="3429000" indent="-228600" algn="l" defTabSz="914400" rtl="0" eaLnBrk="1" latinLnBrk="0" hangingPunct="1">
+              <a:lnSpc>
+                <a:spcPct val="90000"/>
+              </a:lnSpc>
+              <a:spcBef>
+                <a:spcPts val="500"/>
+              </a:spcBef>
+              <a:buFont typeface="Arial" panose="020B0604020202020204" pitchFamily="34" charset="0"/>
+              <a:buChar char="•"/>
+              <a:defRPr sz="1800" kern="1200">
+                <a:solidFill>
+                  <a:schemeClr val="tx1"/>
+                </a:solidFill>
+                <a:latin typeface="+mn-lt"/>
+                <a:ea typeface="+mn-ea"/>
+                <a:cs typeface="+mn-cs"/>
+              </a:defRPr>
+            </a:lvl8pPr>
+            <a:lvl9pPr marL="3886200" indent="-228600" algn="l" defTabSz="914400" rtl="0" eaLnBrk="1" latinLnBrk="0" hangingPunct="1">
+              <a:lnSpc>
+                <a:spcPct val="90000"/>
+              </a:lnSpc>
+              <a:spcBef>
+                <a:spcPts val="500"/>
+              </a:spcBef>
+              <a:buFont typeface="Arial" panose="020B0604020202020204" pitchFamily="34" charset="0"/>
+              <a:buChar char="•"/>
+              <a:defRPr sz="1800" kern="1200">
+                <a:solidFill>
+                  <a:schemeClr val="tx1"/>
+                </a:solidFill>
+                <a:latin typeface="+mn-lt"/>
+                <a:ea typeface="+mn-ea"/>
+                <a:cs typeface="+mn-cs"/>
+              </a:defRPr>
+            </a:lvl9pPr>
+          </a:lstStyle>
+          <a:p>
+            <a:pPr lvl="4"/>
+            <a:r>
+              <a:rPr lang="cs-CZ" sz="1600" dirty="0"/>
+              <a:t>Test on Oracle, </a:t>
+            </a:r>
+            <a:r>
+              <a:rPr lang="cs-CZ" sz="1600" dirty="0" err="1"/>
+              <a:t>Postgres</a:t>
+            </a:r>
+            <a:r>
+              <a:rPr lang="cs-CZ" sz="1600" dirty="0"/>
+              <a:t>, MSSQL, </a:t>
+            </a:r>
+            <a:r>
+              <a:rPr lang="cs-CZ" sz="1600" dirty="0" err="1"/>
+              <a:t>Mysql</a:t>
+            </a:r>
+            <a:endParaRPr lang="cs-CZ" sz="1600" dirty="0"/>
+          </a:p>
+          <a:p>
+            <a:pPr lvl="4"/>
+            <a:r>
+              <a:rPr lang="cs-CZ" sz="1600" dirty="0"/>
+              <a:t>Test on </a:t>
+            </a:r>
+            <a:r>
+              <a:rPr lang="en-GB" sz="1600" dirty="0"/>
+              <a:t>Teradata </a:t>
+            </a:r>
+          </a:p>
+          <a:p>
+            <a:pPr lvl="4"/>
+            <a:r>
+              <a:rPr lang="cs-CZ" sz="1600" dirty="0"/>
+              <a:t>Testing </a:t>
+            </a:r>
+            <a:r>
+              <a:rPr lang="en-US" sz="1600" dirty="0"/>
+              <a:t>increments with watermarks</a:t>
+            </a:r>
+            <a:endParaRPr lang="en-GB" sz="1600" dirty="0"/>
+          </a:p>
+          <a:p>
+            <a:pPr lvl="4"/>
+            <a:r>
+              <a:rPr lang="en-GB" sz="1600" dirty="0"/>
+              <a:t>Testing on larger data volumes</a:t>
+            </a:r>
+          </a:p>
+        </p:txBody>
+      </p:sp>
+      <p:sp>
+        <p:nvSpPr>
+          <p:cNvPr id="15" name="Tile2 Header idx23">
+            <a:extLst>
+              <a:ext uri="{FF2B5EF4-FFF2-40B4-BE49-F238E27FC236}">
+                <a16:creationId xmlns:a16="http://schemas.microsoft.com/office/drawing/2014/main" id="{0644E175-5AA7-9A32-5C70-9DFB8B3B261A}"/>
+              </a:ext>
+            </a:extLst>
+          </p:cNvPr>
+          <p:cNvSpPr txBox="1">
+            <a:spLocks/>
+          </p:cNvSpPr>
+          <p:nvPr/>
+        </p:nvSpPr>
+        <p:spPr>
+          <a:xfrm>
+            <a:off x="6216014" y="1419046"/>
+            <a:ext cx="5706870" cy="238172"/>
+          </a:xfrm>
+          <a:prstGeom prst="rect">
+            <a:avLst/>
+          </a:prstGeom>
+        </p:spPr>
         <p:txBody>
           <a:bodyPr/>
-          <a:lstStyle/>
-          <a:p>
-            <a:endParaRPr lang="en-CZ"/>
-          </a:p>
-        </p:txBody>
-      </p:sp>
-      <p:sp>
-        <p:nvSpPr>
-          <p:cNvPr id="9" name="Text Placeholder 8">
-            <a:extLst>
-              <a:ext uri="{FF2B5EF4-FFF2-40B4-BE49-F238E27FC236}">
-                <a16:creationId xmlns:a16="http://schemas.microsoft.com/office/drawing/2014/main" id="{A7EE2F0E-7E19-A9FE-7B17-290FD12742F9}"/>
-              </a:ext>
-            </a:extLst>
-          </p:cNvPr>
-          <p:cNvSpPr>
-            <a:spLocks noGrp="1"/>
-          </p:cNvSpPr>
-          <p:nvPr>
-            <p:ph type="body" sz="quarter" idx="23"/>
-          </p:nvPr>
-        </p:nvSpPr>
-        <p:spPr/>
-        <p:txBody>
-          <a:bodyPr/>
-          <a:lstStyle/>
-          <a:p>
-            <a:endParaRPr lang="en-CZ"/>
-          </a:p>
-        </p:txBody>
-      </p:sp>
-      <p:sp>
-        <p:nvSpPr>
-          <p:cNvPr id="10" name="Text Placeholder 9">
-            <a:extLst>
-              <a:ext uri="{FF2B5EF4-FFF2-40B4-BE49-F238E27FC236}">
-                <a16:creationId xmlns:a16="http://schemas.microsoft.com/office/drawing/2014/main" id="{B4D40919-1157-3E1B-63E3-2972711756BA}"/>
-              </a:ext>
-            </a:extLst>
-          </p:cNvPr>
-          <p:cNvSpPr>
-            <a:spLocks noGrp="1"/>
-          </p:cNvSpPr>
-          <p:nvPr>
-            <p:ph type="body" sz="quarter" idx="24"/>
-          </p:nvPr>
-        </p:nvSpPr>
-        <p:spPr/>
-        <p:txBody>
-          <a:bodyPr/>
-          <a:lstStyle/>
-          <a:p>
-            <a:endParaRPr lang="en-CZ"/>
-          </a:p>
-        </p:txBody>
-      </p:sp>
-      <p:sp>
-        <p:nvSpPr>
-          <p:cNvPr id="11" name="Text Placeholder 10">
-            <a:extLst>
-              <a:ext uri="{FF2B5EF4-FFF2-40B4-BE49-F238E27FC236}">
-                <a16:creationId xmlns:a16="http://schemas.microsoft.com/office/drawing/2014/main" id="{3D51226A-E6BA-D932-73A3-909F0414A690}"/>
-              </a:ext>
-            </a:extLst>
-          </p:cNvPr>
-          <p:cNvSpPr>
-            <a:spLocks noGrp="1"/>
-          </p:cNvSpPr>
-          <p:nvPr>
-            <p:ph type="body" sz="quarter" idx="25"/>
-          </p:nvPr>
-        </p:nvSpPr>
-        <p:spPr/>
-        <p:txBody>
-          <a:bodyPr/>
-          <a:lstStyle/>
-          <a:p>
-            <a:endParaRPr lang="en-CZ"/>
-          </a:p>
-        </p:txBody>
-      </p:sp>
-    </p:spTree>
-    <p:extLst>
-      <p:ext uri="{BB962C8B-B14F-4D97-AF65-F5344CB8AC3E}">
-        <p14:creationId xmlns:p14="http://schemas.microsoft.com/office/powerpoint/2010/main" val="2953291926"/>
-      </p:ext>
-    </p:extLst>
-  </p:cSld>
-  <p:clrMapOvr>
-    <a:masterClrMapping/>
-  </p:clrMapOvr>
-</p:sld>
-</file>
-
-<file path=ppt/slides/slide11.xml><?xml version="1.0" encoding="utf-8"?>
-<p:sld xmlns:a="http://schemas.openxmlformats.org/drawingml/2006/main" xmlns:r="http://schemas.openxmlformats.org/officeDocument/2006/relationships" xmlns:p="http://schemas.openxmlformats.org/presentationml/2006/main">
-  <p:cSld>
-    <p:spTree>
-      <p:nvGrpSpPr>
-        <p:cNvPr id="1" name=""/>
-        <p:cNvGrpSpPr/>
-        <p:nvPr/>
-      </p:nvGrpSpPr>
-      <p:grpSpPr>
-        <a:xfrm>
-          <a:off x="0" y="0"/>
-          <a:ext cx="0" cy="0"/>
-          <a:chOff x="0" y="0"/>
-          <a:chExt cx="0" cy="0"/>
-        </a:xfrm>
-      </p:grpSpPr>
-      <p:sp>
-        <p:nvSpPr>
-          <p:cNvPr id="2" name="Slide Number Placeholder 1">
-            <a:extLst>
-              <a:ext uri="{FF2B5EF4-FFF2-40B4-BE49-F238E27FC236}">
-                <a16:creationId xmlns:a16="http://schemas.microsoft.com/office/drawing/2014/main" id="{BCD4CEDF-7D3F-892B-8C09-C931CBCC324F}"/>
-              </a:ext>
-            </a:extLst>
-          </p:cNvPr>
-          <p:cNvSpPr>
-            <a:spLocks noGrp="1"/>
-          </p:cNvSpPr>
-          <p:nvPr>
-            <p:ph type="sldNum" sz="quarter" idx="12"/>
-          </p:nvPr>
-        </p:nvSpPr>
-        <p:spPr/>
-        <p:txBody>
-          <a:bodyPr/>
-          <a:lstStyle/>
-          <a:p>
-            <a:fld id="{5AF2E7C1-CA82-F241-8934-AACDE30393F4}" type="slidenum">
-              <a:rPr lang="en-CZ" smtClean="0"/>
-              <a:pPr/>
-              <a:t>11</a:t>
-            </a:fld>
-            <a:endParaRPr lang="en-CZ" dirty="0"/>
-          </a:p>
-        </p:txBody>
-      </p:sp>
-      <p:sp>
-        <p:nvSpPr>
-          <p:cNvPr id="3" name="Text Placeholder 2">
-            <a:extLst>
-              <a:ext uri="{FF2B5EF4-FFF2-40B4-BE49-F238E27FC236}">
-                <a16:creationId xmlns:a16="http://schemas.microsoft.com/office/drawing/2014/main" id="{F4CB88B4-17A5-88F7-CA1E-BE2E9210906F}"/>
-              </a:ext>
-            </a:extLst>
-          </p:cNvPr>
-          <p:cNvSpPr>
-            <a:spLocks noGrp="1"/>
-          </p:cNvSpPr>
-          <p:nvPr>
-            <p:ph type="body" sz="quarter" idx="13"/>
-          </p:nvPr>
-        </p:nvSpPr>
-        <p:spPr/>
-        <p:txBody>
-          <a:bodyPr/>
-          <a:lstStyle/>
-          <a:p>
-            <a:endParaRPr lang="en-CZ"/>
-          </a:p>
-        </p:txBody>
-      </p:sp>
-      <p:sp>
-        <p:nvSpPr>
-          <p:cNvPr id="4" name="Text Placeholder 3">
-            <a:extLst>
-              <a:ext uri="{FF2B5EF4-FFF2-40B4-BE49-F238E27FC236}">
-                <a16:creationId xmlns:a16="http://schemas.microsoft.com/office/drawing/2014/main" id="{ED306F95-9D83-3189-61EA-3F596D608E7B}"/>
-              </a:ext>
-            </a:extLst>
-          </p:cNvPr>
-          <p:cNvSpPr>
-            <a:spLocks noGrp="1"/>
-          </p:cNvSpPr>
-          <p:nvPr>
-            <p:ph type="body" sz="quarter" idx="14"/>
-          </p:nvPr>
-        </p:nvSpPr>
-        <p:spPr/>
-        <p:txBody>
-          <a:bodyPr/>
-          <a:lstStyle/>
-          <a:p>
-            <a:endParaRPr lang="en-CZ"/>
-          </a:p>
-        </p:txBody>
-      </p:sp>
-      <p:sp>
-        <p:nvSpPr>
-          <p:cNvPr id="5" name="Footer Placeholder 4">
-            <a:extLst>
-              <a:ext uri="{FF2B5EF4-FFF2-40B4-BE49-F238E27FC236}">
-                <a16:creationId xmlns:a16="http://schemas.microsoft.com/office/drawing/2014/main" id="{ACAC484C-2B8F-D0B7-51BB-C362A10ECDA6}"/>
-              </a:ext>
-            </a:extLst>
-          </p:cNvPr>
-          <p:cNvSpPr>
-            <a:spLocks noGrp="1"/>
-          </p:cNvSpPr>
-          <p:nvPr>
-            <p:ph type="ftr" sz="quarter" idx="15"/>
-          </p:nvPr>
-        </p:nvSpPr>
-        <p:spPr/>
-        <p:txBody>
-          <a:bodyPr/>
-          <a:lstStyle/>
-          <a:p>
-            <a:r>
-              <a:rPr lang="en-GB"/>
-              <a:t>PPT Template 2.0</a:t>
-            </a:r>
-            <a:endParaRPr lang="en-CZ" dirty="0"/>
-          </a:p>
-        </p:txBody>
-      </p:sp>
-      <p:sp>
-        <p:nvSpPr>
-          <p:cNvPr id="6" name="Picture Placeholder 5">
-            <a:extLst>
-              <a:ext uri="{FF2B5EF4-FFF2-40B4-BE49-F238E27FC236}">
-                <a16:creationId xmlns:a16="http://schemas.microsoft.com/office/drawing/2014/main" id="{16251E05-9D2B-5B4E-49D2-A267CED6F2D5}"/>
-              </a:ext>
-            </a:extLst>
-          </p:cNvPr>
-          <p:cNvSpPr>
-            <a:spLocks noGrp="1"/>
-          </p:cNvSpPr>
-          <p:nvPr>
-            <p:ph type="pic" sz="quarter" idx="19"/>
-          </p:nvPr>
-        </p:nvSpPr>
-        <p:spPr/>
-        <p:txBody>
-          <a:bodyPr/>
-          <a:lstStyle/>
-          <a:p>
-            <a:endParaRPr lang="en-CZ"/>
-          </a:p>
-        </p:txBody>
-      </p:sp>
-      <p:sp>
-        <p:nvSpPr>
-          <p:cNvPr id="7" name="Text Placeholder 6">
-            <a:extLst>
-              <a:ext uri="{FF2B5EF4-FFF2-40B4-BE49-F238E27FC236}">
-                <a16:creationId xmlns:a16="http://schemas.microsoft.com/office/drawing/2014/main" id="{98016CC4-0578-B6DB-4F2C-03C0A1F6CA00}"/>
-              </a:ext>
-            </a:extLst>
-          </p:cNvPr>
-          <p:cNvSpPr>
-            <a:spLocks noGrp="1"/>
-          </p:cNvSpPr>
-          <p:nvPr>
-            <p:ph type="body" sz="quarter" idx="18"/>
-          </p:nvPr>
-        </p:nvSpPr>
-        <p:spPr/>
-        <p:txBody>
-          <a:bodyPr/>
-          <a:lstStyle/>
-          <a:p>
-            <a:endParaRPr lang="en-CZ"/>
-          </a:p>
-        </p:txBody>
-      </p:sp>
-    </p:spTree>
-    <p:extLst>
-      <p:ext uri="{BB962C8B-B14F-4D97-AF65-F5344CB8AC3E}">
-        <p14:creationId xmlns:p14="http://schemas.microsoft.com/office/powerpoint/2010/main" val="3245262921"/>
-      </p:ext>
-    </p:extLst>
-  </p:cSld>
-  <p:clrMapOvr>
-    <a:masterClrMapping/>
-  </p:clrMapOvr>
-</p:sld>
-</file>
-
-<file path=ppt/slides/slide12.xml><?xml version="1.0" encoding="utf-8"?>
-<p:sld xmlns:a="http://schemas.openxmlformats.org/drawingml/2006/main" xmlns:r="http://schemas.openxmlformats.org/officeDocument/2006/relationships" xmlns:p="http://schemas.openxmlformats.org/presentationml/2006/main">
-  <p:cSld>
-    <p:spTree>
-      <p:nvGrpSpPr>
-        <p:cNvPr id="1" name=""/>
-        <p:cNvGrpSpPr/>
-        <p:nvPr/>
-      </p:nvGrpSpPr>
-      <p:grpSpPr>
-        <a:xfrm>
-          <a:off x="0" y="0"/>
-          <a:ext cx="0" cy="0"/>
-          <a:chOff x="0" y="0"/>
-          <a:chExt cx="0" cy="0"/>
-        </a:xfrm>
-      </p:grpSpPr>
-      <p:sp>
-        <p:nvSpPr>
-          <p:cNvPr id="2" name="Slide Number Placeholder 1">
-            <a:extLst>
-              <a:ext uri="{FF2B5EF4-FFF2-40B4-BE49-F238E27FC236}">
-                <a16:creationId xmlns:a16="http://schemas.microsoft.com/office/drawing/2014/main" id="{64E9BB2D-54E1-1DCF-6A9B-ECA8E4293CB8}"/>
-              </a:ext>
-            </a:extLst>
-          </p:cNvPr>
-          <p:cNvSpPr>
-            <a:spLocks noGrp="1"/>
-          </p:cNvSpPr>
-          <p:nvPr>
-            <p:ph type="sldNum" sz="quarter" idx="12"/>
-          </p:nvPr>
-        </p:nvSpPr>
-        <p:spPr/>
-        <p:txBody>
-          <a:bodyPr/>
-          <a:lstStyle/>
-          <a:p>
-            <a:fld id="{5AF2E7C1-CA82-F241-8934-AACDE30393F4}" type="slidenum">
-              <a:rPr lang="en-CZ" smtClean="0"/>
-              <a:pPr/>
-              <a:t>12</a:t>
-            </a:fld>
-            <a:endParaRPr lang="en-CZ" dirty="0"/>
-          </a:p>
-        </p:txBody>
-      </p:sp>
-      <p:sp>
-        <p:nvSpPr>
-          <p:cNvPr id="3" name="Text Placeholder 2">
-            <a:extLst>
-              <a:ext uri="{FF2B5EF4-FFF2-40B4-BE49-F238E27FC236}">
-                <a16:creationId xmlns:a16="http://schemas.microsoft.com/office/drawing/2014/main" id="{AA5C5339-D427-D3EA-4D13-67BAB7896650}"/>
-              </a:ext>
-            </a:extLst>
-          </p:cNvPr>
-          <p:cNvSpPr>
-            <a:spLocks noGrp="1"/>
-          </p:cNvSpPr>
-          <p:nvPr>
-            <p:ph type="body" sz="quarter" idx="13"/>
-          </p:nvPr>
-        </p:nvSpPr>
-        <p:spPr/>
-        <p:txBody>
-          <a:bodyPr/>
-          <a:lstStyle/>
-          <a:p>
-            <a:endParaRPr lang="en-CZ"/>
-          </a:p>
-        </p:txBody>
-      </p:sp>
-      <p:sp>
-        <p:nvSpPr>
-          <p:cNvPr id="4" name="Text Placeholder 3">
-            <a:extLst>
-              <a:ext uri="{FF2B5EF4-FFF2-40B4-BE49-F238E27FC236}">
-                <a16:creationId xmlns:a16="http://schemas.microsoft.com/office/drawing/2014/main" id="{DA906090-505A-8236-C431-86852564B022}"/>
-              </a:ext>
-            </a:extLst>
-          </p:cNvPr>
-          <p:cNvSpPr>
-            <a:spLocks noGrp="1"/>
-          </p:cNvSpPr>
-          <p:nvPr>
-            <p:ph type="body" sz="quarter" idx="14"/>
-          </p:nvPr>
-        </p:nvSpPr>
-        <p:spPr/>
-        <p:txBody>
-          <a:bodyPr/>
-          <a:lstStyle/>
-          <a:p>
-            <a:endParaRPr lang="en-CZ"/>
-          </a:p>
-        </p:txBody>
-      </p:sp>
-      <p:sp>
-        <p:nvSpPr>
-          <p:cNvPr id="5" name="Footer Placeholder 4">
-            <a:extLst>
-              <a:ext uri="{FF2B5EF4-FFF2-40B4-BE49-F238E27FC236}">
-                <a16:creationId xmlns:a16="http://schemas.microsoft.com/office/drawing/2014/main" id="{AE0DA76B-2338-E1E4-995A-681B66464AE5}"/>
-              </a:ext>
-            </a:extLst>
-          </p:cNvPr>
-          <p:cNvSpPr>
-            <a:spLocks noGrp="1"/>
-          </p:cNvSpPr>
-          <p:nvPr>
-            <p:ph type="ftr" sz="quarter" idx="15"/>
-          </p:nvPr>
-        </p:nvSpPr>
-        <p:spPr/>
-        <p:txBody>
-          <a:bodyPr/>
-          <a:lstStyle/>
-          <a:p>
-            <a:r>
-              <a:rPr lang="en-GB"/>
-              <a:t>PPT Template 2.0</a:t>
-            </a:r>
-            <a:endParaRPr lang="en-CZ" dirty="0"/>
-          </a:p>
-        </p:txBody>
-      </p:sp>
-      <p:sp>
-        <p:nvSpPr>
-          <p:cNvPr id="6" name="Picture Placeholder 5">
-            <a:extLst>
-              <a:ext uri="{FF2B5EF4-FFF2-40B4-BE49-F238E27FC236}">
-                <a16:creationId xmlns:a16="http://schemas.microsoft.com/office/drawing/2014/main" id="{171F1C3F-8E00-926B-0D20-610651611152}"/>
-              </a:ext>
-            </a:extLst>
-          </p:cNvPr>
-          <p:cNvSpPr>
-            <a:spLocks noGrp="1"/>
-          </p:cNvSpPr>
-          <p:nvPr>
-            <p:ph type="pic" sz="quarter" idx="19"/>
-          </p:nvPr>
-        </p:nvSpPr>
-        <p:spPr/>
-        <p:txBody>
-          <a:bodyPr/>
-          <a:lstStyle/>
-          <a:p>
-            <a:endParaRPr lang="en-CZ"/>
-          </a:p>
-        </p:txBody>
-      </p:sp>
-      <p:sp>
-        <p:nvSpPr>
-          <p:cNvPr id="7" name="Text Placeholder 6">
-            <a:extLst>
-              <a:ext uri="{FF2B5EF4-FFF2-40B4-BE49-F238E27FC236}">
-                <a16:creationId xmlns:a16="http://schemas.microsoft.com/office/drawing/2014/main" id="{1314B94F-3262-7A95-6C16-D1BC7D5846CF}"/>
-              </a:ext>
-            </a:extLst>
-          </p:cNvPr>
-          <p:cNvSpPr>
-            <a:spLocks noGrp="1"/>
-          </p:cNvSpPr>
-          <p:nvPr>
-            <p:ph type="body" sz="quarter" idx="18"/>
-          </p:nvPr>
-        </p:nvSpPr>
-        <p:spPr/>
-        <p:txBody>
-          <a:bodyPr/>
-          <a:lstStyle/>
-          <a:p>
-            <a:endParaRPr lang="en-CZ"/>
-          </a:p>
-        </p:txBody>
-      </p:sp>
-      <p:sp>
-        <p:nvSpPr>
-          <p:cNvPr id="8" name="Picture Placeholder 7">
-            <a:extLst>
-              <a:ext uri="{FF2B5EF4-FFF2-40B4-BE49-F238E27FC236}">
-                <a16:creationId xmlns:a16="http://schemas.microsoft.com/office/drawing/2014/main" id="{09E6DCDA-B716-4947-CCFF-F422F6806FC0}"/>
-              </a:ext>
-            </a:extLst>
-          </p:cNvPr>
-          <p:cNvSpPr>
-            <a:spLocks noGrp="1"/>
-          </p:cNvSpPr>
-          <p:nvPr>
-            <p:ph type="pic" sz="quarter" idx="20"/>
-          </p:nvPr>
-        </p:nvSpPr>
-        <p:spPr/>
-        <p:txBody>
-          <a:bodyPr/>
-          <a:lstStyle/>
-          <a:p>
-            <a:endParaRPr lang="en-CZ"/>
-          </a:p>
-        </p:txBody>
-      </p:sp>
-      <p:sp>
-        <p:nvSpPr>
-          <p:cNvPr id="9" name="Text Placeholder 8">
-            <a:extLst>
-              <a:ext uri="{FF2B5EF4-FFF2-40B4-BE49-F238E27FC236}">
-                <a16:creationId xmlns:a16="http://schemas.microsoft.com/office/drawing/2014/main" id="{E42BF366-717A-F5F6-30E6-0D489765962A}"/>
-              </a:ext>
-            </a:extLst>
-          </p:cNvPr>
-          <p:cNvSpPr>
-            <a:spLocks noGrp="1"/>
-          </p:cNvSpPr>
-          <p:nvPr>
-            <p:ph type="body" sz="quarter" idx="21"/>
-          </p:nvPr>
-        </p:nvSpPr>
-        <p:spPr/>
-        <p:txBody>
-          <a:bodyPr/>
-          <a:lstStyle/>
-          <a:p>
-            <a:endParaRPr lang="en-CZ"/>
-          </a:p>
-        </p:txBody>
-      </p:sp>
-    </p:spTree>
-    <p:extLst>
-      <p:ext uri="{BB962C8B-B14F-4D97-AF65-F5344CB8AC3E}">
-        <p14:creationId xmlns:p14="http://schemas.microsoft.com/office/powerpoint/2010/main" val="1262528993"/>
-      </p:ext>
-    </p:extLst>
-  </p:cSld>
-  <p:clrMapOvr>
-    <a:masterClrMapping/>
-  </p:clrMapOvr>
-</p:sld>
-</file>
-
-<file path=ppt/slides/slide13.xml><?xml version="1.0" encoding="utf-8"?>
-<p:sld xmlns:a="http://schemas.openxmlformats.org/drawingml/2006/main" xmlns:r="http://schemas.openxmlformats.org/officeDocument/2006/relationships" xmlns:p="http://schemas.openxmlformats.org/presentationml/2006/main">
-  <p:cSld>
-    <p:spTree>
-      <p:nvGrpSpPr>
-        <p:cNvPr id="1" name=""/>
-        <p:cNvGrpSpPr/>
-        <p:nvPr/>
-      </p:nvGrpSpPr>
-      <p:grpSpPr>
-        <a:xfrm>
-          <a:off x="0" y="0"/>
-          <a:ext cx="0" cy="0"/>
-          <a:chOff x="0" y="0"/>
-          <a:chExt cx="0" cy="0"/>
-        </a:xfrm>
-      </p:grpSpPr>
-      <p:sp>
-        <p:nvSpPr>
-          <p:cNvPr id="2" name="Slide Number Placeholder 1">
-            <a:extLst>
-              <a:ext uri="{FF2B5EF4-FFF2-40B4-BE49-F238E27FC236}">
-                <a16:creationId xmlns:a16="http://schemas.microsoft.com/office/drawing/2014/main" id="{ECE4AABE-4496-6C9E-80A0-8A3C29BACB5E}"/>
-              </a:ext>
-            </a:extLst>
-          </p:cNvPr>
-          <p:cNvSpPr>
-            <a:spLocks noGrp="1"/>
-          </p:cNvSpPr>
-          <p:nvPr>
-            <p:ph type="sldNum" sz="quarter" idx="12"/>
-          </p:nvPr>
-        </p:nvSpPr>
-        <p:spPr/>
-        <p:txBody>
-          <a:bodyPr/>
-          <a:lstStyle/>
-          <a:p>
-            <a:fld id="{5AF2E7C1-CA82-F241-8934-AACDE30393F4}" type="slidenum">
-              <a:rPr lang="en-CZ" smtClean="0"/>
-              <a:pPr/>
-              <a:t>13</a:t>
-            </a:fld>
-            <a:endParaRPr lang="en-CZ" dirty="0"/>
-          </a:p>
-        </p:txBody>
-      </p:sp>
-      <p:sp>
-        <p:nvSpPr>
-          <p:cNvPr id="3" name="Text Placeholder 2">
-            <a:extLst>
-              <a:ext uri="{FF2B5EF4-FFF2-40B4-BE49-F238E27FC236}">
-                <a16:creationId xmlns:a16="http://schemas.microsoft.com/office/drawing/2014/main" id="{BB3450FB-8C5E-6D63-3D01-8A89CB8E77F7}"/>
-              </a:ext>
-            </a:extLst>
-          </p:cNvPr>
-          <p:cNvSpPr>
-            <a:spLocks noGrp="1"/>
-          </p:cNvSpPr>
-          <p:nvPr>
-            <p:ph type="body" sz="quarter" idx="13"/>
-          </p:nvPr>
-        </p:nvSpPr>
-        <p:spPr/>
-        <p:txBody>
-          <a:bodyPr/>
-          <a:lstStyle/>
-          <a:p>
-            <a:endParaRPr lang="en-CZ"/>
-          </a:p>
-        </p:txBody>
-      </p:sp>
-      <p:sp>
-        <p:nvSpPr>
-          <p:cNvPr id="4" name="Text Placeholder 3">
-            <a:extLst>
-              <a:ext uri="{FF2B5EF4-FFF2-40B4-BE49-F238E27FC236}">
-                <a16:creationId xmlns:a16="http://schemas.microsoft.com/office/drawing/2014/main" id="{5A77CE9E-7A9C-F77C-2680-59F38DFE5EF7}"/>
-              </a:ext>
-            </a:extLst>
-          </p:cNvPr>
-          <p:cNvSpPr>
-            <a:spLocks noGrp="1"/>
-          </p:cNvSpPr>
-          <p:nvPr>
-            <p:ph type="body" sz="quarter" idx="14"/>
-          </p:nvPr>
-        </p:nvSpPr>
-        <p:spPr/>
-        <p:txBody>
-          <a:bodyPr/>
-          <a:lstStyle/>
-          <a:p>
-            <a:endParaRPr lang="en-CZ"/>
-          </a:p>
-        </p:txBody>
-      </p:sp>
-      <p:sp>
-        <p:nvSpPr>
-          <p:cNvPr id="5" name="Footer Placeholder 4">
-            <a:extLst>
-              <a:ext uri="{FF2B5EF4-FFF2-40B4-BE49-F238E27FC236}">
-                <a16:creationId xmlns:a16="http://schemas.microsoft.com/office/drawing/2014/main" id="{DB3BA671-BDD1-069B-4091-E5667A07070F}"/>
-              </a:ext>
-            </a:extLst>
-          </p:cNvPr>
-          <p:cNvSpPr>
-            <a:spLocks noGrp="1"/>
-          </p:cNvSpPr>
-          <p:nvPr>
-            <p:ph type="ftr" sz="quarter" idx="15"/>
-          </p:nvPr>
-        </p:nvSpPr>
-        <p:spPr/>
-        <p:txBody>
-          <a:bodyPr/>
-          <a:lstStyle/>
-          <a:p>
-            <a:r>
-              <a:rPr lang="en-GB"/>
-              <a:t>PPT Template 2.0</a:t>
-            </a:r>
-            <a:endParaRPr lang="en-CZ" dirty="0"/>
-          </a:p>
-        </p:txBody>
-      </p:sp>
-      <p:sp>
-        <p:nvSpPr>
-          <p:cNvPr id="6" name="Picture Placeholder 5">
-            <a:extLst>
-              <a:ext uri="{FF2B5EF4-FFF2-40B4-BE49-F238E27FC236}">
-                <a16:creationId xmlns:a16="http://schemas.microsoft.com/office/drawing/2014/main" id="{922A758D-D48D-93D7-0DEC-98B2C9CB840E}"/>
-              </a:ext>
-            </a:extLst>
-          </p:cNvPr>
-          <p:cNvSpPr>
-            <a:spLocks noGrp="1"/>
-          </p:cNvSpPr>
-          <p:nvPr>
-            <p:ph type="pic" sz="quarter" idx="19"/>
-          </p:nvPr>
-        </p:nvSpPr>
-        <p:spPr/>
-        <p:txBody>
-          <a:bodyPr/>
-          <a:lstStyle/>
-          <a:p>
-            <a:endParaRPr lang="en-CZ"/>
-          </a:p>
-        </p:txBody>
-      </p:sp>
-      <p:sp>
-        <p:nvSpPr>
-          <p:cNvPr id="7" name="Text Placeholder 6">
-            <a:extLst>
-              <a:ext uri="{FF2B5EF4-FFF2-40B4-BE49-F238E27FC236}">
-                <a16:creationId xmlns:a16="http://schemas.microsoft.com/office/drawing/2014/main" id="{9CA2A77D-B868-0903-4E52-2A32047A0307}"/>
-              </a:ext>
-            </a:extLst>
-          </p:cNvPr>
-          <p:cNvSpPr>
-            <a:spLocks noGrp="1"/>
-          </p:cNvSpPr>
-          <p:nvPr>
-            <p:ph type="body" sz="quarter" idx="18"/>
-          </p:nvPr>
-        </p:nvSpPr>
-        <p:spPr/>
-        <p:txBody>
-          <a:bodyPr/>
-          <a:lstStyle/>
-          <a:p>
-            <a:endParaRPr lang="en-CZ"/>
-          </a:p>
-        </p:txBody>
-      </p:sp>
-      <p:sp>
-        <p:nvSpPr>
-          <p:cNvPr id="8" name="Picture Placeholder 7">
-            <a:extLst>
-              <a:ext uri="{FF2B5EF4-FFF2-40B4-BE49-F238E27FC236}">
-                <a16:creationId xmlns:a16="http://schemas.microsoft.com/office/drawing/2014/main" id="{25BC3D26-D7B3-5DAE-9621-0961F5C1E574}"/>
-              </a:ext>
-            </a:extLst>
-          </p:cNvPr>
-          <p:cNvSpPr>
-            <a:spLocks noGrp="1"/>
-          </p:cNvSpPr>
-          <p:nvPr>
-            <p:ph type="pic" sz="quarter" idx="20"/>
-          </p:nvPr>
-        </p:nvSpPr>
-        <p:spPr/>
-        <p:txBody>
-          <a:bodyPr/>
-          <a:lstStyle/>
-          <a:p>
-            <a:endParaRPr lang="en-CZ"/>
-          </a:p>
-        </p:txBody>
-      </p:sp>
-      <p:sp>
-        <p:nvSpPr>
-          <p:cNvPr id="9" name="Text Placeholder 8">
-            <a:extLst>
-              <a:ext uri="{FF2B5EF4-FFF2-40B4-BE49-F238E27FC236}">
-                <a16:creationId xmlns:a16="http://schemas.microsoft.com/office/drawing/2014/main" id="{6FD99D32-2346-F965-4C8C-B77560FC86FE}"/>
-              </a:ext>
-            </a:extLst>
-          </p:cNvPr>
-          <p:cNvSpPr>
-            <a:spLocks noGrp="1"/>
-          </p:cNvSpPr>
-          <p:nvPr>
-            <p:ph type="body" sz="quarter" idx="21"/>
-          </p:nvPr>
-        </p:nvSpPr>
-        <p:spPr/>
-        <p:txBody>
-          <a:bodyPr/>
-          <a:lstStyle/>
-          <a:p>
-            <a:endParaRPr lang="en-CZ"/>
-          </a:p>
-        </p:txBody>
-      </p:sp>
-      <p:sp>
-        <p:nvSpPr>
-          <p:cNvPr id="10" name="Picture Placeholder 9">
-            <a:extLst>
-              <a:ext uri="{FF2B5EF4-FFF2-40B4-BE49-F238E27FC236}">
-                <a16:creationId xmlns:a16="http://schemas.microsoft.com/office/drawing/2014/main" id="{7AAF3675-F0FD-C774-B255-8C544689D2FC}"/>
-              </a:ext>
-            </a:extLst>
-          </p:cNvPr>
-          <p:cNvSpPr>
-            <a:spLocks noGrp="1"/>
-          </p:cNvSpPr>
-          <p:nvPr>
-            <p:ph type="pic" sz="quarter" idx="22"/>
-          </p:nvPr>
-        </p:nvSpPr>
-        <p:spPr/>
-        <p:txBody>
-          <a:bodyPr/>
-          <a:lstStyle/>
-          <a:p>
-            <a:endParaRPr lang="en-CZ"/>
-          </a:p>
-        </p:txBody>
-      </p:sp>
-      <p:sp>
-        <p:nvSpPr>
-          <p:cNvPr id="11" name="Text Placeholder 10">
-            <a:extLst>
-              <a:ext uri="{FF2B5EF4-FFF2-40B4-BE49-F238E27FC236}">
-                <a16:creationId xmlns:a16="http://schemas.microsoft.com/office/drawing/2014/main" id="{549929DF-7FCB-34FC-65E0-7122BF732A2B}"/>
-              </a:ext>
-            </a:extLst>
-          </p:cNvPr>
-          <p:cNvSpPr>
-            <a:spLocks noGrp="1"/>
-          </p:cNvSpPr>
-          <p:nvPr>
-            <p:ph type="body" sz="quarter" idx="23"/>
-          </p:nvPr>
-        </p:nvSpPr>
-        <p:spPr/>
-        <p:txBody>
-          <a:bodyPr/>
-          <a:lstStyle/>
-          <a:p>
-            <a:endParaRPr lang="en-CZ"/>
-          </a:p>
-        </p:txBody>
-      </p:sp>
-    </p:spTree>
-    <p:extLst>
-      <p:ext uri="{BB962C8B-B14F-4D97-AF65-F5344CB8AC3E}">
-        <p14:creationId xmlns:p14="http://schemas.microsoft.com/office/powerpoint/2010/main" val="2752685206"/>
-      </p:ext>
-    </p:extLst>
-  </p:cSld>
-  <p:clrMapOvr>
-    <a:masterClrMapping/>
-  </p:clrMapOvr>
-</p:sld>
-</file>
-
-<file path=ppt/slides/slide14.xml><?xml version="1.0" encoding="utf-8"?>
-<p:sld xmlns:a="http://schemas.openxmlformats.org/drawingml/2006/main" xmlns:r="http://schemas.openxmlformats.org/officeDocument/2006/relationships" xmlns:p="http://schemas.openxmlformats.org/presentationml/2006/main">
-  <p:cSld>
-    <p:spTree>
-      <p:nvGrpSpPr>
-        <p:cNvPr id="1" name=""/>
-        <p:cNvGrpSpPr/>
-        <p:nvPr/>
-      </p:nvGrpSpPr>
-      <p:grpSpPr>
-        <a:xfrm>
-          <a:off x="0" y="0"/>
-          <a:ext cx="0" cy="0"/>
-          <a:chOff x="0" y="0"/>
-          <a:chExt cx="0" cy="0"/>
-        </a:xfrm>
-      </p:grpSpPr>
-      <p:sp>
-        <p:nvSpPr>
-          <p:cNvPr id="2" name="Slide Number Placeholder 1">
-            <a:extLst>
-              <a:ext uri="{FF2B5EF4-FFF2-40B4-BE49-F238E27FC236}">
-                <a16:creationId xmlns:a16="http://schemas.microsoft.com/office/drawing/2014/main" id="{63B4A581-4894-D7EB-4F32-6087802D7999}"/>
-              </a:ext>
-            </a:extLst>
-          </p:cNvPr>
-          <p:cNvSpPr>
-            <a:spLocks noGrp="1"/>
-          </p:cNvSpPr>
-          <p:nvPr>
-            <p:ph type="sldNum" sz="quarter" idx="12"/>
-          </p:nvPr>
-        </p:nvSpPr>
-        <p:spPr/>
-        <p:txBody>
-          <a:bodyPr/>
-          <a:lstStyle/>
-          <a:p>
-            <a:fld id="{5AF2E7C1-CA82-F241-8934-AACDE30393F4}" type="slidenum">
-              <a:rPr lang="en-CZ" smtClean="0"/>
-              <a:pPr/>
-              <a:t>14</a:t>
-            </a:fld>
-            <a:endParaRPr lang="en-CZ" dirty="0"/>
-          </a:p>
-        </p:txBody>
-      </p:sp>
-      <p:sp>
-        <p:nvSpPr>
-          <p:cNvPr id="3" name="Text Placeholder 2">
-            <a:extLst>
-              <a:ext uri="{FF2B5EF4-FFF2-40B4-BE49-F238E27FC236}">
-                <a16:creationId xmlns:a16="http://schemas.microsoft.com/office/drawing/2014/main" id="{ED0BDDC4-ABD9-8015-CC57-25AF107F8BEE}"/>
-              </a:ext>
-            </a:extLst>
-          </p:cNvPr>
-          <p:cNvSpPr>
-            <a:spLocks noGrp="1"/>
-          </p:cNvSpPr>
-          <p:nvPr>
-            <p:ph type="body" sz="quarter" idx="13"/>
-          </p:nvPr>
-        </p:nvSpPr>
-        <p:spPr/>
-        <p:txBody>
-          <a:bodyPr/>
-          <a:lstStyle/>
-          <a:p>
-            <a:endParaRPr lang="en-CZ"/>
-          </a:p>
-        </p:txBody>
-      </p:sp>
-      <p:sp>
-        <p:nvSpPr>
-          <p:cNvPr id="4" name="Text Placeholder 3">
-            <a:extLst>
-              <a:ext uri="{FF2B5EF4-FFF2-40B4-BE49-F238E27FC236}">
-                <a16:creationId xmlns:a16="http://schemas.microsoft.com/office/drawing/2014/main" id="{460BFB02-BE60-C3C0-9C61-5B1EBF09871D}"/>
-              </a:ext>
-            </a:extLst>
-          </p:cNvPr>
-          <p:cNvSpPr>
-            <a:spLocks noGrp="1"/>
-          </p:cNvSpPr>
-          <p:nvPr>
-            <p:ph type="body" sz="quarter" idx="14"/>
-          </p:nvPr>
-        </p:nvSpPr>
-        <p:spPr/>
-        <p:txBody>
-          <a:bodyPr/>
-          <a:lstStyle/>
-          <a:p>
-            <a:endParaRPr lang="en-CZ"/>
-          </a:p>
-        </p:txBody>
-      </p:sp>
-      <p:sp>
-        <p:nvSpPr>
-          <p:cNvPr id="5" name="Footer Placeholder 4">
-            <a:extLst>
-              <a:ext uri="{FF2B5EF4-FFF2-40B4-BE49-F238E27FC236}">
-                <a16:creationId xmlns:a16="http://schemas.microsoft.com/office/drawing/2014/main" id="{50815008-6261-E3E0-1D60-982A472629FC}"/>
-              </a:ext>
-            </a:extLst>
-          </p:cNvPr>
-          <p:cNvSpPr>
-            <a:spLocks noGrp="1"/>
-          </p:cNvSpPr>
-          <p:nvPr>
-            <p:ph type="ftr" sz="quarter" idx="15"/>
-          </p:nvPr>
-        </p:nvSpPr>
-        <p:spPr/>
-        <p:txBody>
-          <a:bodyPr/>
-          <a:lstStyle/>
-          <a:p>
-            <a:r>
-              <a:rPr lang="en-GB"/>
-              <a:t>PPT Template 2.0</a:t>
-            </a:r>
-            <a:endParaRPr lang="en-CZ" dirty="0"/>
-          </a:p>
-        </p:txBody>
-      </p:sp>
-      <p:sp>
-        <p:nvSpPr>
-          <p:cNvPr id="6" name="Picture Placeholder 5">
-            <a:extLst>
-              <a:ext uri="{FF2B5EF4-FFF2-40B4-BE49-F238E27FC236}">
-                <a16:creationId xmlns:a16="http://schemas.microsoft.com/office/drawing/2014/main" id="{FBF223F0-5715-F7A8-97DA-EFEF4DA0EFF0}"/>
-              </a:ext>
-            </a:extLst>
-          </p:cNvPr>
-          <p:cNvSpPr>
-            <a:spLocks noGrp="1"/>
-          </p:cNvSpPr>
-          <p:nvPr>
-            <p:ph type="pic" sz="quarter" idx="24"/>
-          </p:nvPr>
-        </p:nvSpPr>
-        <p:spPr/>
-        <p:txBody>
-          <a:bodyPr/>
-          <a:lstStyle/>
-          <a:p>
-            <a:endParaRPr lang="en-CZ"/>
-          </a:p>
-        </p:txBody>
-      </p:sp>
-      <p:sp>
-        <p:nvSpPr>
-          <p:cNvPr id="7" name="Text Placeholder 6">
-            <a:extLst>
-              <a:ext uri="{FF2B5EF4-FFF2-40B4-BE49-F238E27FC236}">
-                <a16:creationId xmlns:a16="http://schemas.microsoft.com/office/drawing/2014/main" id="{7CAD3B32-8F27-DD52-ECE9-14060910C1AE}"/>
-              </a:ext>
-            </a:extLst>
-          </p:cNvPr>
-          <p:cNvSpPr>
-            <a:spLocks noGrp="1"/>
-          </p:cNvSpPr>
-          <p:nvPr>
-            <p:ph type="body" sz="quarter" idx="18"/>
-          </p:nvPr>
-        </p:nvSpPr>
-        <p:spPr/>
-        <p:txBody>
-          <a:bodyPr/>
-          <a:lstStyle/>
-          <a:p>
-            <a:endParaRPr lang="en-CZ"/>
-          </a:p>
-        </p:txBody>
-      </p:sp>
-      <p:sp>
-        <p:nvSpPr>
-          <p:cNvPr id="8" name="Picture Placeholder 7">
-            <a:extLst>
-              <a:ext uri="{FF2B5EF4-FFF2-40B4-BE49-F238E27FC236}">
-                <a16:creationId xmlns:a16="http://schemas.microsoft.com/office/drawing/2014/main" id="{5A54C298-566C-C012-96D4-28530AC1EF5B}"/>
-              </a:ext>
-            </a:extLst>
-          </p:cNvPr>
-          <p:cNvSpPr>
-            <a:spLocks noGrp="1"/>
-          </p:cNvSpPr>
-          <p:nvPr>
-            <p:ph type="pic" sz="quarter" idx="25"/>
-          </p:nvPr>
-        </p:nvSpPr>
-        <p:spPr/>
-        <p:txBody>
-          <a:bodyPr/>
-          <a:lstStyle/>
-          <a:p>
-            <a:endParaRPr lang="en-CZ"/>
-          </a:p>
-        </p:txBody>
-      </p:sp>
-      <p:sp>
-        <p:nvSpPr>
-          <p:cNvPr id="9" name="Text Placeholder 8">
-            <a:extLst>
-              <a:ext uri="{FF2B5EF4-FFF2-40B4-BE49-F238E27FC236}">
-                <a16:creationId xmlns:a16="http://schemas.microsoft.com/office/drawing/2014/main" id="{60A01820-B381-91B0-F3CA-D9A6FFA6EEF5}"/>
-              </a:ext>
-            </a:extLst>
-          </p:cNvPr>
-          <p:cNvSpPr>
-            <a:spLocks noGrp="1"/>
-          </p:cNvSpPr>
-          <p:nvPr>
-            <p:ph type="body" sz="quarter" idx="26"/>
-          </p:nvPr>
-        </p:nvSpPr>
-        <p:spPr/>
-        <p:txBody>
-          <a:bodyPr/>
-          <a:lstStyle/>
-          <a:p>
-            <a:endParaRPr lang="en-CZ"/>
-          </a:p>
-        </p:txBody>
-      </p:sp>
-      <p:sp>
-        <p:nvSpPr>
-          <p:cNvPr id="10" name="Picture Placeholder 9">
-            <a:extLst>
-              <a:ext uri="{FF2B5EF4-FFF2-40B4-BE49-F238E27FC236}">
-                <a16:creationId xmlns:a16="http://schemas.microsoft.com/office/drawing/2014/main" id="{3AE7911F-01BF-5C53-79B3-5E1A389B49C8}"/>
-              </a:ext>
-            </a:extLst>
-          </p:cNvPr>
-          <p:cNvSpPr>
-            <a:spLocks noGrp="1"/>
-          </p:cNvSpPr>
-          <p:nvPr>
-            <p:ph type="pic" sz="quarter" idx="27"/>
-          </p:nvPr>
-        </p:nvSpPr>
-        <p:spPr/>
-        <p:txBody>
-          <a:bodyPr/>
-          <a:lstStyle/>
-          <a:p>
-            <a:endParaRPr lang="en-CZ"/>
-          </a:p>
-        </p:txBody>
-      </p:sp>
-      <p:sp>
-        <p:nvSpPr>
-          <p:cNvPr id="11" name="Text Placeholder 10">
-            <a:extLst>
-              <a:ext uri="{FF2B5EF4-FFF2-40B4-BE49-F238E27FC236}">
-                <a16:creationId xmlns:a16="http://schemas.microsoft.com/office/drawing/2014/main" id="{D0827635-6382-629A-F445-F93DBA3773CE}"/>
-              </a:ext>
-            </a:extLst>
-          </p:cNvPr>
-          <p:cNvSpPr>
-            <a:spLocks noGrp="1"/>
-          </p:cNvSpPr>
-          <p:nvPr>
-            <p:ph type="body" sz="quarter" idx="28"/>
-          </p:nvPr>
-        </p:nvSpPr>
-        <p:spPr/>
-        <p:txBody>
-          <a:bodyPr/>
-          <a:lstStyle/>
-          <a:p>
-            <a:endParaRPr lang="en-CZ"/>
-          </a:p>
-        </p:txBody>
-      </p:sp>
-      <p:sp>
-        <p:nvSpPr>
-          <p:cNvPr id="12" name="Picture Placeholder 11">
-            <a:extLst>
-              <a:ext uri="{FF2B5EF4-FFF2-40B4-BE49-F238E27FC236}">
-                <a16:creationId xmlns:a16="http://schemas.microsoft.com/office/drawing/2014/main" id="{665E042F-1C8A-C348-D58D-A47AD85C5424}"/>
-              </a:ext>
-            </a:extLst>
-          </p:cNvPr>
-          <p:cNvSpPr>
-            <a:spLocks noGrp="1"/>
-          </p:cNvSpPr>
-          <p:nvPr>
-            <p:ph type="pic" sz="quarter" idx="29"/>
-          </p:nvPr>
-        </p:nvSpPr>
-        <p:spPr/>
-        <p:txBody>
-          <a:bodyPr/>
-          <a:lstStyle/>
-          <a:p>
-            <a:endParaRPr lang="en-CZ"/>
-          </a:p>
-        </p:txBody>
-      </p:sp>
-      <p:sp>
-        <p:nvSpPr>
-          <p:cNvPr id="13" name="Text Placeholder 12">
-            <a:extLst>
-              <a:ext uri="{FF2B5EF4-FFF2-40B4-BE49-F238E27FC236}">
-                <a16:creationId xmlns:a16="http://schemas.microsoft.com/office/drawing/2014/main" id="{688FC73D-62C0-F10F-9C9F-29AD0DCC3BF4}"/>
-              </a:ext>
-            </a:extLst>
-          </p:cNvPr>
-          <p:cNvSpPr>
-            <a:spLocks noGrp="1"/>
-          </p:cNvSpPr>
-          <p:nvPr>
-            <p:ph type="body" sz="quarter" idx="30"/>
-          </p:nvPr>
-        </p:nvSpPr>
-        <p:spPr/>
-        <p:txBody>
-          <a:bodyPr/>
-          <a:lstStyle/>
-          <a:p>
-            <a:endParaRPr lang="en-CZ"/>
-          </a:p>
-        </p:txBody>
-      </p:sp>
-    </p:spTree>
-    <p:extLst>
-      <p:ext uri="{BB962C8B-B14F-4D97-AF65-F5344CB8AC3E}">
-        <p14:creationId xmlns:p14="http://schemas.microsoft.com/office/powerpoint/2010/main" val="2641939084"/>
-      </p:ext>
-    </p:extLst>
-  </p:cSld>
-  <p:clrMapOvr>
-    <a:masterClrMapping/>
-  </p:clrMapOvr>
-</p:sld>
-</file>
-
-<file path=ppt/slides/slide15.xml><?xml version="1.0" encoding="utf-8"?>
-<p:sld xmlns:a="http://schemas.openxmlformats.org/drawingml/2006/main" xmlns:r="http://schemas.openxmlformats.org/officeDocument/2006/relationships" xmlns:p="http://schemas.openxmlformats.org/presentationml/2006/main">
-  <p:cSld>
-    <p:spTree>
-      <p:nvGrpSpPr>
-        <p:cNvPr id="1" name=""/>
-        <p:cNvGrpSpPr/>
-        <p:nvPr/>
-      </p:nvGrpSpPr>
-      <p:grpSpPr>
-        <a:xfrm>
-          <a:off x="0" y="0"/>
-          <a:ext cx="0" cy="0"/>
-          <a:chOff x="0" y="0"/>
-          <a:chExt cx="0" cy="0"/>
-        </a:xfrm>
-      </p:grpSpPr>
-      <p:sp>
-        <p:nvSpPr>
-          <p:cNvPr id="2" name="Slide Number Placeholder 1">
-            <a:extLst>
-              <a:ext uri="{FF2B5EF4-FFF2-40B4-BE49-F238E27FC236}">
-                <a16:creationId xmlns:a16="http://schemas.microsoft.com/office/drawing/2014/main" id="{B89FAC70-305D-7000-DF0D-FDD11A7526BE}"/>
-              </a:ext>
-            </a:extLst>
-          </p:cNvPr>
-          <p:cNvSpPr>
-            <a:spLocks noGrp="1"/>
-          </p:cNvSpPr>
-          <p:nvPr>
-            <p:ph type="sldNum" sz="quarter" idx="12"/>
-          </p:nvPr>
-        </p:nvSpPr>
-        <p:spPr/>
-        <p:txBody>
-          <a:bodyPr/>
-          <a:lstStyle/>
-          <a:p>
-            <a:fld id="{5AF2E7C1-CA82-F241-8934-AACDE30393F4}" type="slidenum">
-              <a:rPr lang="en-CZ" smtClean="0"/>
-              <a:pPr/>
-              <a:t>15</a:t>
-            </a:fld>
-            <a:endParaRPr lang="en-CZ" dirty="0"/>
-          </a:p>
-        </p:txBody>
-      </p:sp>
-      <p:sp>
-        <p:nvSpPr>
-          <p:cNvPr id="3" name="Text Placeholder 2">
-            <a:extLst>
-              <a:ext uri="{FF2B5EF4-FFF2-40B4-BE49-F238E27FC236}">
-                <a16:creationId xmlns:a16="http://schemas.microsoft.com/office/drawing/2014/main" id="{8677F0F4-3451-B089-560E-1E041AD37459}"/>
-              </a:ext>
-            </a:extLst>
-          </p:cNvPr>
-          <p:cNvSpPr>
-            <a:spLocks noGrp="1"/>
-          </p:cNvSpPr>
-          <p:nvPr>
-            <p:ph type="body" sz="quarter" idx="13"/>
-          </p:nvPr>
-        </p:nvSpPr>
-        <p:spPr/>
-        <p:txBody>
-          <a:bodyPr/>
-          <a:lstStyle/>
-          <a:p>
-            <a:endParaRPr lang="en-CZ"/>
-          </a:p>
-        </p:txBody>
-      </p:sp>
-      <p:sp>
-        <p:nvSpPr>
-          <p:cNvPr id="4" name="Text Placeholder 3">
-            <a:extLst>
-              <a:ext uri="{FF2B5EF4-FFF2-40B4-BE49-F238E27FC236}">
-                <a16:creationId xmlns:a16="http://schemas.microsoft.com/office/drawing/2014/main" id="{CADF4A0F-9636-86A4-9CFA-0E28158E4716}"/>
-              </a:ext>
-            </a:extLst>
-          </p:cNvPr>
-          <p:cNvSpPr>
-            <a:spLocks noGrp="1"/>
-          </p:cNvSpPr>
-          <p:nvPr>
-            <p:ph type="body" sz="quarter" idx="14"/>
-          </p:nvPr>
-        </p:nvSpPr>
-        <p:spPr/>
-        <p:txBody>
-          <a:bodyPr/>
-          <a:lstStyle/>
-          <a:p>
-            <a:endParaRPr lang="en-CZ"/>
-          </a:p>
-        </p:txBody>
-      </p:sp>
-      <p:sp>
-        <p:nvSpPr>
-          <p:cNvPr id="5" name="Footer Placeholder 4">
-            <a:extLst>
-              <a:ext uri="{FF2B5EF4-FFF2-40B4-BE49-F238E27FC236}">
-                <a16:creationId xmlns:a16="http://schemas.microsoft.com/office/drawing/2014/main" id="{37CF0BC8-B3B1-D847-8A13-958863B0221F}"/>
-              </a:ext>
-            </a:extLst>
-          </p:cNvPr>
-          <p:cNvSpPr>
-            <a:spLocks noGrp="1"/>
-          </p:cNvSpPr>
-          <p:nvPr>
-            <p:ph type="ftr" sz="quarter" idx="15"/>
-          </p:nvPr>
-        </p:nvSpPr>
-        <p:spPr/>
-        <p:txBody>
-          <a:bodyPr/>
-          <a:lstStyle/>
-          <a:p>
-            <a:r>
-              <a:rPr lang="en-GB"/>
-              <a:t>PPT Template 2.0</a:t>
-            </a:r>
-            <a:endParaRPr lang="en-CZ" dirty="0"/>
-          </a:p>
-        </p:txBody>
-      </p:sp>
-      <p:sp>
-        <p:nvSpPr>
-          <p:cNvPr id="6" name="Text Placeholder 5">
-            <a:extLst>
-              <a:ext uri="{FF2B5EF4-FFF2-40B4-BE49-F238E27FC236}">
-                <a16:creationId xmlns:a16="http://schemas.microsoft.com/office/drawing/2014/main" id="{5DC22F01-BA92-6E34-1D2A-937DE35B16C2}"/>
-              </a:ext>
-            </a:extLst>
-          </p:cNvPr>
-          <p:cNvSpPr>
-            <a:spLocks noGrp="1"/>
-          </p:cNvSpPr>
-          <p:nvPr>
-            <p:ph type="body" sz="quarter" idx="16"/>
-          </p:nvPr>
-        </p:nvSpPr>
-        <p:spPr/>
-        <p:txBody>
-          <a:bodyPr/>
-          <a:lstStyle/>
-          <a:p>
-            <a:endParaRPr lang="en-CZ"/>
-          </a:p>
-        </p:txBody>
-      </p:sp>
-      <p:sp>
-        <p:nvSpPr>
-          <p:cNvPr id="7" name="Picture Placeholder 6">
-            <a:extLst>
-              <a:ext uri="{FF2B5EF4-FFF2-40B4-BE49-F238E27FC236}">
-                <a16:creationId xmlns:a16="http://schemas.microsoft.com/office/drawing/2014/main" id="{579DC522-9F92-F9AB-50FE-EAE81BA20142}"/>
-              </a:ext>
-            </a:extLst>
-          </p:cNvPr>
-          <p:cNvSpPr>
-            <a:spLocks noGrp="1"/>
-          </p:cNvSpPr>
-          <p:nvPr>
-            <p:ph type="pic" sz="quarter" idx="20"/>
-          </p:nvPr>
-        </p:nvSpPr>
-        <p:spPr/>
-        <p:txBody>
-          <a:bodyPr/>
-          <a:lstStyle/>
-          <a:p>
-            <a:endParaRPr lang="en-CZ"/>
-          </a:p>
-        </p:txBody>
-      </p:sp>
-      <p:sp>
-        <p:nvSpPr>
-          <p:cNvPr id="8" name="Text Placeholder 7">
-            <a:extLst>
-              <a:ext uri="{FF2B5EF4-FFF2-40B4-BE49-F238E27FC236}">
-                <a16:creationId xmlns:a16="http://schemas.microsoft.com/office/drawing/2014/main" id="{E314A420-5B40-73B5-2F6D-57C79F7213E4}"/>
-              </a:ext>
-            </a:extLst>
-          </p:cNvPr>
-          <p:cNvSpPr>
-            <a:spLocks noGrp="1"/>
-          </p:cNvSpPr>
-          <p:nvPr>
-            <p:ph type="body" sz="quarter" idx="19"/>
-          </p:nvPr>
-        </p:nvSpPr>
-        <p:spPr/>
-        <p:txBody>
-          <a:bodyPr/>
-          <a:lstStyle/>
-          <a:p>
-            <a:endParaRPr lang="en-CZ"/>
-          </a:p>
-        </p:txBody>
-      </p:sp>
-    </p:spTree>
-    <p:extLst>
-      <p:ext uri="{BB962C8B-B14F-4D97-AF65-F5344CB8AC3E}">
-        <p14:creationId xmlns:p14="http://schemas.microsoft.com/office/powerpoint/2010/main" val="3567938203"/>
-      </p:ext>
-    </p:extLst>
-  </p:cSld>
-  <p:clrMapOvr>
-    <a:masterClrMapping/>
-  </p:clrMapOvr>
-</p:sld>
-</file>
-
-<file path=ppt/slides/slide16.xml><?xml version="1.0" encoding="utf-8"?>
-<p:sld xmlns:a="http://schemas.openxmlformats.org/drawingml/2006/main" xmlns:r="http://schemas.openxmlformats.org/officeDocument/2006/relationships" xmlns:p="http://schemas.openxmlformats.org/presentationml/2006/main">
-  <p:cSld>
-    <p:spTree>
-      <p:nvGrpSpPr>
-        <p:cNvPr id="1" name=""/>
-        <p:cNvGrpSpPr/>
-        <p:nvPr/>
-      </p:nvGrpSpPr>
-      <p:grpSpPr>
-        <a:xfrm>
-          <a:off x="0" y="0"/>
-          <a:ext cx="0" cy="0"/>
-          <a:chOff x="0" y="0"/>
-          <a:chExt cx="0" cy="0"/>
-        </a:xfrm>
-      </p:grpSpPr>
-      <p:sp>
-        <p:nvSpPr>
-          <p:cNvPr id="2" name="Slide Number Placeholder 1">
-            <a:extLst>
-              <a:ext uri="{FF2B5EF4-FFF2-40B4-BE49-F238E27FC236}">
-                <a16:creationId xmlns:a16="http://schemas.microsoft.com/office/drawing/2014/main" id="{8C05B8EA-2916-B988-82EB-E705A5983D96}"/>
-              </a:ext>
-            </a:extLst>
-          </p:cNvPr>
-          <p:cNvSpPr>
-            <a:spLocks noGrp="1"/>
-          </p:cNvSpPr>
-          <p:nvPr>
-            <p:ph type="sldNum" sz="quarter" idx="12"/>
-          </p:nvPr>
-        </p:nvSpPr>
-        <p:spPr/>
-        <p:txBody>
-          <a:bodyPr/>
-          <a:lstStyle/>
-          <a:p>
-            <a:fld id="{5AF2E7C1-CA82-F241-8934-AACDE30393F4}" type="slidenum">
-              <a:rPr lang="en-CZ" smtClean="0"/>
-              <a:pPr/>
-              <a:t>16</a:t>
-            </a:fld>
-            <a:endParaRPr lang="en-CZ" dirty="0"/>
-          </a:p>
-        </p:txBody>
-      </p:sp>
-      <p:sp>
-        <p:nvSpPr>
-          <p:cNvPr id="3" name="Text Placeholder 2">
-            <a:extLst>
-              <a:ext uri="{FF2B5EF4-FFF2-40B4-BE49-F238E27FC236}">
-                <a16:creationId xmlns:a16="http://schemas.microsoft.com/office/drawing/2014/main" id="{CDBC209E-363D-173E-7DBD-48E2AED8FAA9}"/>
-              </a:ext>
-            </a:extLst>
-          </p:cNvPr>
-          <p:cNvSpPr>
-            <a:spLocks noGrp="1"/>
-          </p:cNvSpPr>
-          <p:nvPr>
-            <p:ph type="body" sz="quarter" idx="13"/>
-          </p:nvPr>
-        </p:nvSpPr>
-        <p:spPr/>
-        <p:txBody>
-          <a:bodyPr/>
-          <a:lstStyle/>
-          <a:p>
-            <a:endParaRPr lang="en-CZ"/>
-          </a:p>
-        </p:txBody>
-      </p:sp>
-      <p:sp>
-        <p:nvSpPr>
-          <p:cNvPr id="4" name="Text Placeholder 3">
-            <a:extLst>
-              <a:ext uri="{FF2B5EF4-FFF2-40B4-BE49-F238E27FC236}">
-                <a16:creationId xmlns:a16="http://schemas.microsoft.com/office/drawing/2014/main" id="{1273925B-454B-154E-0485-FF5B93CBFDED}"/>
-              </a:ext>
-            </a:extLst>
-          </p:cNvPr>
-          <p:cNvSpPr>
-            <a:spLocks noGrp="1"/>
-          </p:cNvSpPr>
-          <p:nvPr>
-            <p:ph type="body" sz="quarter" idx="14"/>
-          </p:nvPr>
-        </p:nvSpPr>
-        <p:spPr/>
-        <p:txBody>
-          <a:bodyPr/>
-          <a:lstStyle/>
-          <a:p>
-            <a:endParaRPr lang="en-CZ"/>
-          </a:p>
-        </p:txBody>
-      </p:sp>
-      <p:sp>
-        <p:nvSpPr>
-          <p:cNvPr id="5" name="Footer Placeholder 4">
-            <a:extLst>
-              <a:ext uri="{FF2B5EF4-FFF2-40B4-BE49-F238E27FC236}">
-                <a16:creationId xmlns:a16="http://schemas.microsoft.com/office/drawing/2014/main" id="{C0C31532-F77A-B423-53E2-FD2CBF97522F}"/>
-              </a:ext>
-            </a:extLst>
-          </p:cNvPr>
-          <p:cNvSpPr>
-            <a:spLocks noGrp="1"/>
-          </p:cNvSpPr>
-          <p:nvPr>
-            <p:ph type="ftr" sz="quarter" idx="15"/>
-          </p:nvPr>
-        </p:nvSpPr>
-        <p:spPr/>
-        <p:txBody>
-          <a:bodyPr/>
-          <a:lstStyle/>
-          <a:p>
-            <a:r>
-              <a:rPr lang="en-GB"/>
-              <a:t>PPT Template 2.0</a:t>
-            </a:r>
-            <a:endParaRPr lang="en-CZ" dirty="0"/>
-          </a:p>
-        </p:txBody>
-      </p:sp>
-      <p:sp>
-        <p:nvSpPr>
-          <p:cNvPr id="6" name="Text Placeholder 5">
-            <a:extLst>
-              <a:ext uri="{FF2B5EF4-FFF2-40B4-BE49-F238E27FC236}">
-                <a16:creationId xmlns:a16="http://schemas.microsoft.com/office/drawing/2014/main" id="{5E5EE9AE-53BA-798C-9001-D2D2ECCDB037}"/>
-              </a:ext>
-            </a:extLst>
-          </p:cNvPr>
-          <p:cNvSpPr>
-            <a:spLocks noGrp="1"/>
-          </p:cNvSpPr>
-          <p:nvPr>
-            <p:ph type="body" sz="quarter" idx="17"/>
-          </p:nvPr>
-        </p:nvSpPr>
-        <p:spPr/>
-        <p:txBody>
-          <a:bodyPr/>
-          <a:lstStyle/>
-          <a:p>
-            <a:endParaRPr lang="en-CZ"/>
-          </a:p>
-        </p:txBody>
-      </p:sp>
-      <p:sp>
-        <p:nvSpPr>
-          <p:cNvPr id="7" name="Picture Placeholder 6">
-            <a:extLst>
-              <a:ext uri="{FF2B5EF4-FFF2-40B4-BE49-F238E27FC236}">
-                <a16:creationId xmlns:a16="http://schemas.microsoft.com/office/drawing/2014/main" id="{66D0D07B-E358-EDC1-D75C-3893F004C14E}"/>
-              </a:ext>
-            </a:extLst>
-          </p:cNvPr>
-          <p:cNvSpPr>
-            <a:spLocks noGrp="1"/>
-          </p:cNvSpPr>
-          <p:nvPr>
-            <p:ph type="pic" sz="quarter" idx="19"/>
-          </p:nvPr>
-        </p:nvSpPr>
-        <p:spPr/>
-        <p:txBody>
-          <a:bodyPr/>
-          <a:lstStyle/>
-          <a:p>
-            <a:endParaRPr lang="en-CZ"/>
+          <a:lstStyle>
+            <a:lvl1pPr marL="266400" indent="-252000" algn="l" defTabSz="914400" rtl="0" eaLnBrk="1" latinLnBrk="0" hangingPunct="1">
+              <a:lnSpc>
+                <a:spcPct val="100000"/>
+              </a:lnSpc>
+              <a:spcBef>
+                <a:spcPts val="900"/>
+              </a:spcBef>
+              <a:buSzPct val="100000"/>
+              <a:buFontTx/>
+              <a:buBlip>
+                <a:blip>
+                  <a:extLst>
+                    <a:ext uri="{96DAC541-7B7A-43D3-8B79-37D633B846F1}">
+                      <asvg:svgBlip xmlns:asvg="http://schemas.microsoft.com/office/drawing/2016/SVG/main" r:embed="rId2"/>
+                    </a:ext>
+                  </a:extLst>
+                </a:blip>
+              </a:buBlip>
+              <a:defRPr sz="1800" b="1" i="0" kern="1200" spc="-40" baseline="0">
+                <a:solidFill>
+                  <a:schemeClr val="tx1"/>
+                </a:solidFill>
+                <a:latin typeface="Source Sans Pro SemiBold" panose="020B0503030403020204" pitchFamily="34" charset="0"/>
+                <a:ea typeface="Source Sans Pro SemiBold" panose="020B0503030403020204" pitchFamily="34" charset="0"/>
+                <a:cs typeface="+mn-cs"/>
+              </a:defRPr>
+            </a:lvl1pPr>
+            <a:lvl2pPr marL="266400" indent="-252000" algn="l" defTabSz="914400" rtl="0" eaLnBrk="1" latinLnBrk="0" hangingPunct="1">
+              <a:lnSpc>
+                <a:spcPct val="100000"/>
+              </a:lnSpc>
+              <a:spcBef>
+                <a:spcPts val="900"/>
+              </a:spcBef>
+              <a:buSzPct val="100000"/>
+              <a:buFontTx/>
+              <a:buBlip>
+                <a:blip>
+                  <a:extLst>
+                    <a:ext uri="{96DAC541-7B7A-43D3-8B79-37D633B846F1}">
+                      <asvg:svgBlip xmlns:asvg="http://schemas.microsoft.com/office/drawing/2016/SVG/main" r:embed="rId2"/>
+                    </a:ext>
+                  </a:extLst>
+                </a:blip>
+              </a:buBlip>
+              <a:defRPr sz="1800" b="1" i="0" kern="1200" spc="-40" baseline="0">
+                <a:solidFill>
+                  <a:schemeClr val="tx1"/>
+                </a:solidFill>
+                <a:latin typeface="Source Sans Pro SemiBold" panose="020B0503030403020204" pitchFamily="34" charset="0"/>
+                <a:ea typeface="Source Sans Pro SemiBold" panose="020B0503030403020204" pitchFamily="34" charset="0"/>
+                <a:cs typeface="+mn-cs"/>
+              </a:defRPr>
+            </a:lvl2pPr>
+            <a:lvl3pPr marL="266400" indent="-252000" algn="l" defTabSz="914400" rtl="0" eaLnBrk="1" latinLnBrk="0" hangingPunct="1">
+              <a:lnSpc>
+                <a:spcPct val="100000"/>
+              </a:lnSpc>
+              <a:spcBef>
+                <a:spcPts val="900"/>
+              </a:spcBef>
+              <a:buSzPct val="100000"/>
+              <a:buFontTx/>
+              <a:buBlip>
+                <a:blip>
+                  <a:extLst>
+                    <a:ext uri="{96DAC541-7B7A-43D3-8B79-37D633B846F1}">
+                      <asvg:svgBlip xmlns:asvg="http://schemas.microsoft.com/office/drawing/2016/SVG/main" r:embed="rId2"/>
+                    </a:ext>
+                  </a:extLst>
+                </a:blip>
+              </a:buBlip>
+              <a:defRPr sz="1800" b="1" i="0" kern="1200" spc="-40" baseline="0">
+                <a:solidFill>
+                  <a:schemeClr val="tx1"/>
+                </a:solidFill>
+                <a:latin typeface="Source Sans Pro SemiBold" panose="020B0503030403020204" pitchFamily="34" charset="0"/>
+                <a:ea typeface="Source Sans Pro SemiBold" panose="020B0503030403020204" pitchFamily="34" charset="0"/>
+                <a:cs typeface="+mn-cs"/>
+              </a:defRPr>
+            </a:lvl3pPr>
+            <a:lvl4pPr marL="266400" indent="-252000" algn="l" defTabSz="914400" rtl="0" eaLnBrk="1" latinLnBrk="0" hangingPunct="1">
+              <a:lnSpc>
+                <a:spcPct val="100000"/>
+              </a:lnSpc>
+              <a:spcBef>
+                <a:spcPts val="900"/>
+              </a:spcBef>
+              <a:buSzPct val="100000"/>
+              <a:buFontTx/>
+              <a:buBlip>
+                <a:blip>
+                  <a:extLst>
+                    <a:ext uri="{96DAC541-7B7A-43D3-8B79-37D633B846F1}">
+                      <asvg:svgBlip xmlns:asvg="http://schemas.microsoft.com/office/drawing/2016/SVG/main" r:embed="rId2"/>
+                    </a:ext>
+                  </a:extLst>
+                </a:blip>
+              </a:buBlip>
+              <a:defRPr sz="1800" b="1" i="0" kern="1200" spc="-40" baseline="0">
+                <a:solidFill>
+                  <a:schemeClr val="tx1"/>
+                </a:solidFill>
+                <a:latin typeface="Source Sans Pro SemiBold" panose="020B0503030403020204" pitchFamily="34" charset="0"/>
+                <a:ea typeface="Source Sans Pro SemiBold" panose="020B0503030403020204" pitchFamily="34" charset="0"/>
+                <a:cs typeface="+mn-cs"/>
+              </a:defRPr>
+            </a:lvl4pPr>
+            <a:lvl5pPr marL="266400" indent="-252000" algn="l" defTabSz="914400" rtl="0" eaLnBrk="1" latinLnBrk="0" hangingPunct="1">
+              <a:lnSpc>
+                <a:spcPct val="100000"/>
+              </a:lnSpc>
+              <a:spcBef>
+                <a:spcPts val="900"/>
+              </a:spcBef>
+              <a:buSzPct val="100000"/>
+              <a:buFontTx/>
+              <a:buBlip>
+                <a:blip>
+                  <a:extLst>
+                    <a:ext uri="{96DAC541-7B7A-43D3-8B79-37D633B846F1}">
+                      <asvg:svgBlip xmlns:asvg="http://schemas.microsoft.com/office/drawing/2016/SVG/main" r:embed="rId2"/>
+                    </a:ext>
+                  </a:extLst>
+                </a:blip>
+              </a:buBlip>
+              <a:defRPr sz="1800" b="1" i="0" kern="1200" spc="-40" baseline="0">
+                <a:solidFill>
+                  <a:schemeClr val="tx1"/>
+                </a:solidFill>
+                <a:latin typeface="Source Sans Pro SemiBold" panose="020B0503030403020204" pitchFamily="34" charset="0"/>
+                <a:ea typeface="Source Sans Pro SemiBold" panose="020B0503030403020204" pitchFamily="34" charset="0"/>
+                <a:cs typeface="+mn-cs"/>
+              </a:defRPr>
+            </a:lvl5pPr>
+            <a:lvl6pPr marL="2514600" indent="-228600" algn="l" defTabSz="914400" rtl="0" eaLnBrk="1" latinLnBrk="0" hangingPunct="1">
+              <a:lnSpc>
+                <a:spcPct val="90000"/>
+              </a:lnSpc>
+              <a:spcBef>
+                <a:spcPts val="500"/>
+              </a:spcBef>
+              <a:buFont typeface="Arial" panose="020B0604020202020204" pitchFamily="34" charset="0"/>
+              <a:buChar char="•"/>
+              <a:defRPr sz="1800" kern="1200">
+                <a:solidFill>
+                  <a:schemeClr val="tx1"/>
+                </a:solidFill>
+                <a:latin typeface="+mn-lt"/>
+                <a:ea typeface="+mn-ea"/>
+                <a:cs typeface="+mn-cs"/>
+              </a:defRPr>
+            </a:lvl6pPr>
+            <a:lvl7pPr marL="2971800" indent="-228600" algn="l" defTabSz="914400" rtl="0" eaLnBrk="1" latinLnBrk="0" hangingPunct="1">
+              <a:lnSpc>
+                <a:spcPct val="90000"/>
+              </a:lnSpc>
+              <a:spcBef>
+                <a:spcPts val="500"/>
+              </a:spcBef>
+              <a:buFont typeface="Arial" panose="020B0604020202020204" pitchFamily="34" charset="0"/>
+              <a:buChar char="•"/>
+              <a:defRPr sz="1800" kern="1200">
+                <a:solidFill>
+                  <a:schemeClr val="tx1"/>
+                </a:solidFill>
+                <a:latin typeface="+mn-lt"/>
+                <a:ea typeface="+mn-ea"/>
+                <a:cs typeface="+mn-cs"/>
+              </a:defRPr>
+            </a:lvl7pPr>
+            <a:lvl8pPr marL="3429000" indent="-228600" algn="l" defTabSz="914400" rtl="0" eaLnBrk="1" latinLnBrk="0" hangingPunct="1">
+              <a:lnSpc>
+                <a:spcPct val="90000"/>
+              </a:lnSpc>
+              <a:spcBef>
+                <a:spcPts val="500"/>
+              </a:spcBef>
+              <a:buFont typeface="Arial" panose="020B0604020202020204" pitchFamily="34" charset="0"/>
+              <a:buChar char="•"/>
+              <a:defRPr sz="1800" kern="1200">
+                <a:solidFill>
+                  <a:schemeClr val="tx1"/>
+                </a:solidFill>
+                <a:latin typeface="+mn-lt"/>
+                <a:ea typeface="+mn-ea"/>
+                <a:cs typeface="+mn-cs"/>
+              </a:defRPr>
+            </a:lvl8pPr>
+            <a:lvl9pPr marL="3886200" indent="-228600" algn="l" defTabSz="914400" rtl="0" eaLnBrk="1" latinLnBrk="0" hangingPunct="1">
+              <a:lnSpc>
+                <a:spcPct val="90000"/>
+              </a:lnSpc>
+              <a:spcBef>
+                <a:spcPts val="500"/>
+              </a:spcBef>
+              <a:buFont typeface="Arial" panose="020B0604020202020204" pitchFamily="34" charset="0"/>
+              <a:buChar char="•"/>
+              <a:defRPr sz="1800" kern="1200">
+                <a:solidFill>
+                  <a:schemeClr val="tx1"/>
+                </a:solidFill>
+                <a:latin typeface="+mn-lt"/>
+                <a:ea typeface="+mn-ea"/>
+                <a:cs typeface="+mn-cs"/>
+              </a:defRPr>
+            </a:lvl9pPr>
+          </a:lstStyle>
+          <a:p>
+            <a:pPr marL="0" indent="0">
+              <a:buNone/>
+            </a:pPr>
+            <a:r>
+              <a:rPr lang="en-GB" sz="1500" dirty="0">
+                <a:solidFill>
+                  <a:srgbClr val="909090"/>
+                </a:solidFill>
+              </a:rPr>
+              <a:t>Performance and Scale</a:t>
+            </a:r>
           </a:p>
         </p:txBody>
       </p:sp>
@@ -18687,648 +18111,6 @@
     <p:extLst>
       <p:ext uri="{BB962C8B-B14F-4D97-AF65-F5344CB8AC3E}">
         <p14:creationId xmlns:p14="http://schemas.microsoft.com/office/powerpoint/2010/main" val="3743531838"/>
-      </p:ext>
-    </p:extLst>
-  </p:cSld>
-  <p:clrMapOvr>
-    <a:masterClrMapping/>
-  </p:clrMapOvr>
-</p:sld>
-</file>
-
-<file path=ppt/slides/slide17.xml><?xml version="1.0" encoding="utf-8"?>
-<p:sld xmlns:a="http://schemas.openxmlformats.org/drawingml/2006/main" xmlns:r="http://schemas.openxmlformats.org/officeDocument/2006/relationships" xmlns:p="http://schemas.openxmlformats.org/presentationml/2006/main">
-  <p:cSld>
-    <p:spTree>
-      <p:nvGrpSpPr>
-        <p:cNvPr id="1" name=""/>
-        <p:cNvGrpSpPr/>
-        <p:nvPr/>
-      </p:nvGrpSpPr>
-      <p:grpSpPr>
-        <a:xfrm>
-          <a:off x="0" y="0"/>
-          <a:ext cx="0" cy="0"/>
-          <a:chOff x="0" y="0"/>
-          <a:chExt cx="0" cy="0"/>
-        </a:xfrm>
-      </p:grpSpPr>
-      <p:sp>
-        <p:nvSpPr>
-          <p:cNvPr id="2" name="Slide Number Placeholder 1">
-            <a:extLst>
-              <a:ext uri="{FF2B5EF4-FFF2-40B4-BE49-F238E27FC236}">
-                <a16:creationId xmlns:a16="http://schemas.microsoft.com/office/drawing/2014/main" id="{8BD32DD3-E645-ECD5-9ABC-A4F21B079CC0}"/>
-              </a:ext>
-            </a:extLst>
-          </p:cNvPr>
-          <p:cNvSpPr>
-            <a:spLocks noGrp="1"/>
-          </p:cNvSpPr>
-          <p:nvPr>
-            <p:ph type="sldNum" sz="quarter" idx="12"/>
-          </p:nvPr>
-        </p:nvSpPr>
-        <p:spPr/>
-        <p:txBody>
-          <a:bodyPr/>
-          <a:lstStyle/>
-          <a:p>
-            <a:fld id="{5AF2E7C1-CA82-F241-8934-AACDE30393F4}" type="slidenum">
-              <a:rPr lang="en-CZ" smtClean="0"/>
-              <a:pPr/>
-              <a:t>17</a:t>
-            </a:fld>
-            <a:endParaRPr lang="en-CZ" dirty="0"/>
-          </a:p>
-        </p:txBody>
-      </p:sp>
-      <p:sp>
-        <p:nvSpPr>
-          <p:cNvPr id="3" name="Text Placeholder 2">
-            <a:extLst>
-              <a:ext uri="{FF2B5EF4-FFF2-40B4-BE49-F238E27FC236}">
-                <a16:creationId xmlns:a16="http://schemas.microsoft.com/office/drawing/2014/main" id="{CBD0C711-E0C1-49CA-3B96-3EBB8BF8C2A2}"/>
-              </a:ext>
-            </a:extLst>
-          </p:cNvPr>
-          <p:cNvSpPr>
-            <a:spLocks noGrp="1"/>
-          </p:cNvSpPr>
-          <p:nvPr>
-            <p:ph type="body" sz="quarter" idx="13"/>
-          </p:nvPr>
-        </p:nvSpPr>
-        <p:spPr/>
-        <p:txBody>
-          <a:bodyPr/>
-          <a:lstStyle/>
-          <a:p>
-            <a:endParaRPr lang="en-CZ"/>
-          </a:p>
-        </p:txBody>
-      </p:sp>
-      <p:sp>
-        <p:nvSpPr>
-          <p:cNvPr id="4" name="Text Placeholder 3">
-            <a:extLst>
-              <a:ext uri="{FF2B5EF4-FFF2-40B4-BE49-F238E27FC236}">
-                <a16:creationId xmlns:a16="http://schemas.microsoft.com/office/drawing/2014/main" id="{12730660-81CA-20F6-4191-B7C264DE29C6}"/>
-              </a:ext>
-            </a:extLst>
-          </p:cNvPr>
-          <p:cNvSpPr>
-            <a:spLocks noGrp="1"/>
-          </p:cNvSpPr>
-          <p:nvPr>
-            <p:ph type="body" sz="quarter" idx="14"/>
-          </p:nvPr>
-        </p:nvSpPr>
-        <p:spPr/>
-        <p:txBody>
-          <a:bodyPr/>
-          <a:lstStyle/>
-          <a:p>
-            <a:endParaRPr lang="en-CZ"/>
-          </a:p>
-        </p:txBody>
-      </p:sp>
-      <p:sp>
-        <p:nvSpPr>
-          <p:cNvPr id="5" name="Footer Placeholder 4">
-            <a:extLst>
-              <a:ext uri="{FF2B5EF4-FFF2-40B4-BE49-F238E27FC236}">
-                <a16:creationId xmlns:a16="http://schemas.microsoft.com/office/drawing/2014/main" id="{B8A7A479-5314-1FF4-4C97-D44A0F7A3431}"/>
-              </a:ext>
-            </a:extLst>
-          </p:cNvPr>
-          <p:cNvSpPr>
-            <a:spLocks noGrp="1"/>
-          </p:cNvSpPr>
-          <p:nvPr>
-            <p:ph type="ftr" sz="quarter" idx="15"/>
-          </p:nvPr>
-        </p:nvSpPr>
-        <p:spPr/>
-        <p:txBody>
-          <a:bodyPr/>
-          <a:lstStyle/>
-          <a:p>
-            <a:r>
-              <a:rPr lang="en-GB"/>
-              <a:t>PPT Template 2.0</a:t>
-            </a:r>
-            <a:endParaRPr lang="en-CZ" dirty="0"/>
-          </a:p>
-        </p:txBody>
-      </p:sp>
-      <p:sp>
-        <p:nvSpPr>
-          <p:cNvPr id="6" name="Text Placeholder 5">
-            <a:extLst>
-              <a:ext uri="{FF2B5EF4-FFF2-40B4-BE49-F238E27FC236}">
-                <a16:creationId xmlns:a16="http://schemas.microsoft.com/office/drawing/2014/main" id="{72E1BBAC-CB5F-4CDB-4EEC-A0265246777C}"/>
-              </a:ext>
-            </a:extLst>
-          </p:cNvPr>
-          <p:cNvSpPr>
-            <a:spLocks noGrp="1"/>
-          </p:cNvSpPr>
-          <p:nvPr>
-            <p:ph type="body" sz="quarter" idx="16"/>
-          </p:nvPr>
-        </p:nvSpPr>
-        <p:spPr/>
-        <p:txBody>
-          <a:bodyPr/>
-          <a:lstStyle/>
-          <a:p>
-            <a:endParaRPr lang="en-CZ"/>
-          </a:p>
-        </p:txBody>
-      </p:sp>
-      <p:sp>
-        <p:nvSpPr>
-          <p:cNvPr id="7" name="Picture Placeholder 6">
-            <a:extLst>
-              <a:ext uri="{FF2B5EF4-FFF2-40B4-BE49-F238E27FC236}">
-                <a16:creationId xmlns:a16="http://schemas.microsoft.com/office/drawing/2014/main" id="{51AD6E00-E496-3B9D-3E1C-F9BA56330DDD}"/>
-              </a:ext>
-            </a:extLst>
-          </p:cNvPr>
-          <p:cNvSpPr>
-            <a:spLocks noGrp="1"/>
-          </p:cNvSpPr>
-          <p:nvPr>
-            <p:ph type="pic" sz="quarter" idx="20"/>
-          </p:nvPr>
-        </p:nvSpPr>
-        <p:spPr/>
-        <p:txBody>
-          <a:bodyPr/>
-          <a:lstStyle/>
-          <a:p>
-            <a:endParaRPr lang="en-CZ"/>
-          </a:p>
-        </p:txBody>
-      </p:sp>
-      <p:sp>
-        <p:nvSpPr>
-          <p:cNvPr id="8" name="Text Placeholder 7">
-            <a:extLst>
-              <a:ext uri="{FF2B5EF4-FFF2-40B4-BE49-F238E27FC236}">
-                <a16:creationId xmlns:a16="http://schemas.microsoft.com/office/drawing/2014/main" id="{E9B714A4-82C8-BFA1-BCBD-72E6CF4BDD74}"/>
-              </a:ext>
-            </a:extLst>
-          </p:cNvPr>
-          <p:cNvSpPr>
-            <a:spLocks noGrp="1"/>
-          </p:cNvSpPr>
-          <p:nvPr>
-            <p:ph type="body" sz="quarter" idx="21"/>
-          </p:nvPr>
-        </p:nvSpPr>
-        <p:spPr/>
-        <p:txBody>
-          <a:bodyPr/>
-          <a:lstStyle/>
-          <a:p>
-            <a:endParaRPr lang="en-CZ"/>
-          </a:p>
-        </p:txBody>
-      </p:sp>
-    </p:spTree>
-    <p:extLst>
-      <p:ext uri="{BB962C8B-B14F-4D97-AF65-F5344CB8AC3E}">
-        <p14:creationId xmlns:p14="http://schemas.microsoft.com/office/powerpoint/2010/main" val="74190348"/>
-      </p:ext>
-    </p:extLst>
-  </p:cSld>
-  <p:clrMapOvr>
-    <a:masterClrMapping/>
-  </p:clrMapOvr>
-</p:sld>
-</file>
-
-<file path=ppt/slides/slide18.xml><?xml version="1.0" encoding="utf-8"?>
-<p:sld xmlns:a="http://schemas.openxmlformats.org/drawingml/2006/main" xmlns:r="http://schemas.openxmlformats.org/officeDocument/2006/relationships" xmlns:p="http://schemas.openxmlformats.org/presentationml/2006/main">
-  <p:cSld>
-    <p:spTree>
-      <p:nvGrpSpPr>
-        <p:cNvPr id="1" name=""/>
-        <p:cNvGrpSpPr/>
-        <p:nvPr/>
-      </p:nvGrpSpPr>
-      <p:grpSpPr>
-        <a:xfrm>
-          <a:off x="0" y="0"/>
-          <a:ext cx="0" cy="0"/>
-          <a:chOff x="0" y="0"/>
-          <a:chExt cx="0" cy="0"/>
-        </a:xfrm>
-      </p:grpSpPr>
-      <p:sp>
-        <p:nvSpPr>
-          <p:cNvPr id="2" name="Slide Number Placeholder 1">
-            <a:extLst>
-              <a:ext uri="{FF2B5EF4-FFF2-40B4-BE49-F238E27FC236}">
-                <a16:creationId xmlns:a16="http://schemas.microsoft.com/office/drawing/2014/main" id="{A59327D4-5613-4BF8-3009-A61511BCE8BC}"/>
-              </a:ext>
-            </a:extLst>
-          </p:cNvPr>
-          <p:cNvSpPr>
-            <a:spLocks noGrp="1"/>
-          </p:cNvSpPr>
-          <p:nvPr>
-            <p:ph type="sldNum" sz="quarter" idx="12"/>
-          </p:nvPr>
-        </p:nvSpPr>
-        <p:spPr/>
-        <p:txBody>
-          <a:bodyPr/>
-          <a:lstStyle/>
-          <a:p>
-            <a:fld id="{5AF2E7C1-CA82-F241-8934-AACDE30393F4}" type="slidenum">
-              <a:rPr lang="en-CZ" smtClean="0"/>
-              <a:pPr/>
-              <a:t>18</a:t>
-            </a:fld>
-            <a:endParaRPr lang="en-CZ" dirty="0"/>
-          </a:p>
-        </p:txBody>
-      </p:sp>
-      <p:sp>
-        <p:nvSpPr>
-          <p:cNvPr id="3" name="Text Placeholder 2">
-            <a:extLst>
-              <a:ext uri="{FF2B5EF4-FFF2-40B4-BE49-F238E27FC236}">
-                <a16:creationId xmlns:a16="http://schemas.microsoft.com/office/drawing/2014/main" id="{3A93B449-C115-3960-00AA-F76550A9BDB1}"/>
-              </a:ext>
-            </a:extLst>
-          </p:cNvPr>
-          <p:cNvSpPr>
-            <a:spLocks noGrp="1"/>
-          </p:cNvSpPr>
-          <p:nvPr>
-            <p:ph type="body" sz="quarter" idx="13"/>
-          </p:nvPr>
-        </p:nvSpPr>
-        <p:spPr/>
-        <p:txBody>
-          <a:bodyPr/>
-          <a:lstStyle/>
-          <a:p>
-            <a:endParaRPr lang="en-CZ"/>
-          </a:p>
-        </p:txBody>
-      </p:sp>
-      <p:sp>
-        <p:nvSpPr>
-          <p:cNvPr id="4" name="Text Placeholder 3">
-            <a:extLst>
-              <a:ext uri="{FF2B5EF4-FFF2-40B4-BE49-F238E27FC236}">
-                <a16:creationId xmlns:a16="http://schemas.microsoft.com/office/drawing/2014/main" id="{EDDF493C-07B1-FB04-E1C3-9F18D52A79A6}"/>
-              </a:ext>
-            </a:extLst>
-          </p:cNvPr>
-          <p:cNvSpPr>
-            <a:spLocks noGrp="1"/>
-          </p:cNvSpPr>
-          <p:nvPr>
-            <p:ph type="body" sz="quarter" idx="14"/>
-          </p:nvPr>
-        </p:nvSpPr>
-        <p:spPr/>
-        <p:txBody>
-          <a:bodyPr/>
-          <a:lstStyle/>
-          <a:p>
-            <a:endParaRPr lang="en-CZ"/>
-          </a:p>
-        </p:txBody>
-      </p:sp>
-      <p:sp>
-        <p:nvSpPr>
-          <p:cNvPr id="5" name="Footer Placeholder 4">
-            <a:extLst>
-              <a:ext uri="{FF2B5EF4-FFF2-40B4-BE49-F238E27FC236}">
-                <a16:creationId xmlns:a16="http://schemas.microsoft.com/office/drawing/2014/main" id="{5E6B8438-C75D-FBA0-9FEE-FB4514050223}"/>
-              </a:ext>
-            </a:extLst>
-          </p:cNvPr>
-          <p:cNvSpPr>
-            <a:spLocks noGrp="1"/>
-          </p:cNvSpPr>
-          <p:nvPr>
-            <p:ph type="ftr" sz="quarter" idx="15"/>
-          </p:nvPr>
-        </p:nvSpPr>
-        <p:spPr/>
-        <p:txBody>
-          <a:bodyPr/>
-          <a:lstStyle/>
-          <a:p>
-            <a:r>
-              <a:rPr lang="en-GB"/>
-              <a:t>PPT Template 2.0</a:t>
-            </a:r>
-            <a:endParaRPr lang="en-CZ" dirty="0"/>
-          </a:p>
-        </p:txBody>
-      </p:sp>
-      <p:sp>
-        <p:nvSpPr>
-          <p:cNvPr id="6" name="Picture Placeholder 5">
-            <a:extLst>
-              <a:ext uri="{FF2B5EF4-FFF2-40B4-BE49-F238E27FC236}">
-                <a16:creationId xmlns:a16="http://schemas.microsoft.com/office/drawing/2014/main" id="{60AC2DF2-DDB3-5A2E-4890-B5C04D430B12}"/>
-              </a:ext>
-            </a:extLst>
-          </p:cNvPr>
-          <p:cNvSpPr>
-            <a:spLocks noGrp="1"/>
-          </p:cNvSpPr>
-          <p:nvPr>
-            <p:ph type="pic" sz="quarter" idx="19"/>
-          </p:nvPr>
-        </p:nvSpPr>
-        <p:spPr/>
-        <p:txBody>
-          <a:bodyPr/>
-          <a:lstStyle/>
-          <a:p>
-            <a:endParaRPr lang="en-CZ"/>
-          </a:p>
-        </p:txBody>
-      </p:sp>
-      <p:sp>
-        <p:nvSpPr>
-          <p:cNvPr id="7" name="Text Placeholder 6">
-            <a:extLst>
-              <a:ext uri="{FF2B5EF4-FFF2-40B4-BE49-F238E27FC236}">
-                <a16:creationId xmlns:a16="http://schemas.microsoft.com/office/drawing/2014/main" id="{CD25AFCD-B53B-6E88-C814-62F5831FB037}"/>
-              </a:ext>
-            </a:extLst>
-          </p:cNvPr>
-          <p:cNvSpPr>
-            <a:spLocks noGrp="1"/>
-          </p:cNvSpPr>
-          <p:nvPr>
-            <p:ph type="body" sz="quarter" idx="17"/>
-          </p:nvPr>
-        </p:nvSpPr>
-        <p:spPr/>
-        <p:txBody>
-          <a:bodyPr/>
-          <a:lstStyle/>
-          <a:p>
-            <a:endParaRPr lang="en-CZ"/>
-          </a:p>
-        </p:txBody>
-      </p:sp>
-    </p:spTree>
-    <p:extLst>
-      <p:ext uri="{BB962C8B-B14F-4D97-AF65-F5344CB8AC3E}">
-        <p14:creationId xmlns:p14="http://schemas.microsoft.com/office/powerpoint/2010/main" val="1293812982"/>
-      </p:ext>
-    </p:extLst>
-  </p:cSld>
-  <p:clrMapOvr>
-    <a:masterClrMapping/>
-  </p:clrMapOvr>
-</p:sld>
-</file>
-
-<file path=ppt/slides/slide19.xml><?xml version="1.0" encoding="utf-8"?>
-<p:sld xmlns:a="http://schemas.openxmlformats.org/drawingml/2006/main" xmlns:r="http://schemas.openxmlformats.org/officeDocument/2006/relationships" xmlns:p="http://schemas.openxmlformats.org/presentationml/2006/main">
-  <p:cSld>
-    <p:spTree>
-      <p:nvGrpSpPr>
-        <p:cNvPr id="1" name=""/>
-        <p:cNvGrpSpPr/>
-        <p:nvPr/>
-      </p:nvGrpSpPr>
-      <p:grpSpPr>
-        <a:xfrm>
-          <a:off x="0" y="0"/>
-          <a:ext cx="0" cy="0"/>
-          <a:chOff x="0" y="0"/>
-          <a:chExt cx="0" cy="0"/>
-        </a:xfrm>
-      </p:grpSpPr>
-      <p:sp>
-        <p:nvSpPr>
-          <p:cNvPr id="2" name="Slide Number Placeholder 1">
-            <a:extLst>
-              <a:ext uri="{FF2B5EF4-FFF2-40B4-BE49-F238E27FC236}">
-                <a16:creationId xmlns:a16="http://schemas.microsoft.com/office/drawing/2014/main" id="{6A241C94-7D8F-7C2F-439A-67F9986CC726}"/>
-              </a:ext>
-            </a:extLst>
-          </p:cNvPr>
-          <p:cNvSpPr>
-            <a:spLocks noGrp="1"/>
-          </p:cNvSpPr>
-          <p:nvPr>
-            <p:ph type="sldNum" sz="quarter" idx="12"/>
-          </p:nvPr>
-        </p:nvSpPr>
-        <p:spPr/>
-        <p:txBody>
-          <a:bodyPr/>
-          <a:lstStyle/>
-          <a:p>
-            <a:fld id="{5AF2E7C1-CA82-F241-8934-AACDE30393F4}" type="slidenum">
-              <a:rPr lang="en-CZ" smtClean="0"/>
-              <a:pPr/>
-              <a:t>19</a:t>
-            </a:fld>
-            <a:endParaRPr lang="en-CZ" dirty="0"/>
-          </a:p>
-        </p:txBody>
-      </p:sp>
-      <p:sp>
-        <p:nvSpPr>
-          <p:cNvPr id="3" name="Text Placeholder 2">
-            <a:extLst>
-              <a:ext uri="{FF2B5EF4-FFF2-40B4-BE49-F238E27FC236}">
-                <a16:creationId xmlns:a16="http://schemas.microsoft.com/office/drawing/2014/main" id="{293B446E-7853-B0FC-8AA3-A071542D2113}"/>
-              </a:ext>
-            </a:extLst>
-          </p:cNvPr>
-          <p:cNvSpPr>
-            <a:spLocks noGrp="1"/>
-          </p:cNvSpPr>
-          <p:nvPr>
-            <p:ph type="body" sz="quarter" idx="13"/>
-          </p:nvPr>
-        </p:nvSpPr>
-        <p:spPr/>
-        <p:txBody>
-          <a:bodyPr/>
-          <a:lstStyle/>
-          <a:p>
-            <a:endParaRPr lang="en-CZ"/>
-          </a:p>
-        </p:txBody>
-      </p:sp>
-      <p:sp>
-        <p:nvSpPr>
-          <p:cNvPr id="4" name="Text Placeholder 3">
-            <a:extLst>
-              <a:ext uri="{FF2B5EF4-FFF2-40B4-BE49-F238E27FC236}">
-                <a16:creationId xmlns:a16="http://schemas.microsoft.com/office/drawing/2014/main" id="{81BFFBE6-6DB5-C9E8-C33F-F5011D7D0481}"/>
-              </a:ext>
-            </a:extLst>
-          </p:cNvPr>
-          <p:cNvSpPr>
-            <a:spLocks noGrp="1"/>
-          </p:cNvSpPr>
-          <p:nvPr>
-            <p:ph type="body" sz="quarter" idx="14"/>
-          </p:nvPr>
-        </p:nvSpPr>
-        <p:spPr/>
-        <p:txBody>
-          <a:bodyPr/>
-          <a:lstStyle/>
-          <a:p>
-            <a:endParaRPr lang="en-CZ"/>
-          </a:p>
-        </p:txBody>
-      </p:sp>
-      <p:sp>
-        <p:nvSpPr>
-          <p:cNvPr id="5" name="Footer Placeholder 4">
-            <a:extLst>
-              <a:ext uri="{FF2B5EF4-FFF2-40B4-BE49-F238E27FC236}">
-                <a16:creationId xmlns:a16="http://schemas.microsoft.com/office/drawing/2014/main" id="{E7F87AEB-C079-7167-0F2C-131D1602F063}"/>
-              </a:ext>
-            </a:extLst>
-          </p:cNvPr>
-          <p:cNvSpPr>
-            <a:spLocks noGrp="1"/>
-          </p:cNvSpPr>
-          <p:nvPr>
-            <p:ph type="ftr" sz="quarter" idx="15"/>
-          </p:nvPr>
-        </p:nvSpPr>
-        <p:spPr/>
-        <p:txBody>
-          <a:bodyPr/>
-          <a:lstStyle/>
-          <a:p>
-            <a:r>
-              <a:rPr lang="en-GB"/>
-              <a:t>PPT Template 2.0</a:t>
-            </a:r>
-            <a:endParaRPr lang="en-CZ" dirty="0"/>
-          </a:p>
-        </p:txBody>
-      </p:sp>
-      <p:sp>
-        <p:nvSpPr>
-          <p:cNvPr id="6" name="Picture Placeholder 5">
-            <a:extLst>
-              <a:ext uri="{FF2B5EF4-FFF2-40B4-BE49-F238E27FC236}">
-                <a16:creationId xmlns:a16="http://schemas.microsoft.com/office/drawing/2014/main" id="{9C1FB568-7648-BFB5-782F-F713AD4A1372}"/>
-              </a:ext>
-            </a:extLst>
-          </p:cNvPr>
-          <p:cNvSpPr>
-            <a:spLocks noGrp="1"/>
-          </p:cNvSpPr>
-          <p:nvPr>
-            <p:ph type="pic" sz="quarter" idx="20"/>
-          </p:nvPr>
-        </p:nvSpPr>
-        <p:spPr/>
-        <p:txBody>
-          <a:bodyPr/>
-          <a:lstStyle/>
-          <a:p>
-            <a:endParaRPr lang="en-CZ"/>
-          </a:p>
-        </p:txBody>
-      </p:sp>
-      <p:sp>
-        <p:nvSpPr>
-          <p:cNvPr id="7" name="Text Placeholder 6">
-            <a:extLst>
-              <a:ext uri="{FF2B5EF4-FFF2-40B4-BE49-F238E27FC236}">
-                <a16:creationId xmlns:a16="http://schemas.microsoft.com/office/drawing/2014/main" id="{15C5AA68-C1BB-C962-A93D-180136424A97}"/>
-              </a:ext>
-            </a:extLst>
-          </p:cNvPr>
-          <p:cNvSpPr>
-            <a:spLocks noGrp="1"/>
-          </p:cNvSpPr>
-          <p:nvPr>
-            <p:ph type="body" sz="quarter" idx="21"/>
-          </p:nvPr>
-        </p:nvSpPr>
-        <p:spPr/>
-        <p:txBody>
-          <a:bodyPr/>
-          <a:lstStyle/>
-          <a:p>
-            <a:endParaRPr lang="en-CZ"/>
-          </a:p>
-        </p:txBody>
-      </p:sp>
-      <p:sp>
-        <p:nvSpPr>
-          <p:cNvPr id="8" name="Text Placeholder 7">
-            <a:extLst>
-              <a:ext uri="{FF2B5EF4-FFF2-40B4-BE49-F238E27FC236}">
-                <a16:creationId xmlns:a16="http://schemas.microsoft.com/office/drawing/2014/main" id="{704FC669-E625-69C1-7210-14683BCCCAB9}"/>
-              </a:ext>
-            </a:extLst>
-          </p:cNvPr>
-          <p:cNvSpPr>
-            <a:spLocks noGrp="1"/>
-          </p:cNvSpPr>
-          <p:nvPr>
-            <p:ph type="body" sz="quarter" idx="16"/>
-          </p:nvPr>
-        </p:nvSpPr>
-        <p:spPr/>
-        <p:txBody>
-          <a:bodyPr/>
-          <a:lstStyle/>
-          <a:p>
-            <a:endParaRPr lang="en-CZ"/>
-          </a:p>
-        </p:txBody>
-      </p:sp>
-      <p:sp>
-        <p:nvSpPr>
-          <p:cNvPr id="9" name="Text Placeholder 8">
-            <a:extLst>
-              <a:ext uri="{FF2B5EF4-FFF2-40B4-BE49-F238E27FC236}">
-                <a16:creationId xmlns:a16="http://schemas.microsoft.com/office/drawing/2014/main" id="{634FFC1D-CE79-ECBF-83D3-D23047C5F353}"/>
-              </a:ext>
-            </a:extLst>
-          </p:cNvPr>
-          <p:cNvSpPr>
-            <a:spLocks noGrp="1"/>
-          </p:cNvSpPr>
-          <p:nvPr>
-            <p:ph type="body" sz="quarter" idx="22"/>
-          </p:nvPr>
-        </p:nvSpPr>
-        <p:spPr/>
-        <p:txBody>
-          <a:bodyPr/>
-          <a:lstStyle/>
-          <a:p>
-            <a:endParaRPr lang="en-CZ"/>
-          </a:p>
-        </p:txBody>
-      </p:sp>
-    </p:spTree>
-    <p:extLst>
-      <p:ext uri="{BB962C8B-B14F-4D97-AF65-F5344CB8AC3E}">
-        <p14:creationId xmlns:p14="http://schemas.microsoft.com/office/powerpoint/2010/main" val="2254263275"/>
       </p:ext>
     </p:extLst>
   </p:cSld>
@@ -19357,1597 +18139,6 @@
       </p:grpSpPr>
       <p:sp>
         <p:nvSpPr>
-          <p:cNvPr id="2" name="Text Placeholder 1">
-            <a:extLst>
-              <a:ext uri="{FF2B5EF4-FFF2-40B4-BE49-F238E27FC236}">
-                <a16:creationId xmlns:a16="http://schemas.microsoft.com/office/drawing/2014/main" id="{E94F59E0-A54D-8880-FE9B-BCC10455553B}"/>
-              </a:ext>
-            </a:extLst>
-          </p:cNvPr>
-          <p:cNvSpPr>
-            <a:spLocks noGrp="1"/>
-          </p:cNvSpPr>
-          <p:nvPr>
-            <p:ph type="body" sz="quarter" idx="12"/>
-          </p:nvPr>
-        </p:nvSpPr>
-        <p:spPr/>
-        <p:txBody>
-          <a:bodyPr/>
-          <a:lstStyle/>
-          <a:p>
-            <a:endParaRPr lang="en-CZ" dirty="0"/>
-          </a:p>
-        </p:txBody>
-      </p:sp>
-      <p:sp>
-        <p:nvSpPr>
-          <p:cNvPr id="3" name="Text Placeholder 2">
-            <a:extLst>
-              <a:ext uri="{FF2B5EF4-FFF2-40B4-BE49-F238E27FC236}">
-                <a16:creationId xmlns:a16="http://schemas.microsoft.com/office/drawing/2014/main" id="{5E42AF8B-BD9F-6692-BB30-05744C0EEEE8}"/>
-              </a:ext>
-            </a:extLst>
-          </p:cNvPr>
-          <p:cNvSpPr>
-            <a:spLocks noGrp="1"/>
-          </p:cNvSpPr>
-          <p:nvPr>
-            <p:ph type="body" sz="quarter" idx="14"/>
-          </p:nvPr>
-        </p:nvSpPr>
-        <p:spPr/>
-        <p:txBody>
-          <a:bodyPr/>
-          <a:lstStyle/>
-          <a:p>
-            <a:endParaRPr lang="en-CZ"/>
-          </a:p>
-        </p:txBody>
-      </p:sp>
-      <p:sp>
-        <p:nvSpPr>
-          <p:cNvPr id="4" name="Picture Placeholder 3">
-            <a:extLst>
-              <a:ext uri="{FF2B5EF4-FFF2-40B4-BE49-F238E27FC236}">
-                <a16:creationId xmlns:a16="http://schemas.microsoft.com/office/drawing/2014/main" id="{88ACD3AB-3FEE-D25B-37C9-932883127E0F}"/>
-              </a:ext>
-            </a:extLst>
-          </p:cNvPr>
-          <p:cNvSpPr>
-            <a:spLocks noGrp="1"/>
-          </p:cNvSpPr>
-          <p:nvPr>
-            <p:ph type="pic" sz="quarter" idx="15"/>
-          </p:nvPr>
-        </p:nvSpPr>
-        <p:spPr/>
-        <p:txBody>
-          <a:bodyPr/>
-          <a:lstStyle/>
-          <a:p>
-            <a:endParaRPr lang="en-CZ" dirty="0"/>
-          </a:p>
-        </p:txBody>
-      </p:sp>
-    </p:spTree>
-    <p:extLst>
-      <p:ext uri="{BB962C8B-B14F-4D97-AF65-F5344CB8AC3E}">
-        <p14:creationId xmlns:p14="http://schemas.microsoft.com/office/powerpoint/2010/main" val="4212137710"/>
-      </p:ext>
-    </p:extLst>
-  </p:cSld>
-  <p:clrMapOvr>
-    <a:masterClrMapping/>
-  </p:clrMapOvr>
-</p:sld>
-</file>
-
-<file path=ppt/slides/slide20.xml><?xml version="1.0" encoding="utf-8"?>
-<p:sld xmlns:a="http://schemas.openxmlformats.org/drawingml/2006/main" xmlns:r="http://schemas.openxmlformats.org/officeDocument/2006/relationships" xmlns:p="http://schemas.openxmlformats.org/presentationml/2006/main">
-  <p:cSld>
-    <p:spTree>
-      <p:nvGrpSpPr>
-        <p:cNvPr id="1" name=""/>
-        <p:cNvGrpSpPr/>
-        <p:nvPr/>
-      </p:nvGrpSpPr>
-      <p:grpSpPr>
-        <a:xfrm>
-          <a:off x="0" y="0"/>
-          <a:ext cx="0" cy="0"/>
-          <a:chOff x="0" y="0"/>
-          <a:chExt cx="0" cy="0"/>
-        </a:xfrm>
-      </p:grpSpPr>
-      <p:sp>
-        <p:nvSpPr>
-          <p:cNvPr id="2" name="Slide Number Placeholder 1">
-            <a:extLst>
-              <a:ext uri="{FF2B5EF4-FFF2-40B4-BE49-F238E27FC236}">
-                <a16:creationId xmlns:a16="http://schemas.microsoft.com/office/drawing/2014/main" id="{CA692F12-09C3-C7CA-7B13-ABE6AACDE254}"/>
-              </a:ext>
-            </a:extLst>
-          </p:cNvPr>
-          <p:cNvSpPr>
-            <a:spLocks noGrp="1"/>
-          </p:cNvSpPr>
-          <p:nvPr>
-            <p:ph type="sldNum" sz="quarter" idx="12"/>
-          </p:nvPr>
-        </p:nvSpPr>
-        <p:spPr/>
-        <p:txBody>
-          <a:bodyPr/>
-          <a:lstStyle/>
-          <a:p>
-            <a:fld id="{5AF2E7C1-CA82-F241-8934-AACDE30393F4}" type="slidenum">
-              <a:rPr lang="en-CZ" smtClean="0"/>
-              <a:pPr/>
-              <a:t>20</a:t>
-            </a:fld>
-            <a:endParaRPr lang="en-CZ" dirty="0"/>
-          </a:p>
-        </p:txBody>
-      </p:sp>
-      <p:sp>
-        <p:nvSpPr>
-          <p:cNvPr id="3" name="Text Placeholder 2">
-            <a:extLst>
-              <a:ext uri="{FF2B5EF4-FFF2-40B4-BE49-F238E27FC236}">
-                <a16:creationId xmlns:a16="http://schemas.microsoft.com/office/drawing/2014/main" id="{24FBD77E-B35A-1FEE-9C21-66950FC094B0}"/>
-              </a:ext>
-            </a:extLst>
-          </p:cNvPr>
-          <p:cNvSpPr>
-            <a:spLocks noGrp="1"/>
-          </p:cNvSpPr>
-          <p:nvPr>
-            <p:ph type="body" sz="quarter" idx="13"/>
-          </p:nvPr>
-        </p:nvSpPr>
-        <p:spPr/>
-        <p:txBody>
-          <a:bodyPr/>
-          <a:lstStyle/>
-          <a:p>
-            <a:endParaRPr lang="en-CZ"/>
-          </a:p>
-        </p:txBody>
-      </p:sp>
-      <p:sp>
-        <p:nvSpPr>
-          <p:cNvPr id="4" name="Text Placeholder 3">
-            <a:extLst>
-              <a:ext uri="{FF2B5EF4-FFF2-40B4-BE49-F238E27FC236}">
-                <a16:creationId xmlns:a16="http://schemas.microsoft.com/office/drawing/2014/main" id="{971D53C1-6CE0-D297-FAC4-A73219E29677}"/>
-              </a:ext>
-            </a:extLst>
-          </p:cNvPr>
-          <p:cNvSpPr>
-            <a:spLocks noGrp="1"/>
-          </p:cNvSpPr>
-          <p:nvPr>
-            <p:ph type="body" sz="quarter" idx="14"/>
-          </p:nvPr>
-        </p:nvSpPr>
-        <p:spPr/>
-        <p:txBody>
-          <a:bodyPr/>
-          <a:lstStyle/>
-          <a:p>
-            <a:endParaRPr lang="en-CZ"/>
-          </a:p>
-        </p:txBody>
-      </p:sp>
-      <p:sp>
-        <p:nvSpPr>
-          <p:cNvPr id="5" name="Footer Placeholder 4">
-            <a:extLst>
-              <a:ext uri="{FF2B5EF4-FFF2-40B4-BE49-F238E27FC236}">
-                <a16:creationId xmlns:a16="http://schemas.microsoft.com/office/drawing/2014/main" id="{39999E0A-3D0F-FD9F-6F4D-090EDB2C817E}"/>
-              </a:ext>
-            </a:extLst>
-          </p:cNvPr>
-          <p:cNvSpPr>
-            <a:spLocks noGrp="1"/>
-          </p:cNvSpPr>
-          <p:nvPr>
-            <p:ph type="ftr" sz="quarter" idx="15"/>
-          </p:nvPr>
-        </p:nvSpPr>
-        <p:spPr/>
-        <p:txBody>
-          <a:bodyPr/>
-          <a:lstStyle/>
-          <a:p>
-            <a:r>
-              <a:rPr lang="en-GB"/>
-              <a:t>PPT Template 2.0</a:t>
-            </a:r>
-            <a:endParaRPr lang="en-CZ" dirty="0"/>
-          </a:p>
-        </p:txBody>
-      </p:sp>
-      <p:sp>
-        <p:nvSpPr>
-          <p:cNvPr id="6" name="Text Placeholder 5">
-            <a:extLst>
-              <a:ext uri="{FF2B5EF4-FFF2-40B4-BE49-F238E27FC236}">
-                <a16:creationId xmlns:a16="http://schemas.microsoft.com/office/drawing/2014/main" id="{B2EF9616-9881-8565-CF33-0021CB7C7BCA}"/>
-              </a:ext>
-            </a:extLst>
-          </p:cNvPr>
-          <p:cNvSpPr>
-            <a:spLocks noGrp="1"/>
-          </p:cNvSpPr>
-          <p:nvPr>
-            <p:ph type="body" sz="quarter" idx="20"/>
-          </p:nvPr>
-        </p:nvSpPr>
-        <p:spPr/>
-        <p:txBody>
-          <a:bodyPr/>
-          <a:lstStyle/>
-          <a:p>
-            <a:endParaRPr lang="en-CZ"/>
-          </a:p>
-        </p:txBody>
-      </p:sp>
-      <p:sp>
-        <p:nvSpPr>
-          <p:cNvPr id="7" name="Text Placeholder 6">
-            <a:extLst>
-              <a:ext uri="{FF2B5EF4-FFF2-40B4-BE49-F238E27FC236}">
-                <a16:creationId xmlns:a16="http://schemas.microsoft.com/office/drawing/2014/main" id="{B7DC69C4-E730-6067-8040-FBBF33C79113}"/>
-              </a:ext>
-            </a:extLst>
-          </p:cNvPr>
-          <p:cNvSpPr>
-            <a:spLocks noGrp="1"/>
-          </p:cNvSpPr>
-          <p:nvPr>
-            <p:ph type="body" sz="quarter" idx="21"/>
-          </p:nvPr>
-        </p:nvSpPr>
-        <p:spPr/>
-        <p:txBody>
-          <a:bodyPr/>
-          <a:lstStyle/>
-          <a:p>
-            <a:endParaRPr lang="en-CZ"/>
-          </a:p>
-        </p:txBody>
-      </p:sp>
-      <p:sp>
-        <p:nvSpPr>
-          <p:cNvPr id="8" name="Picture Placeholder 7">
-            <a:extLst>
-              <a:ext uri="{FF2B5EF4-FFF2-40B4-BE49-F238E27FC236}">
-                <a16:creationId xmlns:a16="http://schemas.microsoft.com/office/drawing/2014/main" id="{FF8BD944-66CF-9D12-39D9-773981EF2C41}"/>
-              </a:ext>
-            </a:extLst>
-          </p:cNvPr>
-          <p:cNvSpPr>
-            <a:spLocks noGrp="1"/>
-          </p:cNvSpPr>
-          <p:nvPr>
-            <p:ph type="pic" sz="quarter" idx="19"/>
-          </p:nvPr>
-        </p:nvSpPr>
-        <p:spPr/>
-        <p:txBody>
-          <a:bodyPr/>
-          <a:lstStyle/>
-          <a:p>
-            <a:endParaRPr lang="en-CZ"/>
-          </a:p>
-        </p:txBody>
-      </p:sp>
-    </p:spTree>
-    <p:extLst>
-      <p:ext uri="{BB962C8B-B14F-4D97-AF65-F5344CB8AC3E}">
-        <p14:creationId xmlns:p14="http://schemas.microsoft.com/office/powerpoint/2010/main" val="912108739"/>
-      </p:ext>
-    </p:extLst>
-  </p:cSld>
-  <p:clrMapOvr>
-    <a:masterClrMapping/>
-  </p:clrMapOvr>
-</p:sld>
-</file>
-
-<file path=ppt/slides/slide21.xml><?xml version="1.0" encoding="utf-8"?>
-<p:sld xmlns:a="http://schemas.openxmlformats.org/drawingml/2006/main" xmlns:r="http://schemas.openxmlformats.org/officeDocument/2006/relationships" xmlns:p="http://schemas.openxmlformats.org/presentationml/2006/main">
-  <p:cSld>
-    <p:spTree>
-      <p:nvGrpSpPr>
-        <p:cNvPr id="1" name=""/>
-        <p:cNvGrpSpPr/>
-        <p:nvPr/>
-      </p:nvGrpSpPr>
-      <p:grpSpPr>
-        <a:xfrm>
-          <a:off x="0" y="0"/>
-          <a:ext cx="0" cy="0"/>
-          <a:chOff x="0" y="0"/>
-          <a:chExt cx="0" cy="0"/>
-        </a:xfrm>
-      </p:grpSpPr>
-      <p:sp>
-        <p:nvSpPr>
-          <p:cNvPr id="2" name="Slide Number Placeholder 1">
-            <a:extLst>
-              <a:ext uri="{FF2B5EF4-FFF2-40B4-BE49-F238E27FC236}">
-                <a16:creationId xmlns:a16="http://schemas.microsoft.com/office/drawing/2014/main" id="{840FA214-25A2-A2D1-0796-BDF566A8E263}"/>
-              </a:ext>
-            </a:extLst>
-          </p:cNvPr>
-          <p:cNvSpPr>
-            <a:spLocks noGrp="1"/>
-          </p:cNvSpPr>
-          <p:nvPr>
-            <p:ph type="sldNum" sz="quarter" idx="12"/>
-          </p:nvPr>
-        </p:nvSpPr>
-        <p:spPr/>
-        <p:txBody>
-          <a:bodyPr/>
-          <a:lstStyle/>
-          <a:p>
-            <a:fld id="{5AF2E7C1-CA82-F241-8934-AACDE30393F4}" type="slidenum">
-              <a:rPr lang="en-CZ" smtClean="0"/>
-              <a:pPr/>
-              <a:t>21</a:t>
-            </a:fld>
-            <a:endParaRPr lang="en-CZ" dirty="0"/>
-          </a:p>
-        </p:txBody>
-      </p:sp>
-      <p:sp>
-        <p:nvSpPr>
-          <p:cNvPr id="3" name="Text Placeholder 2">
-            <a:extLst>
-              <a:ext uri="{FF2B5EF4-FFF2-40B4-BE49-F238E27FC236}">
-                <a16:creationId xmlns:a16="http://schemas.microsoft.com/office/drawing/2014/main" id="{321754C1-EBC3-9783-1F6E-0C69B744C588}"/>
-              </a:ext>
-            </a:extLst>
-          </p:cNvPr>
-          <p:cNvSpPr>
-            <a:spLocks noGrp="1"/>
-          </p:cNvSpPr>
-          <p:nvPr>
-            <p:ph type="body" sz="quarter" idx="13"/>
-          </p:nvPr>
-        </p:nvSpPr>
-        <p:spPr/>
-        <p:txBody>
-          <a:bodyPr/>
-          <a:lstStyle/>
-          <a:p>
-            <a:endParaRPr lang="en-CZ"/>
-          </a:p>
-        </p:txBody>
-      </p:sp>
-      <p:sp>
-        <p:nvSpPr>
-          <p:cNvPr id="4" name="Text Placeholder 3">
-            <a:extLst>
-              <a:ext uri="{FF2B5EF4-FFF2-40B4-BE49-F238E27FC236}">
-                <a16:creationId xmlns:a16="http://schemas.microsoft.com/office/drawing/2014/main" id="{0930B45C-0417-9E17-086A-8A4CF7B98B7A}"/>
-              </a:ext>
-            </a:extLst>
-          </p:cNvPr>
-          <p:cNvSpPr>
-            <a:spLocks noGrp="1"/>
-          </p:cNvSpPr>
-          <p:nvPr>
-            <p:ph type="body" sz="quarter" idx="14"/>
-          </p:nvPr>
-        </p:nvSpPr>
-        <p:spPr/>
-        <p:txBody>
-          <a:bodyPr/>
-          <a:lstStyle/>
-          <a:p>
-            <a:endParaRPr lang="en-CZ"/>
-          </a:p>
-        </p:txBody>
-      </p:sp>
-      <p:sp>
-        <p:nvSpPr>
-          <p:cNvPr id="5" name="Footer Placeholder 4">
-            <a:extLst>
-              <a:ext uri="{FF2B5EF4-FFF2-40B4-BE49-F238E27FC236}">
-                <a16:creationId xmlns:a16="http://schemas.microsoft.com/office/drawing/2014/main" id="{7866B54B-E87F-649F-B37D-AF0F0B1A33C2}"/>
-              </a:ext>
-            </a:extLst>
-          </p:cNvPr>
-          <p:cNvSpPr>
-            <a:spLocks noGrp="1"/>
-          </p:cNvSpPr>
-          <p:nvPr>
-            <p:ph type="ftr" sz="quarter" idx="15"/>
-          </p:nvPr>
-        </p:nvSpPr>
-        <p:spPr/>
-        <p:txBody>
-          <a:bodyPr/>
-          <a:lstStyle/>
-          <a:p>
-            <a:r>
-              <a:rPr lang="en-GB"/>
-              <a:t>PPT Template 2.0</a:t>
-            </a:r>
-            <a:endParaRPr lang="en-CZ" dirty="0"/>
-          </a:p>
-        </p:txBody>
-      </p:sp>
-      <p:sp>
-        <p:nvSpPr>
-          <p:cNvPr id="6" name="Picture Placeholder 5">
-            <a:extLst>
-              <a:ext uri="{FF2B5EF4-FFF2-40B4-BE49-F238E27FC236}">
-                <a16:creationId xmlns:a16="http://schemas.microsoft.com/office/drawing/2014/main" id="{73E9D70D-F613-CDA4-95D9-2FD9DB5E0023}"/>
-              </a:ext>
-            </a:extLst>
-          </p:cNvPr>
-          <p:cNvSpPr>
-            <a:spLocks noGrp="1"/>
-          </p:cNvSpPr>
-          <p:nvPr>
-            <p:ph type="pic" sz="quarter" idx="22"/>
-          </p:nvPr>
-        </p:nvSpPr>
-        <p:spPr/>
-        <p:txBody>
-          <a:bodyPr/>
-          <a:lstStyle/>
-          <a:p>
-            <a:endParaRPr lang="en-CZ"/>
-          </a:p>
-        </p:txBody>
-      </p:sp>
-      <p:sp>
-        <p:nvSpPr>
-          <p:cNvPr id="7" name="Text Placeholder 6">
-            <a:extLst>
-              <a:ext uri="{FF2B5EF4-FFF2-40B4-BE49-F238E27FC236}">
-                <a16:creationId xmlns:a16="http://schemas.microsoft.com/office/drawing/2014/main" id="{571526C2-724E-3CAA-431B-EF32845D6F2B}"/>
-              </a:ext>
-            </a:extLst>
-          </p:cNvPr>
-          <p:cNvSpPr>
-            <a:spLocks noGrp="1"/>
-          </p:cNvSpPr>
-          <p:nvPr>
-            <p:ph type="body" sz="quarter" idx="23"/>
-          </p:nvPr>
-        </p:nvSpPr>
-        <p:spPr/>
-        <p:txBody>
-          <a:bodyPr/>
-          <a:lstStyle/>
-          <a:p>
-            <a:endParaRPr lang="en-CZ"/>
-          </a:p>
-        </p:txBody>
-      </p:sp>
-      <p:sp>
-        <p:nvSpPr>
-          <p:cNvPr id="8" name="Text Placeholder 7">
-            <a:extLst>
-              <a:ext uri="{FF2B5EF4-FFF2-40B4-BE49-F238E27FC236}">
-                <a16:creationId xmlns:a16="http://schemas.microsoft.com/office/drawing/2014/main" id="{850D5260-991D-7205-1C66-49DF928141FD}"/>
-              </a:ext>
-            </a:extLst>
-          </p:cNvPr>
-          <p:cNvSpPr>
-            <a:spLocks noGrp="1"/>
-          </p:cNvSpPr>
-          <p:nvPr>
-            <p:ph type="body" sz="quarter" idx="20"/>
-          </p:nvPr>
-        </p:nvSpPr>
-        <p:spPr/>
-        <p:txBody>
-          <a:bodyPr/>
-          <a:lstStyle/>
-          <a:p>
-            <a:endParaRPr lang="en-CZ"/>
-          </a:p>
-        </p:txBody>
-      </p:sp>
-      <p:sp>
-        <p:nvSpPr>
-          <p:cNvPr id="9" name="Text Placeholder 8">
-            <a:extLst>
-              <a:ext uri="{FF2B5EF4-FFF2-40B4-BE49-F238E27FC236}">
-                <a16:creationId xmlns:a16="http://schemas.microsoft.com/office/drawing/2014/main" id="{E5004036-DD08-32E5-E684-6EAC04663B2B}"/>
-              </a:ext>
-            </a:extLst>
-          </p:cNvPr>
-          <p:cNvSpPr>
-            <a:spLocks noGrp="1"/>
-          </p:cNvSpPr>
-          <p:nvPr>
-            <p:ph type="body" sz="quarter" idx="21"/>
-          </p:nvPr>
-        </p:nvSpPr>
-        <p:spPr/>
-        <p:txBody>
-          <a:bodyPr/>
-          <a:lstStyle/>
-          <a:p>
-            <a:endParaRPr lang="en-CZ"/>
-          </a:p>
-        </p:txBody>
-      </p:sp>
-      <p:sp>
-        <p:nvSpPr>
-          <p:cNvPr id="10" name="Text Placeholder 9">
-            <a:extLst>
-              <a:ext uri="{FF2B5EF4-FFF2-40B4-BE49-F238E27FC236}">
-                <a16:creationId xmlns:a16="http://schemas.microsoft.com/office/drawing/2014/main" id="{0A30025C-BBA5-FCDD-8796-55DBBC7F4CA3}"/>
-              </a:ext>
-            </a:extLst>
-          </p:cNvPr>
-          <p:cNvSpPr>
-            <a:spLocks noGrp="1"/>
-          </p:cNvSpPr>
-          <p:nvPr>
-            <p:ph type="body" sz="quarter" idx="24"/>
-          </p:nvPr>
-        </p:nvSpPr>
-        <p:spPr/>
-        <p:txBody>
-          <a:bodyPr/>
-          <a:lstStyle/>
-          <a:p>
-            <a:endParaRPr lang="en-CZ"/>
-          </a:p>
-        </p:txBody>
-      </p:sp>
-    </p:spTree>
-    <p:extLst>
-      <p:ext uri="{BB962C8B-B14F-4D97-AF65-F5344CB8AC3E}">
-        <p14:creationId xmlns:p14="http://schemas.microsoft.com/office/powerpoint/2010/main" val="1720631174"/>
-      </p:ext>
-    </p:extLst>
-  </p:cSld>
-  <p:clrMapOvr>
-    <a:masterClrMapping/>
-  </p:clrMapOvr>
-</p:sld>
-</file>
-
-<file path=ppt/slides/slide22.xml><?xml version="1.0" encoding="utf-8"?>
-<p:sld xmlns:a="http://schemas.openxmlformats.org/drawingml/2006/main" xmlns:r="http://schemas.openxmlformats.org/officeDocument/2006/relationships" xmlns:p="http://schemas.openxmlformats.org/presentationml/2006/main">
-  <p:cSld>
-    <p:spTree>
-      <p:nvGrpSpPr>
-        <p:cNvPr id="1" name=""/>
-        <p:cNvGrpSpPr/>
-        <p:nvPr/>
-      </p:nvGrpSpPr>
-      <p:grpSpPr>
-        <a:xfrm>
-          <a:off x="0" y="0"/>
-          <a:ext cx="0" cy="0"/>
-          <a:chOff x="0" y="0"/>
-          <a:chExt cx="0" cy="0"/>
-        </a:xfrm>
-      </p:grpSpPr>
-      <p:sp>
-        <p:nvSpPr>
-          <p:cNvPr id="2" name="Slide Number Placeholder 1">
-            <a:extLst>
-              <a:ext uri="{FF2B5EF4-FFF2-40B4-BE49-F238E27FC236}">
-                <a16:creationId xmlns:a16="http://schemas.microsoft.com/office/drawing/2014/main" id="{6BD259E0-2DB7-5092-5994-AD792C0BB082}"/>
-              </a:ext>
-            </a:extLst>
-          </p:cNvPr>
-          <p:cNvSpPr>
-            <a:spLocks noGrp="1"/>
-          </p:cNvSpPr>
-          <p:nvPr>
-            <p:ph type="sldNum" sz="quarter" idx="12"/>
-          </p:nvPr>
-        </p:nvSpPr>
-        <p:spPr/>
-        <p:txBody>
-          <a:bodyPr/>
-          <a:lstStyle/>
-          <a:p>
-            <a:fld id="{5AF2E7C1-CA82-F241-8934-AACDE30393F4}" type="slidenum">
-              <a:rPr lang="en-CZ" smtClean="0"/>
-              <a:pPr/>
-              <a:t>22</a:t>
-            </a:fld>
-            <a:endParaRPr lang="en-CZ" dirty="0"/>
-          </a:p>
-        </p:txBody>
-      </p:sp>
-      <p:sp>
-        <p:nvSpPr>
-          <p:cNvPr id="3" name="Text Placeholder 2">
-            <a:extLst>
-              <a:ext uri="{FF2B5EF4-FFF2-40B4-BE49-F238E27FC236}">
-                <a16:creationId xmlns:a16="http://schemas.microsoft.com/office/drawing/2014/main" id="{CC5D71A8-AE77-D0F6-A0BD-A7B81D006C06}"/>
-              </a:ext>
-            </a:extLst>
-          </p:cNvPr>
-          <p:cNvSpPr>
-            <a:spLocks noGrp="1"/>
-          </p:cNvSpPr>
-          <p:nvPr>
-            <p:ph type="body" sz="quarter" idx="13"/>
-          </p:nvPr>
-        </p:nvSpPr>
-        <p:spPr/>
-        <p:txBody>
-          <a:bodyPr/>
-          <a:lstStyle/>
-          <a:p>
-            <a:endParaRPr lang="en-CZ"/>
-          </a:p>
-        </p:txBody>
-      </p:sp>
-      <p:sp>
-        <p:nvSpPr>
-          <p:cNvPr id="4" name="Text Placeholder 3">
-            <a:extLst>
-              <a:ext uri="{FF2B5EF4-FFF2-40B4-BE49-F238E27FC236}">
-                <a16:creationId xmlns:a16="http://schemas.microsoft.com/office/drawing/2014/main" id="{2C72AF77-3E41-3E27-1166-BA38FB8F9453}"/>
-              </a:ext>
-            </a:extLst>
-          </p:cNvPr>
-          <p:cNvSpPr>
-            <a:spLocks noGrp="1"/>
-          </p:cNvSpPr>
-          <p:nvPr>
-            <p:ph type="body" sz="quarter" idx="14"/>
-          </p:nvPr>
-        </p:nvSpPr>
-        <p:spPr/>
-        <p:txBody>
-          <a:bodyPr/>
-          <a:lstStyle/>
-          <a:p>
-            <a:endParaRPr lang="en-CZ"/>
-          </a:p>
-        </p:txBody>
-      </p:sp>
-      <p:sp>
-        <p:nvSpPr>
-          <p:cNvPr id="5" name="Footer Placeholder 4">
-            <a:extLst>
-              <a:ext uri="{FF2B5EF4-FFF2-40B4-BE49-F238E27FC236}">
-                <a16:creationId xmlns:a16="http://schemas.microsoft.com/office/drawing/2014/main" id="{35B92C0F-2E1B-0F70-0E95-3B268A9A246B}"/>
-              </a:ext>
-            </a:extLst>
-          </p:cNvPr>
-          <p:cNvSpPr>
-            <a:spLocks noGrp="1"/>
-          </p:cNvSpPr>
-          <p:nvPr>
-            <p:ph type="ftr" sz="quarter" idx="15"/>
-          </p:nvPr>
-        </p:nvSpPr>
-        <p:spPr/>
-        <p:txBody>
-          <a:bodyPr/>
-          <a:lstStyle/>
-          <a:p>
-            <a:r>
-              <a:rPr lang="en-GB"/>
-              <a:t>PPT Template 2.0</a:t>
-            </a:r>
-            <a:endParaRPr lang="en-CZ" dirty="0"/>
-          </a:p>
-        </p:txBody>
-      </p:sp>
-      <p:sp>
-        <p:nvSpPr>
-          <p:cNvPr id="6" name="Text Placeholder 5">
-            <a:extLst>
-              <a:ext uri="{FF2B5EF4-FFF2-40B4-BE49-F238E27FC236}">
-                <a16:creationId xmlns:a16="http://schemas.microsoft.com/office/drawing/2014/main" id="{DFA5AD3F-4D1A-0AD3-967E-DCF157796E74}"/>
-              </a:ext>
-            </a:extLst>
-          </p:cNvPr>
-          <p:cNvSpPr>
-            <a:spLocks noGrp="1"/>
-          </p:cNvSpPr>
-          <p:nvPr>
-            <p:ph type="body" sz="quarter" idx="20"/>
-          </p:nvPr>
-        </p:nvSpPr>
-        <p:spPr/>
-        <p:txBody>
-          <a:bodyPr/>
-          <a:lstStyle/>
-          <a:p>
-            <a:endParaRPr lang="en-CZ"/>
-          </a:p>
-        </p:txBody>
-      </p:sp>
-      <p:sp>
-        <p:nvSpPr>
-          <p:cNvPr id="7" name="Picture Placeholder 6">
-            <a:extLst>
-              <a:ext uri="{FF2B5EF4-FFF2-40B4-BE49-F238E27FC236}">
-                <a16:creationId xmlns:a16="http://schemas.microsoft.com/office/drawing/2014/main" id="{0C4AF36A-3139-E5CA-35AD-12D2A28ECDBC}"/>
-              </a:ext>
-            </a:extLst>
-          </p:cNvPr>
-          <p:cNvSpPr>
-            <a:spLocks noGrp="1"/>
-          </p:cNvSpPr>
-          <p:nvPr>
-            <p:ph type="pic" sz="quarter" idx="19"/>
-          </p:nvPr>
-        </p:nvSpPr>
-        <p:spPr/>
-        <p:txBody>
-          <a:bodyPr/>
-          <a:lstStyle/>
-          <a:p>
-            <a:endParaRPr lang="en-CZ"/>
-          </a:p>
-        </p:txBody>
-      </p:sp>
-      <p:sp>
-        <p:nvSpPr>
-          <p:cNvPr id="8" name="Text Placeholder 7">
-            <a:extLst>
-              <a:ext uri="{FF2B5EF4-FFF2-40B4-BE49-F238E27FC236}">
-                <a16:creationId xmlns:a16="http://schemas.microsoft.com/office/drawing/2014/main" id="{C2EBBDEB-BD64-5A5C-D750-091468B67060}"/>
-              </a:ext>
-            </a:extLst>
-          </p:cNvPr>
-          <p:cNvSpPr>
-            <a:spLocks noGrp="1"/>
-          </p:cNvSpPr>
-          <p:nvPr>
-            <p:ph type="body" sz="quarter" idx="18"/>
-          </p:nvPr>
-        </p:nvSpPr>
-        <p:spPr/>
-        <p:txBody>
-          <a:bodyPr/>
-          <a:lstStyle/>
-          <a:p>
-            <a:endParaRPr lang="en-CZ"/>
-          </a:p>
-        </p:txBody>
-      </p:sp>
-      <p:sp>
-        <p:nvSpPr>
-          <p:cNvPr id="9" name="Text Placeholder 8">
-            <a:extLst>
-              <a:ext uri="{FF2B5EF4-FFF2-40B4-BE49-F238E27FC236}">
-                <a16:creationId xmlns:a16="http://schemas.microsoft.com/office/drawing/2014/main" id="{E5F15609-D389-D5E3-B002-B8DBA12DD8FD}"/>
-              </a:ext>
-            </a:extLst>
-          </p:cNvPr>
-          <p:cNvSpPr>
-            <a:spLocks noGrp="1"/>
-          </p:cNvSpPr>
-          <p:nvPr>
-            <p:ph type="body" sz="quarter" idx="21"/>
-          </p:nvPr>
-        </p:nvSpPr>
-        <p:spPr/>
-        <p:txBody>
-          <a:bodyPr/>
-          <a:lstStyle/>
-          <a:p>
-            <a:endParaRPr lang="en-CZ"/>
-          </a:p>
-        </p:txBody>
-      </p:sp>
-      <p:sp>
-        <p:nvSpPr>
-          <p:cNvPr id="10" name="Text Placeholder 9">
-            <a:extLst>
-              <a:ext uri="{FF2B5EF4-FFF2-40B4-BE49-F238E27FC236}">
-                <a16:creationId xmlns:a16="http://schemas.microsoft.com/office/drawing/2014/main" id="{3AC4218B-CB0D-6102-93A8-4B1C18DC6498}"/>
-              </a:ext>
-            </a:extLst>
-          </p:cNvPr>
-          <p:cNvSpPr>
-            <a:spLocks noGrp="1"/>
-          </p:cNvSpPr>
-          <p:nvPr>
-            <p:ph type="body" sz="quarter" idx="22"/>
-          </p:nvPr>
-        </p:nvSpPr>
-        <p:spPr/>
-        <p:txBody>
-          <a:bodyPr/>
-          <a:lstStyle/>
-          <a:p>
-            <a:endParaRPr lang="en-CZ"/>
-          </a:p>
-        </p:txBody>
-      </p:sp>
-    </p:spTree>
-    <p:extLst>
-      <p:ext uri="{BB962C8B-B14F-4D97-AF65-F5344CB8AC3E}">
-        <p14:creationId xmlns:p14="http://schemas.microsoft.com/office/powerpoint/2010/main" val="1332348460"/>
-      </p:ext>
-    </p:extLst>
-  </p:cSld>
-  <p:clrMapOvr>
-    <a:masterClrMapping/>
-  </p:clrMapOvr>
-</p:sld>
-</file>
-
-<file path=ppt/slides/slide23.xml><?xml version="1.0" encoding="utf-8"?>
-<p:sld xmlns:a="http://schemas.openxmlformats.org/drawingml/2006/main" xmlns:r="http://schemas.openxmlformats.org/officeDocument/2006/relationships" xmlns:p="http://schemas.openxmlformats.org/presentationml/2006/main">
-  <p:cSld>
-    <p:spTree>
-      <p:nvGrpSpPr>
-        <p:cNvPr id="1" name=""/>
-        <p:cNvGrpSpPr/>
-        <p:nvPr/>
-      </p:nvGrpSpPr>
-      <p:grpSpPr>
-        <a:xfrm>
-          <a:off x="0" y="0"/>
-          <a:ext cx="0" cy="0"/>
-          <a:chOff x="0" y="0"/>
-          <a:chExt cx="0" cy="0"/>
-        </a:xfrm>
-      </p:grpSpPr>
-      <p:sp>
-        <p:nvSpPr>
-          <p:cNvPr id="2" name="Slide Number Placeholder 1">
-            <a:extLst>
-              <a:ext uri="{FF2B5EF4-FFF2-40B4-BE49-F238E27FC236}">
-                <a16:creationId xmlns:a16="http://schemas.microsoft.com/office/drawing/2014/main" id="{B621E8DD-5940-10AB-2E8D-301A345B63B7}"/>
-              </a:ext>
-            </a:extLst>
-          </p:cNvPr>
-          <p:cNvSpPr>
-            <a:spLocks noGrp="1"/>
-          </p:cNvSpPr>
-          <p:nvPr>
-            <p:ph type="sldNum" sz="quarter" idx="12"/>
-          </p:nvPr>
-        </p:nvSpPr>
-        <p:spPr/>
-        <p:txBody>
-          <a:bodyPr/>
-          <a:lstStyle/>
-          <a:p>
-            <a:fld id="{5AF2E7C1-CA82-F241-8934-AACDE30393F4}" type="slidenum">
-              <a:rPr lang="en-CZ" smtClean="0"/>
-              <a:pPr/>
-              <a:t>23</a:t>
-            </a:fld>
-            <a:endParaRPr lang="en-CZ" dirty="0"/>
-          </a:p>
-        </p:txBody>
-      </p:sp>
-      <p:sp>
-        <p:nvSpPr>
-          <p:cNvPr id="3" name="Text Placeholder 2">
-            <a:extLst>
-              <a:ext uri="{FF2B5EF4-FFF2-40B4-BE49-F238E27FC236}">
-                <a16:creationId xmlns:a16="http://schemas.microsoft.com/office/drawing/2014/main" id="{EF6A056C-64AE-93CC-F378-ADE9640A8BE4}"/>
-              </a:ext>
-            </a:extLst>
-          </p:cNvPr>
-          <p:cNvSpPr>
-            <a:spLocks noGrp="1"/>
-          </p:cNvSpPr>
-          <p:nvPr>
-            <p:ph type="body" sz="quarter" idx="13"/>
-          </p:nvPr>
-        </p:nvSpPr>
-        <p:spPr/>
-        <p:txBody>
-          <a:bodyPr/>
-          <a:lstStyle/>
-          <a:p>
-            <a:endParaRPr lang="en-CZ"/>
-          </a:p>
-        </p:txBody>
-      </p:sp>
-      <p:sp>
-        <p:nvSpPr>
-          <p:cNvPr id="4" name="Text Placeholder 3">
-            <a:extLst>
-              <a:ext uri="{FF2B5EF4-FFF2-40B4-BE49-F238E27FC236}">
-                <a16:creationId xmlns:a16="http://schemas.microsoft.com/office/drawing/2014/main" id="{9A4DC2D1-27CB-6B8D-212B-DAE568B7AA83}"/>
-              </a:ext>
-            </a:extLst>
-          </p:cNvPr>
-          <p:cNvSpPr>
-            <a:spLocks noGrp="1"/>
-          </p:cNvSpPr>
-          <p:nvPr>
-            <p:ph type="body" sz="quarter" idx="14"/>
-          </p:nvPr>
-        </p:nvSpPr>
-        <p:spPr/>
-        <p:txBody>
-          <a:bodyPr/>
-          <a:lstStyle/>
-          <a:p>
-            <a:endParaRPr lang="en-CZ"/>
-          </a:p>
-        </p:txBody>
-      </p:sp>
-      <p:sp>
-        <p:nvSpPr>
-          <p:cNvPr id="5" name="Footer Placeholder 4">
-            <a:extLst>
-              <a:ext uri="{FF2B5EF4-FFF2-40B4-BE49-F238E27FC236}">
-                <a16:creationId xmlns:a16="http://schemas.microsoft.com/office/drawing/2014/main" id="{39FBD115-63E6-D8BF-770B-6A4A2A5EC849}"/>
-              </a:ext>
-            </a:extLst>
-          </p:cNvPr>
-          <p:cNvSpPr>
-            <a:spLocks noGrp="1"/>
-          </p:cNvSpPr>
-          <p:nvPr>
-            <p:ph type="ftr" sz="quarter" idx="15"/>
-          </p:nvPr>
-        </p:nvSpPr>
-        <p:spPr/>
-        <p:txBody>
-          <a:bodyPr/>
-          <a:lstStyle/>
-          <a:p>
-            <a:r>
-              <a:rPr lang="en-GB"/>
-              <a:t>PPT Template 2.0</a:t>
-            </a:r>
-            <a:endParaRPr lang="en-CZ" dirty="0"/>
-          </a:p>
-        </p:txBody>
-      </p:sp>
-      <p:sp>
-        <p:nvSpPr>
-          <p:cNvPr id="6" name="Text Placeholder 5">
-            <a:extLst>
-              <a:ext uri="{FF2B5EF4-FFF2-40B4-BE49-F238E27FC236}">
-                <a16:creationId xmlns:a16="http://schemas.microsoft.com/office/drawing/2014/main" id="{48537545-9FB2-FBFB-4456-ED0E14D87A95}"/>
-              </a:ext>
-            </a:extLst>
-          </p:cNvPr>
-          <p:cNvSpPr>
-            <a:spLocks noGrp="1"/>
-          </p:cNvSpPr>
-          <p:nvPr>
-            <p:ph type="body" sz="quarter" idx="20"/>
-          </p:nvPr>
-        </p:nvSpPr>
-        <p:spPr/>
-        <p:txBody>
-          <a:bodyPr/>
-          <a:lstStyle/>
-          <a:p>
-            <a:endParaRPr lang="en-CZ"/>
-          </a:p>
-        </p:txBody>
-      </p:sp>
-      <p:sp>
-        <p:nvSpPr>
-          <p:cNvPr id="7" name="Text Placeholder 6">
-            <a:extLst>
-              <a:ext uri="{FF2B5EF4-FFF2-40B4-BE49-F238E27FC236}">
-                <a16:creationId xmlns:a16="http://schemas.microsoft.com/office/drawing/2014/main" id="{443F7C61-1763-ADC9-FC32-CBD5A56C0254}"/>
-              </a:ext>
-            </a:extLst>
-          </p:cNvPr>
-          <p:cNvSpPr>
-            <a:spLocks noGrp="1"/>
-          </p:cNvSpPr>
-          <p:nvPr>
-            <p:ph type="body" sz="quarter" idx="21"/>
-          </p:nvPr>
-        </p:nvSpPr>
-        <p:spPr/>
-        <p:txBody>
-          <a:bodyPr/>
-          <a:lstStyle/>
-          <a:p>
-            <a:endParaRPr lang="en-CZ"/>
-          </a:p>
-        </p:txBody>
-      </p:sp>
-      <p:sp>
-        <p:nvSpPr>
-          <p:cNvPr id="8" name="Text Placeholder 7">
-            <a:extLst>
-              <a:ext uri="{FF2B5EF4-FFF2-40B4-BE49-F238E27FC236}">
-                <a16:creationId xmlns:a16="http://schemas.microsoft.com/office/drawing/2014/main" id="{A4BF1F3F-20AA-2609-794A-6844A03080D3}"/>
-              </a:ext>
-            </a:extLst>
-          </p:cNvPr>
-          <p:cNvSpPr>
-            <a:spLocks noGrp="1"/>
-          </p:cNvSpPr>
-          <p:nvPr>
-            <p:ph type="body" sz="quarter" idx="22"/>
-          </p:nvPr>
-        </p:nvSpPr>
-        <p:spPr/>
-        <p:txBody>
-          <a:bodyPr/>
-          <a:lstStyle/>
-          <a:p>
-            <a:endParaRPr lang="en-CZ"/>
-          </a:p>
-        </p:txBody>
-      </p:sp>
-      <p:sp>
-        <p:nvSpPr>
-          <p:cNvPr id="9" name="Text Placeholder 8">
-            <a:extLst>
-              <a:ext uri="{FF2B5EF4-FFF2-40B4-BE49-F238E27FC236}">
-                <a16:creationId xmlns:a16="http://schemas.microsoft.com/office/drawing/2014/main" id="{70DB7A18-BE79-D195-42CF-9FE5CB5C2191}"/>
-              </a:ext>
-            </a:extLst>
-          </p:cNvPr>
-          <p:cNvSpPr>
-            <a:spLocks noGrp="1"/>
-          </p:cNvSpPr>
-          <p:nvPr>
-            <p:ph type="body" sz="quarter" idx="23"/>
-          </p:nvPr>
-        </p:nvSpPr>
-        <p:spPr/>
-        <p:txBody>
-          <a:bodyPr/>
-          <a:lstStyle/>
-          <a:p>
-            <a:endParaRPr lang="en-CZ"/>
-          </a:p>
-        </p:txBody>
-      </p:sp>
-      <p:sp>
-        <p:nvSpPr>
-          <p:cNvPr id="10" name="Picture Placeholder 9">
-            <a:extLst>
-              <a:ext uri="{FF2B5EF4-FFF2-40B4-BE49-F238E27FC236}">
-                <a16:creationId xmlns:a16="http://schemas.microsoft.com/office/drawing/2014/main" id="{A0544DE5-5965-B687-8F07-8884A1753BF0}"/>
-              </a:ext>
-            </a:extLst>
-          </p:cNvPr>
-          <p:cNvSpPr>
-            <a:spLocks noGrp="1"/>
-          </p:cNvSpPr>
-          <p:nvPr>
-            <p:ph type="pic" sz="quarter" idx="24"/>
-          </p:nvPr>
-        </p:nvSpPr>
-        <p:spPr/>
-        <p:txBody>
-          <a:bodyPr/>
-          <a:lstStyle/>
-          <a:p>
-            <a:endParaRPr lang="en-CZ"/>
-          </a:p>
-        </p:txBody>
-      </p:sp>
-      <p:sp>
-        <p:nvSpPr>
-          <p:cNvPr id="11" name="Text Placeholder 10">
-            <a:extLst>
-              <a:ext uri="{FF2B5EF4-FFF2-40B4-BE49-F238E27FC236}">
-                <a16:creationId xmlns:a16="http://schemas.microsoft.com/office/drawing/2014/main" id="{56385E48-A5A6-3121-3B75-7F6115FB0844}"/>
-              </a:ext>
-            </a:extLst>
-          </p:cNvPr>
-          <p:cNvSpPr>
-            <a:spLocks noGrp="1"/>
-          </p:cNvSpPr>
-          <p:nvPr>
-            <p:ph type="body" sz="quarter" idx="25"/>
-          </p:nvPr>
-        </p:nvSpPr>
-        <p:spPr/>
-        <p:txBody>
-          <a:bodyPr/>
-          <a:lstStyle/>
-          <a:p>
-            <a:endParaRPr lang="en-CZ"/>
-          </a:p>
-        </p:txBody>
-      </p:sp>
-    </p:spTree>
-    <p:extLst>
-      <p:ext uri="{BB962C8B-B14F-4D97-AF65-F5344CB8AC3E}">
-        <p14:creationId xmlns:p14="http://schemas.microsoft.com/office/powerpoint/2010/main" val="2294718247"/>
-      </p:ext>
-    </p:extLst>
-  </p:cSld>
-  <p:clrMapOvr>
-    <a:masterClrMapping/>
-  </p:clrMapOvr>
-</p:sld>
-</file>
-
-<file path=ppt/slides/slide24.xml><?xml version="1.0" encoding="utf-8"?>
-<p:sld xmlns:a="http://schemas.openxmlformats.org/drawingml/2006/main" xmlns:r="http://schemas.openxmlformats.org/officeDocument/2006/relationships" xmlns:p="http://schemas.openxmlformats.org/presentationml/2006/main">
-  <p:cSld>
-    <p:spTree>
-      <p:nvGrpSpPr>
-        <p:cNvPr id="1" name=""/>
-        <p:cNvGrpSpPr/>
-        <p:nvPr/>
-      </p:nvGrpSpPr>
-      <p:grpSpPr>
-        <a:xfrm>
-          <a:off x="0" y="0"/>
-          <a:ext cx="0" cy="0"/>
-          <a:chOff x="0" y="0"/>
-          <a:chExt cx="0" cy="0"/>
-        </a:xfrm>
-      </p:grpSpPr>
-      <p:sp>
-        <p:nvSpPr>
-          <p:cNvPr id="2" name="Slide Number Placeholder 1">
-            <a:extLst>
-              <a:ext uri="{FF2B5EF4-FFF2-40B4-BE49-F238E27FC236}">
-                <a16:creationId xmlns:a16="http://schemas.microsoft.com/office/drawing/2014/main" id="{09548048-525E-30FE-4E27-916EE953FD6A}"/>
-              </a:ext>
-            </a:extLst>
-          </p:cNvPr>
-          <p:cNvSpPr>
-            <a:spLocks noGrp="1"/>
-          </p:cNvSpPr>
-          <p:nvPr>
-            <p:ph type="sldNum" sz="quarter" idx="12"/>
-          </p:nvPr>
-        </p:nvSpPr>
-        <p:spPr/>
-        <p:txBody>
-          <a:bodyPr/>
-          <a:lstStyle/>
-          <a:p>
-            <a:fld id="{5AF2E7C1-CA82-F241-8934-AACDE30393F4}" type="slidenum">
-              <a:rPr lang="en-CZ" smtClean="0"/>
-              <a:pPr/>
-              <a:t>24</a:t>
-            </a:fld>
-            <a:endParaRPr lang="en-CZ" dirty="0"/>
-          </a:p>
-        </p:txBody>
-      </p:sp>
-      <p:sp>
-        <p:nvSpPr>
-          <p:cNvPr id="3" name="Text Placeholder 2">
-            <a:extLst>
-              <a:ext uri="{FF2B5EF4-FFF2-40B4-BE49-F238E27FC236}">
-                <a16:creationId xmlns:a16="http://schemas.microsoft.com/office/drawing/2014/main" id="{38345B66-D516-B4DF-4AB7-9C31A18AE1CC}"/>
-              </a:ext>
-            </a:extLst>
-          </p:cNvPr>
-          <p:cNvSpPr>
-            <a:spLocks noGrp="1"/>
-          </p:cNvSpPr>
-          <p:nvPr>
-            <p:ph type="body" sz="quarter" idx="13"/>
-          </p:nvPr>
-        </p:nvSpPr>
-        <p:spPr/>
-        <p:txBody>
-          <a:bodyPr/>
-          <a:lstStyle/>
-          <a:p>
-            <a:endParaRPr lang="en-CZ"/>
-          </a:p>
-        </p:txBody>
-      </p:sp>
-      <p:sp>
-        <p:nvSpPr>
-          <p:cNvPr id="4" name="Text Placeholder 3">
-            <a:extLst>
-              <a:ext uri="{FF2B5EF4-FFF2-40B4-BE49-F238E27FC236}">
-                <a16:creationId xmlns:a16="http://schemas.microsoft.com/office/drawing/2014/main" id="{B35A00B5-A2B4-EF9C-9A92-7EA50760F60C}"/>
-              </a:ext>
-            </a:extLst>
-          </p:cNvPr>
-          <p:cNvSpPr>
-            <a:spLocks noGrp="1"/>
-          </p:cNvSpPr>
-          <p:nvPr>
-            <p:ph type="body" sz="quarter" idx="14"/>
-          </p:nvPr>
-        </p:nvSpPr>
-        <p:spPr/>
-        <p:txBody>
-          <a:bodyPr/>
-          <a:lstStyle/>
-          <a:p>
-            <a:endParaRPr lang="en-CZ"/>
-          </a:p>
-        </p:txBody>
-      </p:sp>
-      <p:sp>
-        <p:nvSpPr>
-          <p:cNvPr id="5" name="Footer Placeholder 4">
-            <a:extLst>
-              <a:ext uri="{FF2B5EF4-FFF2-40B4-BE49-F238E27FC236}">
-                <a16:creationId xmlns:a16="http://schemas.microsoft.com/office/drawing/2014/main" id="{0B973028-DF83-3DAE-C0C7-336967670C41}"/>
-              </a:ext>
-            </a:extLst>
-          </p:cNvPr>
-          <p:cNvSpPr>
-            <a:spLocks noGrp="1"/>
-          </p:cNvSpPr>
-          <p:nvPr>
-            <p:ph type="ftr" sz="quarter" idx="15"/>
-          </p:nvPr>
-        </p:nvSpPr>
-        <p:spPr/>
-        <p:txBody>
-          <a:bodyPr/>
-          <a:lstStyle/>
-          <a:p>
-            <a:r>
-              <a:rPr lang="en-GB"/>
-              <a:t>PPT Template 2.0</a:t>
-            </a:r>
-            <a:endParaRPr lang="en-CZ" dirty="0"/>
-          </a:p>
-        </p:txBody>
-      </p:sp>
-      <p:sp>
-        <p:nvSpPr>
-          <p:cNvPr id="6" name="Text Placeholder 5">
-            <a:extLst>
-              <a:ext uri="{FF2B5EF4-FFF2-40B4-BE49-F238E27FC236}">
-                <a16:creationId xmlns:a16="http://schemas.microsoft.com/office/drawing/2014/main" id="{083F0136-4BC5-BAF0-7683-00710C34FFF6}"/>
-              </a:ext>
-            </a:extLst>
-          </p:cNvPr>
-          <p:cNvSpPr>
-            <a:spLocks noGrp="1"/>
-          </p:cNvSpPr>
-          <p:nvPr>
-            <p:ph type="body" sz="quarter" idx="20"/>
-          </p:nvPr>
-        </p:nvSpPr>
-        <p:spPr/>
-        <p:txBody>
-          <a:bodyPr/>
-          <a:lstStyle/>
-          <a:p>
-            <a:endParaRPr lang="en-CZ"/>
-          </a:p>
-        </p:txBody>
-      </p:sp>
-      <p:sp>
-        <p:nvSpPr>
-          <p:cNvPr id="7" name="Picture Placeholder 6">
-            <a:extLst>
-              <a:ext uri="{FF2B5EF4-FFF2-40B4-BE49-F238E27FC236}">
-                <a16:creationId xmlns:a16="http://schemas.microsoft.com/office/drawing/2014/main" id="{665012E3-D732-29D3-85F7-B1B57B38AC6E}"/>
-              </a:ext>
-            </a:extLst>
-          </p:cNvPr>
-          <p:cNvSpPr>
-            <a:spLocks noGrp="1"/>
-          </p:cNvSpPr>
-          <p:nvPr>
-            <p:ph type="pic" sz="quarter" idx="19"/>
-          </p:nvPr>
-        </p:nvSpPr>
-        <p:spPr/>
-        <p:txBody>
-          <a:bodyPr/>
-          <a:lstStyle/>
-          <a:p>
-            <a:endParaRPr lang="en-CZ"/>
-          </a:p>
-        </p:txBody>
-      </p:sp>
-      <p:sp>
-        <p:nvSpPr>
-          <p:cNvPr id="8" name="Text Placeholder 7">
-            <a:extLst>
-              <a:ext uri="{FF2B5EF4-FFF2-40B4-BE49-F238E27FC236}">
-                <a16:creationId xmlns:a16="http://schemas.microsoft.com/office/drawing/2014/main" id="{A607AFA4-D075-1B79-2152-39C2DD25495D}"/>
-              </a:ext>
-            </a:extLst>
-          </p:cNvPr>
-          <p:cNvSpPr>
-            <a:spLocks noGrp="1"/>
-          </p:cNvSpPr>
-          <p:nvPr>
-            <p:ph type="body" sz="quarter" idx="18"/>
-          </p:nvPr>
-        </p:nvSpPr>
-        <p:spPr/>
-        <p:txBody>
-          <a:bodyPr/>
-          <a:lstStyle/>
-          <a:p>
-            <a:endParaRPr lang="en-CZ"/>
-          </a:p>
-        </p:txBody>
-      </p:sp>
-      <p:sp>
-        <p:nvSpPr>
-          <p:cNvPr id="9" name="Text Placeholder 8">
-            <a:extLst>
-              <a:ext uri="{FF2B5EF4-FFF2-40B4-BE49-F238E27FC236}">
-                <a16:creationId xmlns:a16="http://schemas.microsoft.com/office/drawing/2014/main" id="{6B9A4FB9-AD0A-66C7-48A7-20DE0F7C8BF3}"/>
-              </a:ext>
-            </a:extLst>
-          </p:cNvPr>
-          <p:cNvSpPr>
-            <a:spLocks noGrp="1"/>
-          </p:cNvSpPr>
-          <p:nvPr>
-            <p:ph type="body" sz="quarter" idx="21"/>
-          </p:nvPr>
-        </p:nvSpPr>
-        <p:spPr/>
-        <p:txBody>
-          <a:bodyPr/>
-          <a:lstStyle/>
-          <a:p>
-            <a:endParaRPr lang="en-CZ"/>
-          </a:p>
-        </p:txBody>
-      </p:sp>
-      <p:sp>
-        <p:nvSpPr>
-          <p:cNvPr id="10" name="Text Placeholder 9">
-            <a:extLst>
-              <a:ext uri="{FF2B5EF4-FFF2-40B4-BE49-F238E27FC236}">
-                <a16:creationId xmlns:a16="http://schemas.microsoft.com/office/drawing/2014/main" id="{C4FB9C1A-76DB-D522-385B-FD6A5991A46B}"/>
-              </a:ext>
-            </a:extLst>
-          </p:cNvPr>
-          <p:cNvSpPr>
-            <a:spLocks noGrp="1"/>
-          </p:cNvSpPr>
-          <p:nvPr>
-            <p:ph type="body" sz="quarter" idx="22"/>
-          </p:nvPr>
-        </p:nvSpPr>
-        <p:spPr/>
-        <p:txBody>
-          <a:bodyPr/>
-          <a:lstStyle/>
-          <a:p>
-            <a:endParaRPr lang="en-CZ"/>
-          </a:p>
-        </p:txBody>
-      </p:sp>
-      <p:sp>
-        <p:nvSpPr>
-          <p:cNvPr id="11" name="Text Placeholder 10">
-            <a:extLst>
-              <a:ext uri="{FF2B5EF4-FFF2-40B4-BE49-F238E27FC236}">
-                <a16:creationId xmlns:a16="http://schemas.microsoft.com/office/drawing/2014/main" id="{024AF115-3F8A-6A94-C811-078727FF5EC8}"/>
-              </a:ext>
-            </a:extLst>
-          </p:cNvPr>
-          <p:cNvSpPr>
-            <a:spLocks noGrp="1"/>
-          </p:cNvSpPr>
-          <p:nvPr>
-            <p:ph type="body" sz="quarter" idx="23"/>
-          </p:nvPr>
-        </p:nvSpPr>
-        <p:spPr/>
-        <p:txBody>
-          <a:bodyPr/>
-          <a:lstStyle/>
-          <a:p>
-            <a:endParaRPr lang="en-CZ"/>
-          </a:p>
-        </p:txBody>
-      </p:sp>
-    </p:spTree>
-    <p:extLst>
-      <p:ext uri="{BB962C8B-B14F-4D97-AF65-F5344CB8AC3E}">
-        <p14:creationId xmlns:p14="http://schemas.microsoft.com/office/powerpoint/2010/main" val="2076269344"/>
-      </p:ext>
-    </p:extLst>
-  </p:cSld>
-  <p:clrMapOvr>
-    <a:masterClrMapping/>
-  </p:clrMapOvr>
-</p:sld>
-</file>
-
-<file path=ppt/slides/slide25.xml><?xml version="1.0" encoding="utf-8"?>
-<p:sld xmlns:a="http://schemas.openxmlformats.org/drawingml/2006/main" xmlns:r="http://schemas.openxmlformats.org/officeDocument/2006/relationships" xmlns:p="http://schemas.openxmlformats.org/presentationml/2006/main">
-  <p:cSld>
-    <p:spTree>
-      <p:nvGrpSpPr>
-        <p:cNvPr id="1" name=""/>
-        <p:cNvGrpSpPr/>
-        <p:nvPr/>
-      </p:nvGrpSpPr>
-      <p:grpSpPr>
-        <a:xfrm>
-          <a:off x="0" y="0"/>
-          <a:ext cx="0" cy="0"/>
-          <a:chOff x="0" y="0"/>
-          <a:chExt cx="0" cy="0"/>
-        </a:xfrm>
-      </p:grpSpPr>
-    </p:spTree>
-    <p:extLst>
-      <p:ext uri="{BB962C8B-B14F-4D97-AF65-F5344CB8AC3E}">
-        <p14:creationId xmlns:p14="http://schemas.microsoft.com/office/powerpoint/2010/main" val="236432489"/>
-      </p:ext>
-    </p:extLst>
-  </p:cSld>
-  <p:clrMapOvr>
-    <a:masterClrMapping/>
-  </p:clrMapOvr>
-</p:sld>
-</file>
-
-<file path=ppt/slides/slide26.xml><?xml version="1.0" encoding="utf-8"?>
-<p:sld xmlns:a="http://schemas.openxmlformats.org/drawingml/2006/main" xmlns:r="http://schemas.openxmlformats.org/officeDocument/2006/relationships" xmlns:p="http://schemas.openxmlformats.org/presentationml/2006/main">
-  <p:cSld>
-    <p:spTree>
-      <p:nvGrpSpPr>
-        <p:cNvPr id="1" name=""/>
-        <p:cNvGrpSpPr/>
-        <p:nvPr/>
-      </p:nvGrpSpPr>
-      <p:grpSpPr>
-        <a:xfrm>
-          <a:off x="0" y="0"/>
-          <a:ext cx="0" cy="0"/>
-          <a:chOff x="0" y="0"/>
-          <a:chExt cx="0" cy="0"/>
-        </a:xfrm>
-      </p:grpSpPr>
-    </p:spTree>
-    <p:extLst>
-      <p:ext uri="{BB962C8B-B14F-4D97-AF65-F5344CB8AC3E}">
-        <p14:creationId xmlns:p14="http://schemas.microsoft.com/office/powerpoint/2010/main" val="1784323997"/>
-      </p:ext>
-    </p:extLst>
-  </p:cSld>
-  <p:clrMapOvr>
-    <a:masterClrMapping/>
-  </p:clrMapOvr>
-</p:sld>
-</file>
-
-<file path=ppt/slides/slide27.xml><?xml version="1.0" encoding="utf-8"?>
-<p:sld xmlns:a="http://schemas.openxmlformats.org/drawingml/2006/main" xmlns:r="http://schemas.openxmlformats.org/officeDocument/2006/relationships" xmlns:p="http://schemas.openxmlformats.org/presentationml/2006/main">
-  <p:cSld>
-    <p:spTree>
-      <p:nvGrpSpPr>
-        <p:cNvPr id="1" name=""/>
-        <p:cNvGrpSpPr/>
-        <p:nvPr/>
-      </p:nvGrpSpPr>
-      <p:grpSpPr>
-        <a:xfrm>
-          <a:off x="0" y="0"/>
-          <a:ext cx="0" cy="0"/>
-          <a:chOff x="0" y="0"/>
-          <a:chExt cx="0" cy="0"/>
-        </a:xfrm>
-      </p:grpSpPr>
-    </p:spTree>
-    <p:extLst>
-      <p:ext uri="{BB962C8B-B14F-4D97-AF65-F5344CB8AC3E}">
-        <p14:creationId xmlns:p14="http://schemas.microsoft.com/office/powerpoint/2010/main" val="2604139970"/>
-      </p:ext>
-    </p:extLst>
-  </p:cSld>
-  <p:clrMapOvr>
-    <a:masterClrMapping/>
-  </p:clrMapOvr>
-</p:sld>
-</file>
-
-<file path=ppt/slides/slide28.xml><?xml version="1.0" encoding="utf-8"?>
-<p:sld xmlns:a="http://schemas.openxmlformats.org/drawingml/2006/main" xmlns:r="http://schemas.openxmlformats.org/officeDocument/2006/relationships" xmlns:p="http://schemas.openxmlformats.org/presentationml/2006/main">
-  <p:cSld>
-    <p:spTree>
-      <p:nvGrpSpPr>
-        <p:cNvPr id="1" name=""/>
-        <p:cNvGrpSpPr/>
-        <p:nvPr/>
-      </p:nvGrpSpPr>
-      <p:grpSpPr>
-        <a:xfrm>
-          <a:off x="0" y="0"/>
-          <a:ext cx="0" cy="0"/>
-          <a:chOff x="0" y="0"/>
-          <a:chExt cx="0" cy="0"/>
-        </a:xfrm>
-      </p:grpSpPr>
-      <p:sp>
-        <p:nvSpPr>
-          <p:cNvPr id="2" name="Title Placeholder"/>
-          <p:cNvSpPr>
-            <a:spLocks noGrp="1"/>
-          </p:cNvSpPr>
-          <p:nvPr>
-            <p:ph type="body" sz="quarter" idx="12"/>
-          </p:nvPr>
-        </p:nvSpPr>
-        <p:spPr/>
-        <p:txBody>
-          <a:bodyPr/>
-          <a:lstStyle/>
-          <a:p>
-            <a:pPr lvl="0"/>
-            <a:r>
-              <a:rPr lang="en-GB" dirty="0"/>
-              <a:t>Ingest Tool for DataMesh</a:t>
-            </a:r>
-          </a:p>
-        </p:txBody>
-      </p:sp>
-      <p:sp>
-        <p:nvSpPr>
-          <p:cNvPr id="3" name="Subtitle Placeholder"/>
-          <p:cNvSpPr>
-            <a:spLocks noGrp="1"/>
-          </p:cNvSpPr>
-          <p:nvPr>
-            <p:ph type="body" sz="quarter" idx="14"/>
-          </p:nvPr>
-        </p:nvSpPr>
-        <p:spPr/>
-        <p:txBody>
-          <a:bodyPr/>
-          <a:lstStyle/>
-          <a:p>
-            <a:pPr lvl="0"/>
-            <a:r>
-              <a:rPr lang="en-GB" dirty="0"/>
-              <a:t>Recommended Architecture</a:t>
-            </a:r>
-          </a:p>
-        </p:txBody>
-      </p:sp>
-    </p:spTree>
-    <p:extLst>
-      <p:ext uri="{BB962C8B-B14F-4D97-AF65-F5344CB8AC3E}">
-        <p14:creationId xmlns:p14="http://schemas.microsoft.com/office/powerpoint/2010/main" val="1100000100"/>
-      </p:ext>
-    </p:extLst>
-  </p:cSld>
-  <p:clrMapOvr>
-    <a:masterClrMapping/>
-  </p:clrMapOvr>
-</p:sld>
-</file>
-
-<file path=ppt/slides/slide29.xml><?xml version="1.0" encoding="utf-8"?>
-<p:sld xmlns:a="http://schemas.openxmlformats.org/drawingml/2006/main" xmlns:r="http://schemas.openxmlformats.org/officeDocument/2006/relationships" xmlns:p="http://schemas.openxmlformats.org/presentationml/2006/main">
-  <p:cSld>
-    <p:spTree>
-      <p:nvGrpSpPr>
-        <p:cNvPr id="1" name=""/>
-        <p:cNvGrpSpPr/>
-        <p:nvPr/>
-      </p:nvGrpSpPr>
-      <p:grpSpPr>
-        <a:xfrm>
-          <a:off x="0" y="0"/>
-          <a:ext cx="0" cy="0"/>
-          <a:chOff x="0" y="0"/>
-          <a:chExt cx="0" cy="0"/>
-        </a:xfrm>
-      </p:grpSpPr>
-      <p:sp>
-        <p:nvSpPr>
           <p:cNvPr id="2" name="Slide Number Placeholder"/>
           <p:cNvSpPr>
             <a:spLocks noGrp="1"/>
@@ -20964,7 +18155,7 @@
             <a:fld id="{5AF2E7C1-CA82-F241-8934-AACDE30393F4}" type="slidenum">
               <a:rPr lang="en-GB" smtClean="0"/>
               <a:pPr/>
-              <a:t>29</a:t>
+              <a:t>2</a:t>
             </a:fld>
             <a:endParaRPr lang="en-GB" dirty="0"/>
           </a:p>
@@ -21230,18 +18421,12 @@
       </p:grpSpPr>
       <p:sp>
         <p:nvSpPr>
-          <p:cNvPr id="2" name="Text Placeholder 1">
-            <a:extLst>
-              <a:ext uri="{FF2B5EF4-FFF2-40B4-BE49-F238E27FC236}">
-                <a16:creationId xmlns:a16="http://schemas.microsoft.com/office/drawing/2014/main" id="{D3B1367B-F17A-C976-555E-2BDE1818C54A}"/>
-              </a:ext>
-            </a:extLst>
-          </p:cNvPr>
-          <p:cNvSpPr>
-            <a:spLocks noGrp="1"/>
-          </p:cNvSpPr>
-          <p:nvPr>
-            <p:ph type="body" sz="quarter" idx="12"/>
+          <p:cNvPr id="2" name="Slide Number Placeholder"/>
+          <p:cNvSpPr>
+            <a:spLocks noGrp="1"/>
+          </p:cNvSpPr>
+          <p:nvPr>
+            <p:ph type="sldNum" sz="quarter" idx="12"/>
           </p:nvPr>
         </p:nvSpPr>
         <p:spPr/>
@@ -21249,24 +18434,23 @@
           <a:bodyPr/>
           <a:lstStyle/>
           <a:p>
-            <a:endParaRPr lang="en-CZ"/>
-          </a:p>
-        </p:txBody>
-      </p:sp>
-      <p:sp>
-        <p:nvSpPr>
-          <p:cNvPr id="3" name="Text Placeholder 2">
-            <a:extLst>
-              <a:ext uri="{FF2B5EF4-FFF2-40B4-BE49-F238E27FC236}">
-                <a16:creationId xmlns:a16="http://schemas.microsoft.com/office/drawing/2014/main" id="{50AEC2B2-195E-1BA9-3992-A292FA4984A7}"/>
-              </a:ext>
-            </a:extLst>
-          </p:cNvPr>
-          <p:cNvSpPr>
-            <a:spLocks noGrp="1"/>
-          </p:cNvSpPr>
-          <p:nvPr>
-            <p:ph type="body" sz="quarter" idx="14"/>
+            <a:fld id="{5AF2E7C1-CA82-F241-8934-AACDE30393F4}" type="slidenum">
+              <a:rPr lang="en-GB" smtClean="0"/>
+              <a:pPr/>
+              <a:t>3</a:t>
+            </a:fld>
+            <a:endParaRPr lang="en-GB" dirty="0"/>
+          </a:p>
+        </p:txBody>
+      </p:sp>
+      <p:sp>
+        <p:nvSpPr>
+          <p:cNvPr id="3" name="Title Placeholder"/>
+          <p:cNvSpPr>
+            <a:spLocks noGrp="1"/>
+          </p:cNvSpPr>
+          <p:nvPr>
+            <p:ph type="body" sz="quarter" idx="13"/>
           </p:nvPr>
         </p:nvSpPr>
         <p:spPr/>
@@ -21274,14 +18458,251 @@
           <a:bodyPr/>
           <a:lstStyle/>
           <a:p>
-            <a:endParaRPr lang="en-CZ"/>
+            <a:pPr lvl="0"/>
+            <a:r>
+              <a:rPr lang="en-GB" dirty="0"/>
+              <a:t>Architecture Independent of the Tool Choice</a:t>
+            </a:r>
+          </a:p>
+        </p:txBody>
+      </p:sp>
+      <p:sp>
+        <p:nvSpPr>
+          <p:cNvPr id="4" name="Subtitle Placeholder"/>
+          <p:cNvSpPr>
+            <a:spLocks noGrp="1"/>
+          </p:cNvSpPr>
+          <p:nvPr>
+            <p:ph type="body" sz="quarter" idx="14"/>
+          </p:nvPr>
+        </p:nvSpPr>
+        <p:spPr/>
+        <p:txBody>
+          <a:bodyPr/>
+          <a:lstStyle/>
+          <a:p>
+            <a:pPr lvl="0"/>
+            <a:r>
+              <a:rPr lang="en-GB" dirty="0"/>
+              <a:t>Versioned Template Library principle (variant B2)</a:t>
+            </a:r>
+          </a:p>
+        </p:txBody>
+      </p:sp>
+      <p:sp>
+        <p:nvSpPr>
+          <p:cNvPr id="5" name="Footer Placeholder"/>
+          <p:cNvSpPr>
+            <a:spLocks noGrp="1"/>
+          </p:cNvSpPr>
+          <p:nvPr>
+            <p:ph type="ftr" sz="quarter" idx="15"/>
+          </p:nvPr>
+        </p:nvSpPr>
+        <p:spPr/>
+        <p:txBody>
+          <a:bodyPr/>
+          <a:lstStyle/>
+          <a:p>
+            <a:r>
+              <a:rPr lang="en-GB"/>
+              <a:t>PPT Template 2.0</a:t>
+            </a:r>
+            <a:endParaRPr lang="en-GB" dirty="0"/>
+          </a:p>
+        </p:txBody>
+      </p:sp>
+      <p:sp>
+        <p:nvSpPr>
+          <p:cNvPr id="6" name="Body Left Placeholder"/>
+          <p:cNvSpPr>
+            <a:spLocks noGrp="1"/>
+          </p:cNvSpPr>
+          <p:nvPr>
+            <p:ph type="body" sz="quarter" idx="16"/>
+          </p:nvPr>
+        </p:nvSpPr>
+        <p:spPr/>
+        <p:txBody>
+          <a:bodyPr>
+            <a:normAutofit/>
+          </a:bodyPr>
+          <a:lstStyle/>
+          <a:p>
+            <a:pPr lvl="4"/>
+            <a:r>
+              <a:rPr lang="en-GB" dirty="0"/>
+              <a:t>The chosen architectural model remains valid regardless of the outcome of the tool evaluation</a:t>
+            </a:r>
+          </a:p>
+          <a:p>
+            <a:pPr lvl="4"/>
+            <a:r>
+              <a:rPr lang="en-GB" dirty="0"/>
+              <a:t>The business squad deploys a versioned copy of the template and its own configuration in its own Git repository</a:t>
+            </a:r>
+          </a:p>
+          <a:p>
+            <a:pPr lvl="4"/>
+            <a:r>
+              <a:rPr lang="en-GB" dirty="0"/>
+              <a:t>The business squad is responsible for deployment, operation, and upgrade decisions</a:t>
+            </a:r>
+          </a:p>
+          <a:p>
+            <a:pPr lvl="4"/>
+            <a:r>
+              <a:rPr lang="en-GB" dirty="0"/>
+              <a:t>The configuration components remain unchanged: Object Schema, Export Configuration, Run Conditions</a:t>
+            </a:r>
+          </a:p>
+          <a:p>
+            <a:pPr lvl="4"/>
+            <a:r>
+              <a:rPr lang="en-GB" dirty="0"/>
+              <a:t>The choice of the specific tool (AirPy, MiNiFi) affects only the implementation, not how business squads use this architecture</a:t>
+            </a:r>
+          </a:p>
+        </p:txBody>
+      </p:sp>
+      <p:pic>
+        <p:nvPicPr>
+          <p:cNvPr id="8" name="Obrázek 7">
+            <a:extLst>
+              <a:ext uri="{FF2B5EF4-FFF2-40B4-BE49-F238E27FC236}">
+                <a16:creationId xmlns:a16="http://schemas.microsoft.com/office/drawing/2014/main" id="{F1FCFC94-EEF4-1BE9-9253-3EDB49629170}"/>
+              </a:ext>
+            </a:extLst>
+          </p:cNvPr>
+          <p:cNvPicPr>
+            <a:picLocks noChangeAspect="1"/>
+          </p:cNvPicPr>
+          <p:nvPr/>
+        </p:nvPicPr>
+        <p:blipFill>
+          <a:blip r:embed="rId2"/>
+          <a:stretch>
+            <a:fillRect/>
+          </a:stretch>
+        </p:blipFill>
+        <p:spPr>
+          <a:xfrm>
+            <a:off x="6428784" y="1541644"/>
+            <a:ext cx="5280616" cy="4365110"/>
+          </a:xfrm>
+          <a:prstGeom prst="rect">
+            <a:avLst/>
+          </a:prstGeom>
+        </p:spPr>
+      </p:pic>
+      <p:sp>
+        <p:nvSpPr>
+          <p:cNvPr id="10" name="TextovéPole 9">
+            <a:extLst>
+              <a:ext uri="{FF2B5EF4-FFF2-40B4-BE49-F238E27FC236}">
+                <a16:creationId xmlns:a16="http://schemas.microsoft.com/office/drawing/2014/main" id="{32C4E4CD-A372-04D5-200F-7089994775B0}"/>
+              </a:ext>
+            </a:extLst>
+          </p:cNvPr>
+          <p:cNvSpPr txBox="1"/>
+          <p:nvPr/>
+        </p:nvSpPr>
+        <p:spPr>
+          <a:xfrm>
+            <a:off x="6336028" y="1297121"/>
+            <a:ext cx="6096000" cy="276999"/>
+          </a:xfrm>
+          <a:prstGeom prst="rect">
+            <a:avLst/>
+          </a:prstGeom>
+          <a:noFill/>
+        </p:spPr>
+        <p:txBody>
+          <a:bodyPr wrap="square">
+            <a:spAutoFit/>
+          </a:bodyPr>
+          <a:lstStyle/>
+          <a:p>
+            <a:pPr marL="0" marR="0" indent="0" algn="l">
+              <a:spcBef>
+                <a:spcPts val="2250"/>
+              </a:spcBef>
+              <a:buNone/>
+            </a:pPr>
+            <a:r>
+              <a:rPr lang="cs-CZ" sz="1200" b="1" i="0" dirty="0">
+                <a:solidFill>
+                  <a:srgbClr val="172B4D"/>
+                </a:solidFill>
+                <a:effectLst/>
+                <a:latin typeface="-apple-system"/>
+              </a:rPr>
+              <a:t>B2)  </a:t>
+            </a:r>
+            <a:r>
+              <a:rPr lang="cs-CZ" sz="1200" b="1" i="0" dirty="0" err="1">
+                <a:solidFill>
+                  <a:srgbClr val="172B4D"/>
+                </a:solidFill>
+                <a:effectLst/>
+                <a:latin typeface="-apple-system"/>
+              </a:rPr>
+              <a:t>Versioned</a:t>
+            </a:r>
+            <a:r>
+              <a:rPr lang="cs-CZ" sz="1200" b="1" i="0" dirty="0">
+                <a:solidFill>
+                  <a:srgbClr val="172B4D"/>
+                </a:solidFill>
+                <a:effectLst/>
+                <a:latin typeface="-apple-system"/>
+              </a:rPr>
+              <a:t> </a:t>
+            </a:r>
+            <a:r>
+              <a:rPr lang="cs-CZ" sz="1200" b="1" i="0" dirty="0" err="1">
+                <a:solidFill>
+                  <a:srgbClr val="172B4D"/>
+                </a:solidFill>
+                <a:effectLst/>
+                <a:latin typeface="-apple-system"/>
+              </a:rPr>
+              <a:t>Template</a:t>
+            </a:r>
+            <a:r>
+              <a:rPr lang="cs-CZ" sz="1200" b="1" i="0" dirty="0">
+                <a:solidFill>
+                  <a:srgbClr val="172B4D"/>
+                </a:solidFill>
+                <a:effectLst/>
+                <a:latin typeface="-apple-system"/>
+              </a:rPr>
+              <a:t> </a:t>
+            </a:r>
+            <a:r>
+              <a:rPr lang="cs-CZ" sz="1200" b="1" i="0" dirty="0" err="1">
+                <a:solidFill>
+                  <a:srgbClr val="172B4D"/>
+                </a:solidFill>
+                <a:effectLst/>
+                <a:latin typeface="-apple-system"/>
+              </a:rPr>
+              <a:t>Library</a:t>
+            </a:r>
+            <a:endParaRPr lang="cs-CZ" sz="1200" b="1" i="0" dirty="0">
+              <a:solidFill>
+                <a:srgbClr val="172B4D"/>
+              </a:solidFill>
+              <a:effectLst/>
+              <a:latin typeface="-apple-system"/>
+            </a:endParaRPr>
           </a:p>
         </p:txBody>
       </p:sp>
     </p:spTree>
     <p:extLst>
       <p:ext uri="{BB962C8B-B14F-4D97-AF65-F5344CB8AC3E}">
-        <p14:creationId xmlns:p14="http://schemas.microsoft.com/office/powerpoint/2010/main" val="3291320306"/>
+        <p14:creationId xmlns:p14="http://schemas.microsoft.com/office/powerpoint/2010/main" val="1100000103"/>
       </p:ext>
     </p:extLst>
   </p:cSld>
@@ -21291,7 +18712,7 @@
 </p:sld>
 </file>
 
-<file path=ppt/slides/slide30.xml><?xml version="1.0" encoding="utf-8"?>
+<file path=ppt/slides/slide4.xml><?xml version="1.0" encoding="utf-8"?>
 <p:sld xmlns:a="http://schemas.openxmlformats.org/drawingml/2006/main" xmlns:r="http://schemas.openxmlformats.org/officeDocument/2006/relationships" xmlns:p="http://schemas.openxmlformats.org/presentationml/2006/main">
   <p:cSld>
     <p:spTree>
@@ -21326,317 +18747,7 @@
             <a:fld id="{5AF2E7C1-CA82-F241-8934-AACDE30393F4}" type="slidenum">
               <a:rPr lang="en-GB" smtClean="0"/>
               <a:pPr/>
-              <a:t>30</a:t>
-            </a:fld>
-            <a:endParaRPr lang="en-GB" dirty="0"/>
-          </a:p>
-        </p:txBody>
-      </p:sp>
-      <p:sp>
-        <p:nvSpPr>
-          <p:cNvPr id="3" name="Title Placeholder"/>
-          <p:cNvSpPr>
-            <a:spLocks noGrp="1"/>
-          </p:cNvSpPr>
-          <p:nvPr>
-            <p:ph type="body" sz="quarter" idx="13"/>
-          </p:nvPr>
-        </p:nvSpPr>
-        <p:spPr/>
-        <p:txBody>
-          <a:bodyPr/>
-          <a:lstStyle/>
-          <a:p>
-            <a:pPr lvl="0"/>
-            <a:r>
-              <a:rPr lang="en-GB" dirty="0"/>
-              <a:t>Architecture Independent of the Tool Choice</a:t>
-            </a:r>
-          </a:p>
-        </p:txBody>
-      </p:sp>
-      <p:sp>
-        <p:nvSpPr>
-          <p:cNvPr id="4" name="Subtitle Placeholder"/>
-          <p:cNvSpPr>
-            <a:spLocks noGrp="1"/>
-          </p:cNvSpPr>
-          <p:nvPr>
-            <p:ph type="body" sz="quarter" idx="14"/>
-          </p:nvPr>
-        </p:nvSpPr>
-        <p:spPr/>
-        <p:txBody>
-          <a:bodyPr/>
-          <a:lstStyle/>
-          <a:p>
-            <a:pPr lvl="0"/>
-            <a:r>
-              <a:rPr lang="en-GB" dirty="0"/>
-              <a:t>Versioned Template Library principle (variant B2)</a:t>
-            </a:r>
-          </a:p>
-        </p:txBody>
-      </p:sp>
-      <p:sp>
-        <p:nvSpPr>
-          <p:cNvPr id="5" name="Footer Placeholder"/>
-          <p:cNvSpPr>
-            <a:spLocks noGrp="1"/>
-          </p:cNvSpPr>
-          <p:nvPr>
-            <p:ph type="ftr" sz="quarter" idx="15"/>
-          </p:nvPr>
-        </p:nvSpPr>
-        <p:spPr/>
-        <p:txBody>
-          <a:bodyPr/>
-          <a:lstStyle/>
-          <a:p>
-            <a:r>
-              <a:rPr lang="en-GB"/>
-              <a:t>PPT Template 2.0</a:t>
-            </a:r>
-            <a:endParaRPr lang="en-GB" dirty="0"/>
-          </a:p>
-        </p:txBody>
-      </p:sp>
-      <p:sp>
-        <p:nvSpPr>
-          <p:cNvPr id="6" name="Body Left Placeholder"/>
-          <p:cNvSpPr>
-            <a:spLocks noGrp="1"/>
-          </p:cNvSpPr>
-          <p:nvPr>
-            <p:ph type="body" sz="quarter" idx="16"/>
-          </p:nvPr>
-        </p:nvSpPr>
-        <p:spPr/>
-        <p:txBody>
-          <a:bodyPr>
-            <a:normAutofit/>
-          </a:bodyPr>
-          <a:lstStyle/>
-          <a:p>
-            <a:pPr lvl="4"/>
-            <a:r>
-              <a:rPr lang="en-GB" dirty="0"/>
-              <a:t>The chosen architectural model remains valid regardless of the outcome of the tool evaluation</a:t>
-            </a:r>
-          </a:p>
-          <a:p>
-            <a:pPr lvl="4"/>
-            <a:r>
-              <a:rPr lang="en-GB" dirty="0"/>
-              <a:t>The business squad deploys a versioned copy of the template and its own configuration in its own Git repository</a:t>
-            </a:r>
-          </a:p>
-          <a:p>
-            <a:pPr lvl="4"/>
-            <a:r>
-              <a:rPr lang="en-GB" dirty="0"/>
-              <a:t>The business squad is responsible for deployment, operation, and upgrade decisions</a:t>
-            </a:r>
-          </a:p>
-          <a:p>
-            <a:pPr lvl="4"/>
-            <a:r>
-              <a:rPr lang="en-GB" dirty="0"/>
-              <a:t>The configuration components remain unchanged: Object Schema, Export Configuration, Run Conditions</a:t>
-            </a:r>
-          </a:p>
-          <a:p>
-            <a:pPr lvl="4"/>
-            <a:r>
-              <a:rPr lang="en-GB" dirty="0"/>
-              <a:t>The choice of the specific tool (AirPy, MiNiFi) affects only the implementation, not how business squads use this architecture</a:t>
-            </a:r>
-          </a:p>
-        </p:txBody>
-      </p:sp>
-      <p:pic>
-        <p:nvPicPr>
-          <p:cNvPr id="8" name="Obrázek 7">
-            <a:extLst>
-              <a:ext uri="{FF2B5EF4-FFF2-40B4-BE49-F238E27FC236}">
-                <a16:creationId xmlns:a16="http://schemas.microsoft.com/office/drawing/2014/main" id="{F1FCFC94-EEF4-1BE9-9253-3EDB49629170}"/>
-              </a:ext>
-            </a:extLst>
-          </p:cNvPr>
-          <p:cNvPicPr>
-            <a:picLocks noChangeAspect="1"/>
-          </p:cNvPicPr>
-          <p:nvPr/>
-        </p:nvPicPr>
-        <p:blipFill>
-          <a:blip r:embed="rId2"/>
-          <a:stretch>
-            <a:fillRect/>
-          </a:stretch>
-        </p:blipFill>
-        <p:spPr>
-          <a:xfrm>
-            <a:off x="6428784" y="1541644"/>
-            <a:ext cx="5280616" cy="4365110"/>
-          </a:xfrm>
-          <a:prstGeom prst="rect">
-            <a:avLst/>
-          </a:prstGeom>
-        </p:spPr>
-      </p:pic>
-      <p:sp>
-        <p:nvSpPr>
-          <p:cNvPr id="10" name="TextovéPole 9">
-            <a:extLst>
-              <a:ext uri="{FF2B5EF4-FFF2-40B4-BE49-F238E27FC236}">
-                <a16:creationId xmlns:a16="http://schemas.microsoft.com/office/drawing/2014/main" id="{32C4E4CD-A372-04D5-200F-7089994775B0}"/>
-              </a:ext>
-            </a:extLst>
-          </p:cNvPr>
-          <p:cNvSpPr txBox="1"/>
-          <p:nvPr/>
-        </p:nvSpPr>
-        <p:spPr>
-          <a:xfrm>
-            <a:off x="6336028" y="1297121"/>
-            <a:ext cx="6096000" cy="276999"/>
-          </a:xfrm>
-          <a:prstGeom prst="rect">
-            <a:avLst/>
-          </a:prstGeom>
-          <a:noFill/>
-        </p:spPr>
-        <p:txBody>
-          <a:bodyPr wrap="square">
-            <a:spAutoFit/>
-          </a:bodyPr>
-          <a:lstStyle/>
-          <a:p>
-            <a:pPr marL="0" marR="0" indent="0" algn="l">
-              <a:spcBef>
-                <a:spcPts val="2250"/>
-              </a:spcBef>
-              <a:buNone/>
-            </a:pPr>
-            <a:r>
-              <a:rPr lang="cs-CZ" sz="1200" b="1" i="0" dirty="0">
-                <a:solidFill>
-                  <a:srgbClr val="172B4D"/>
-                </a:solidFill>
-                <a:effectLst/>
-                <a:latin typeface="-apple-system"/>
-              </a:rPr>
-              <a:t>B2)  </a:t>
-            </a:r>
-            <a:r>
-              <a:rPr lang="cs-CZ" sz="1200" b="1" i="0" dirty="0" err="1">
-                <a:solidFill>
-                  <a:srgbClr val="172B4D"/>
-                </a:solidFill>
-                <a:effectLst/>
-                <a:latin typeface="-apple-system"/>
-              </a:rPr>
-              <a:t>Versioned</a:t>
-            </a:r>
-            <a:r>
-              <a:rPr lang="cs-CZ" sz="1200" b="1" i="0" dirty="0">
-                <a:solidFill>
-                  <a:srgbClr val="172B4D"/>
-                </a:solidFill>
-                <a:effectLst/>
-                <a:latin typeface="-apple-system"/>
-              </a:rPr>
-              <a:t> </a:t>
-            </a:r>
-            <a:r>
-              <a:rPr lang="cs-CZ" sz="1200" b="1" i="0" dirty="0" err="1">
-                <a:solidFill>
-                  <a:srgbClr val="172B4D"/>
-                </a:solidFill>
-                <a:effectLst/>
-                <a:latin typeface="-apple-system"/>
-              </a:rPr>
-              <a:t>Template</a:t>
-            </a:r>
-            <a:r>
-              <a:rPr lang="cs-CZ" sz="1200" b="1" i="0" dirty="0">
-                <a:solidFill>
-                  <a:srgbClr val="172B4D"/>
-                </a:solidFill>
-                <a:effectLst/>
-                <a:latin typeface="-apple-system"/>
-              </a:rPr>
-              <a:t> </a:t>
-            </a:r>
-            <a:r>
-              <a:rPr lang="cs-CZ" sz="1200" b="1" i="0" dirty="0" err="1">
-                <a:solidFill>
-                  <a:srgbClr val="172B4D"/>
-                </a:solidFill>
-                <a:effectLst/>
-                <a:latin typeface="-apple-system"/>
-              </a:rPr>
-              <a:t>Library</a:t>
-            </a:r>
-            <a:endParaRPr lang="cs-CZ" sz="1200" b="1" i="0" dirty="0">
-              <a:solidFill>
-                <a:srgbClr val="172B4D"/>
-              </a:solidFill>
-              <a:effectLst/>
-              <a:latin typeface="-apple-system"/>
-            </a:endParaRPr>
-          </a:p>
-        </p:txBody>
-      </p:sp>
-    </p:spTree>
-    <p:extLst>
-      <p:ext uri="{BB962C8B-B14F-4D97-AF65-F5344CB8AC3E}">
-        <p14:creationId xmlns:p14="http://schemas.microsoft.com/office/powerpoint/2010/main" val="1100000103"/>
-      </p:ext>
-    </p:extLst>
-  </p:cSld>
-  <p:clrMapOvr>
-    <a:masterClrMapping/>
-  </p:clrMapOvr>
-</p:sld>
-</file>
-
-<file path=ppt/slides/slide31.xml><?xml version="1.0" encoding="utf-8"?>
-<p:sld xmlns:a="http://schemas.openxmlformats.org/drawingml/2006/main" xmlns:r="http://schemas.openxmlformats.org/officeDocument/2006/relationships" xmlns:p="http://schemas.openxmlformats.org/presentationml/2006/main">
-  <p:cSld>
-    <p:spTree>
-      <p:nvGrpSpPr>
-        <p:cNvPr id="1" name=""/>
-        <p:cNvGrpSpPr/>
-        <p:nvPr/>
-      </p:nvGrpSpPr>
-      <p:grpSpPr>
-        <a:xfrm>
-          <a:off x="0" y="0"/>
-          <a:ext cx="0" cy="0"/>
-          <a:chOff x="0" y="0"/>
-          <a:chExt cx="0" cy="0"/>
-        </a:xfrm>
-      </p:grpSpPr>
-      <p:sp>
-        <p:nvSpPr>
-          <p:cNvPr id="2" name="Slide Number Placeholder"/>
-          <p:cNvSpPr>
-            <a:spLocks noGrp="1"/>
-          </p:cNvSpPr>
-          <p:nvPr>
-            <p:ph type="sldNum" sz="quarter" idx="12"/>
-          </p:nvPr>
-        </p:nvSpPr>
-        <p:spPr/>
-        <p:txBody>
-          <a:bodyPr/>
-          <a:lstStyle/>
-          <a:p>
-            <a:fld id="{5AF2E7C1-CA82-F241-8934-AACDE30393F4}" type="slidenum">
-              <a:rPr lang="en-GB" smtClean="0"/>
-              <a:pPr/>
-              <a:t>31</a:t>
+              <a:t>4</a:t>
             </a:fld>
             <a:endParaRPr lang="en-GB" dirty="0"/>
           </a:p>
@@ -22009,7 +19120,7 @@
 </p:sld>
 </file>
 
-<file path=ppt/slides/slide32.xml><?xml version="1.0" encoding="utf-8"?>
+<file path=ppt/slides/slide5.xml><?xml version="1.0" encoding="utf-8"?>
 <p:sld xmlns:a="http://schemas.openxmlformats.org/drawingml/2006/main" xmlns:r="http://schemas.openxmlformats.org/officeDocument/2006/relationships" xmlns:p="http://schemas.openxmlformats.org/presentationml/2006/main">
   <p:cSld>
     <p:spTree>
@@ -22044,7 +19155,7 @@
             <a:fld id="{5AF2E7C1-CA82-F241-8934-AACDE30393F4}" type="slidenum">
               <a:rPr lang="en-GB" smtClean="0"/>
               <a:pPr/>
-              <a:t>32</a:t>
+              <a:t>5</a:t>
             </a:fld>
             <a:endParaRPr lang="en-GB" dirty="0"/>
           </a:p>
@@ -22211,7 +19322,7 @@
 </p:sld>
 </file>
 
-<file path=ppt/slides/slide33.xml><?xml version="1.0" encoding="utf-8"?>
+<file path=ppt/slides/slide6.xml><?xml version="1.0" encoding="utf-8"?>
 <p:sld xmlns:a="http://schemas.openxmlformats.org/drawingml/2006/main" xmlns:r="http://schemas.openxmlformats.org/officeDocument/2006/relationships" xmlns:p="http://schemas.openxmlformats.org/presentationml/2006/main">
   <p:cSld>
     <p:spTree>
@@ -22246,7 +19357,7 @@
             <a:fld id="{5AF2E7C1-CA82-F241-8934-AACDE30393F4}" type="slidenum">
               <a:rPr lang="en-GB" smtClean="0"/>
               <a:pPr/>
-              <a:t>33</a:t>
+              <a:t>6</a:t>
             </a:fld>
             <a:endParaRPr lang="en-GB" dirty="0"/>
           </a:p>
@@ -22486,7 +19597,9 @@
         </p:nvSpPr>
         <p:spPr/>
         <p:txBody>
-          <a:bodyPr/>
+          <a:bodyPr>
+            <a:normAutofit lnSpcReduction="10000"/>
+          </a:bodyPr>
           <a:lstStyle/>
           <a:p>
             <a:pPr lvl="2"/>
@@ -22501,6 +19614,17 @@
               <a:rPr lang="en-GB" dirty="0"/>
               <a:t>Versioned in Git, reviewed via pull requests</a:t>
             </a:r>
+            <a:endParaRPr lang="cs-CZ" dirty="0"/>
+          </a:p>
+          <a:p>
+            <a:pPr lvl="2"/>
+            <a:r>
+              <a:rPr lang="en-GB" dirty="0">
+                <a:hlinkClick r:id="rId2"/>
+              </a:rPr>
+              <a:t>https://git.kb.cz/projects/ODP/repos/ingestion/browse/minifi/templates/flow-jdbc-to-s3-parquet.json.raw.template</a:t>
+            </a:r>
+            <a:endParaRPr lang="en-GB" dirty="0"/>
           </a:p>
         </p:txBody>
       </p:sp>
@@ -22563,7 +19687,7 @@
 </p:sld>
 </file>
 
-<file path=ppt/slides/slide34.xml><?xml version="1.0" encoding="utf-8"?>
+<file path=ppt/slides/slide7.xml><?xml version="1.0" encoding="utf-8"?>
 <p:sld xmlns:a="http://schemas.openxmlformats.org/drawingml/2006/main" xmlns:r="http://schemas.openxmlformats.org/officeDocument/2006/relationships" xmlns:p="http://schemas.openxmlformats.org/presentationml/2006/main">
   <p:cSld>
     <p:spTree>
@@ -22598,7 +19722,7 @@
             <a:fld id="{5AF2E7C1-CA82-F241-8934-AACDE30393F4}" type="slidenum">
               <a:rPr lang="en-GB" smtClean="0"/>
               <a:pPr/>
-              <a:t>34</a:t>
+              <a:t>7</a:t>
             </a:fld>
             <a:endParaRPr lang="en-GB" dirty="0"/>
           </a:p>
@@ -22670,34 +19794,6 @@
               <a:t>PPT Template 2.0</a:t>
             </a:r>
             <a:endParaRPr lang="en-GB" dirty="0"/>
-          </a:p>
-        </p:txBody>
-      </p:sp>
-      <p:sp>
-        <p:nvSpPr>
-          <p:cNvPr id="6" name="Intro Text"/>
-          <p:cNvSpPr txBox="1"/>
-          <p:nvPr/>
-        </p:nvSpPr>
-        <p:spPr>
-          <a:xfrm>
-            <a:off x="390000" y="1060000"/>
-            <a:ext cx="5585986" cy="640000"/>
-          </a:xfrm>
-          <a:prstGeom prst="rect">
-            <a:avLst/>
-          </a:prstGeom>
-        </p:spPr>
-        <p:txBody>
-          <a:bodyPr wrap="square">
-            <a:normAutofit fontScale="77500" lnSpcReduction="20000"/>
-          </a:bodyPr>
-          <a:lstStyle/>
-          <a:p>
-            <a:r>
-              <a:rPr lang="en-GB" sz="1400" dirty="0"/>
-              <a:t>Both solutions use the same Apache NiFi processors. The difference lies in the deployment model — MiNiFi runs as a standalone pod started from Airflow, the flow definition is stored as a file in Git, and credential access is handled by the combination of Airflow and Kubernetes. The improved score therefore comes from the deployment model, not from the tool’s core.</a:t>
-            </a:r>
           </a:p>
         </p:txBody>
       </p:sp>
@@ -22707,10 +19803,16 @@
           <p:cNvGraphicFramePr>
             <a:graphicFrameLocks noGrp="1"/>
           </p:cNvGraphicFramePr>
-          <p:nvPr/>
+          <p:nvPr>
+            <p:extLst>
+              <p:ext uri="{D42A27DB-BD31-4B8C-83A1-F6EECF244321}">
+                <p14:modId xmlns:p14="http://schemas.microsoft.com/office/powerpoint/2010/main" val="302358180"/>
+              </p:ext>
+            </p:extLst>
+          </p:nvPr>
         </p:nvGraphicFramePr>
         <p:xfrm>
-          <a:off x="390000" y="1780000"/>
+          <a:off x="359557" y="1212303"/>
           <a:ext cx="11410000" cy="3370000"/>
         </p:xfrm>
         <a:graphic>
@@ -23183,7 +20285,7 @@
                     <a:p>
                       <a:r>
                         <a:rPr lang="en-GB" sz="1100" dirty="0"/>
-                        <a:t>6 (PJE-REST)</a:t>
+                        <a:t>6</a:t>
                       </a:r>
                     </a:p>
                   </a:txBody>
@@ -23343,343 +20445,29 @@
           </a:graphicData>
         </a:graphic>
       </p:graphicFrame>
-      <p:sp>
-        <p:nvSpPr>
-          <p:cNvPr id="8" name="Note Text"/>
-          <p:cNvSpPr txBox="1"/>
-          <p:nvPr/>
-        </p:nvSpPr>
-        <p:spPr>
-          <a:xfrm>
-            <a:off x="390000" y="5350000"/>
-            <a:ext cx="11410000" cy="700000"/>
-          </a:xfrm>
-          <a:prstGeom prst="rect">
-            <a:avLst/>
-          </a:prstGeom>
-        </p:spPr>
-        <p:txBody>
-          <a:bodyPr wrap="square">
-            <a:normAutofit/>
-          </a:bodyPr>
-          <a:lstStyle/>
-          <a:p>
-            <a:r>
-              <a:rPr lang="en-GB" sz="1200" i="1" dirty="0"/>
-              <a:t>There is a moderate regression in support for incremental loads (from 0 to 2) — the solution does not use NiFi’s native processor state, but its own watermark management implementation.</a:t>
-            </a:r>
-          </a:p>
-        </p:txBody>
-      </p:sp>
-    </p:spTree>
-    <p:extLst>
-      <p:ext uri="{BB962C8B-B14F-4D97-AF65-F5344CB8AC3E}">
-        <p14:creationId xmlns:p14="http://schemas.microsoft.com/office/powerpoint/2010/main" val="1100000104"/>
-      </p:ext>
-    </p:extLst>
-  </p:cSld>
-  <p:clrMapOvr>
-    <a:masterClrMapping/>
-  </p:clrMapOvr>
-</p:sld>
-</file>
-
-<file path=ppt/slides/slide35.xml><?xml version="1.0" encoding="utf-8"?>
-<p:sld xmlns:a="http://schemas.openxmlformats.org/drawingml/2006/main" xmlns:r="http://schemas.openxmlformats.org/officeDocument/2006/relationships" xmlns:p="http://schemas.openxmlformats.org/presentationml/2006/main">
-  <p:cSld>
-    <p:spTree>
-      <p:nvGrpSpPr>
-        <p:cNvPr id="1" name=""/>
-        <p:cNvGrpSpPr/>
-        <p:nvPr/>
-      </p:nvGrpSpPr>
-      <p:grpSpPr>
-        <a:xfrm>
-          <a:off x="0" y="0"/>
-          <a:ext cx="0" cy="0"/>
-          <a:chOff x="0" y="0"/>
-          <a:chExt cx="0" cy="0"/>
-        </a:xfrm>
-      </p:grpSpPr>
-      <p:sp>
-        <p:nvSpPr>
-          <p:cNvPr id="2" name="Slide Number Placeholder"/>
-          <p:cNvSpPr>
-            <a:spLocks noGrp="1"/>
-          </p:cNvSpPr>
-          <p:nvPr>
-            <p:ph type="sldNum" sz="quarter" idx="12"/>
-          </p:nvPr>
-        </p:nvSpPr>
-        <p:spPr/>
-        <p:txBody>
-          <a:bodyPr/>
-          <a:lstStyle/>
-          <a:p>
-            <a:fld id="{5AF2E7C1-CA82-F241-8934-AACDE30393F4}" type="slidenum">
-              <a:rPr lang="en-GB" smtClean="0"/>
-              <a:pPr/>
-              <a:t>35</a:t>
-            </a:fld>
-            <a:endParaRPr lang="en-GB" dirty="0"/>
-          </a:p>
-        </p:txBody>
-      </p:sp>
-      <p:sp>
-        <p:nvSpPr>
-          <p:cNvPr id="3" name="Title Placeholder"/>
-          <p:cNvSpPr>
-            <a:spLocks noGrp="1"/>
-          </p:cNvSpPr>
-          <p:nvPr>
-            <p:ph type="body" sz="quarter" idx="13"/>
-          </p:nvPr>
-        </p:nvSpPr>
-        <p:spPr/>
-        <p:txBody>
-          <a:bodyPr/>
-          <a:lstStyle/>
-          <a:p>
-            <a:pPr lvl="0"/>
-            <a:r>
-              <a:rPr lang="en-GB" dirty="0"/>
-              <a:t>Rationale — Why AirPy Was Not Selected</a:t>
-            </a:r>
-          </a:p>
-        </p:txBody>
-      </p:sp>
-      <p:sp>
-        <p:nvSpPr>
-          <p:cNvPr id="4" name="Subtitle Placeholder"/>
-          <p:cNvSpPr>
-            <a:spLocks noGrp="1"/>
-          </p:cNvSpPr>
-          <p:nvPr>
-            <p:ph type="body" sz="quarter" idx="14"/>
-          </p:nvPr>
-        </p:nvSpPr>
-        <p:spPr/>
-        <p:txBody>
-          <a:bodyPr/>
-          <a:lstStyle/>
-          <a:p>
-            <a:pPr lvl="0"/>
-            <a:r>
-              <a:rPr lang="en-GB" dirty="0"/>
-              <a:t>A strong score does not necessarily mean the best choice</a:t>
-            </a:r>
-          </a:p>
-        </p:txBody>
-      </p:sp>
-      <p:sp>
-        <p:nvSpPr>
-          <p:cNvPr id="5" name="Footer Placeholder"/>
-          <p:cNvSpPr>
-            <a:spLocks noGrp="1"/>
-          </p:cNvSpPr>
-          <p:nvPr>
-            <p:ph type="ftr" sz="quarter" idx="15"/>
-          </p:nvPr>
-        </p:nvSpPr>
-        <p:spPr/>
-        <p:txBody>
-          <a:bodyPr/>
-          <a:lstStyle/>
-          <a:p>
-            <a:r>
-              <a:rPr lang="en-GB"/>
-              <a:t>PPT Template 2.0</a:t>
-            </a:r>
-            <a:endParaRPr lang="en-GB" dirty="0"/>
-          </a:p>
-        </p:txBody>
-      </p:sp>
-      <p:sp>
-        <p:nvSpPr>
-          <p:cNvPr id="6" name="Body Left Placeholder"/>
-          <p:cNvSpPr>
-            <a:spLocks noGrp="1"/>
-          </p:cNvSpPr>
-          <p:nvPr>
-            <p:ph type="body" sz="quarter" idx="16"/>
-          </p:nvPr>
-        </p:nvSpPr>
-        <p:spPr/>
-        <p:txBody>
-          <a:bodyPr>
-            <a:normAutofit/>
-          </a:bodyPr>
-          <a:lstStyle/>
-          <a:p>
-            <a:pPr lvl="4"/>
-            <a:r>
-              <a:rPr lang="en-GB" dirty="0"/>
-              <a:t>AirPy achieves the best results in several categories — performance, operational parameters, availability of internal expertise, compliance with Greenbook requirements</a:t>
-            </a:r>
-          </a:p>
-          <a:p>
-            <a:pPr lvl="4"/>
-            <a:r>
-              <a:rPr lang="en-GB" dirty="0"/>
-              <a:t>However, it requires developing and maintaining a custom framework within Airflow (watermark management, schema validation, Parquet generation)</a:t>
-            </a:r>
-          </a:p>
-          <a:p>
-            <a:pPr lvl="4"/>
-            <a:r>
-              <a:rPr lang="en-GB" dirty="0"/>
-              <a:t>Supporting Kafka and Elasticsearch would require adding a second tool (NiFi), meaning operating two technology stacks and two CI/CD processes</a:t>
-            </a:r>
-          </a:p>
-          <a:p>
-            <a:pPr lvl="4"/>
-            <a:r>
-              <a:rPr lang="en-GB" dirty="0"/>
-              <a:t>MiNiFi, by contrast, covers all source systems with a single tool, using ready-made components instead of custom development</a:t>
-            </a:r>
-          </a:p>
-        </p:txBody>
-      </p:sp>
-    </p:spTree>
-    <p:extLst>
-      <p:ext uri="{BB962C8B-B14F-4D97-AF65-F5344CB8AC3E}">
-        <p14:creationId xmlns:p14="http://schemas.microsoft.com/office/powerpoint/2010/main" val="1100000105"/>
-      </p:ext>
-    </p:extLst>
-  </p:cSld>
-  <p:clrMapOvr>
-    <a:masterClrMapping/>
-  </p:clrMapOvr>
-</p:sld>
-</file>
-
-<file path=ppt/slides/slide36.xml><?xml version="1.0" encoding="utf-8"?>
-<p:sld xmlns:a="http://schemas.openxmlformats.org/drawingml/2006/main" xmlns:r="http://schemas.openxmlformats.org/officeDocument/2006/relationships" xmlns:p="http://schemas.openxmlformats.org/presentationml/2006/main">
-  <p:cSld>
-    <p:spTree>
-      <p:nvGrpSpPr>
-        <p:cNvPr id="1" name=""/>
-        <p:cNvGrpSpPr/>
-        <p:nvPr/>
-      </p:nvGrpSpPr>
-      <p:grpSpPr>
-        <a:xfrm>
-          <a:off x="0" y="0"/>
-          <a:ext cx="0" cy="0"/>
-          <a:chOff x="0" y="0"/>
-          <a:chExt cx="0" cy="0"/>
-        </a:xfrm>
-      </p:grpSpPr>
-      <p:sp>
-        <p:nvSpPr>
-          <p:cNvPr id="2" name="Slide Number Placeholder"/>
-          <p:cNvSpPr>
-            <a:spLocks noGrp="1"/>
-          </p:cNvSpPr>
-          <p:nvPr>
-            <p:ph type="sldNum" sz="quarter" idx="12"/>
-          </p:nvPr>
-        </p:nvSpPr>
-        <p:spPr/>
-        <p:txBody>
-          <a:bodyPr/>
-          <a:lstStyle/>
-          <a:p>
-            <a:fld id="{5AF2E7C1-CA82-F241-8934-AACDE30393F4}" type="slidenum">
-              <a:rPr lang="en-GB" smtClean="0"/>
-              <a:pPr/>
-              <a:t>36</a:t>
-            </a:fld>
-            <a:endParaRPr lang="en-GB" dirty="0"/>
-          </a:p>
-        </p:txBody>
-      </p:sp>
-      <p:sp>
-        <p:nvSpPr>
-          <p:cNvPr id="3" name="Title Placeholder"/>
-          <p:cNvSpPr>
-            <a:spLocks noGrp="1"/>
-          </p:cNvSpPr>
-          <p:nvPr>
-            <p:ph type="body" sz="quarter" idx="13"/>
-          </p:nvPr>
-        </p:nvSpPr>
-        <p:spPr/>
-        <p:txBody>
-          <a:bodyPr/>
-          <a:lstStyle/>
-          <a:p>
-            <a:pPr lvl="0"/>
-            <a:r>
-              <a:rPr lang="en-GB" dirty="0"/>
-              <a:t>Proof of Concept Results</a:t>
-            </a:r>
-          </a:p>
-        </p:txBody>
-      </p:sp>
-      <p:sp>
-        <p:nvSpPr>
-          <p:cNvPr id="4" name="Subtitle Placeholder"/>
-          <p:cNvSpPr>
-            <a:spLocks noGrp="1"/>
-          </p:cNvSpPr>
-          <p:nvPr>
-            <p:ph type="body" sz="quarter" idx="14"/>
-          </p:nvPr>
-        </p:nvSpPr>
-        <p:spPr/>
-        <p:txBody>
-          <a:bodyPr/>
-          <a:lstStyle/>
-          <a:p>
-            <a:pPr lvl="0"/>
-            <a:r>
-              <a:rPr lang="en-GB" dirty="0"/>
-              <a:t>Comparison of the remaining alternatives</a:t>
-            </a:r>
-          </a:p>
-        </p:txBody>
-      </p:sp>
-      <p:sp>
-        <p:nvSpPr>
-          <p:cNvPr id="5" name="Footer Placeholder"/>
-          <p:cNvSpPr>
-            <a:spLocks noGrp="1"/>
-          </p:cNvSpPr>
-          <p:nvPr>
-            <p:ph type="ftr" sz="quarter" idx="15"/>
-          </p:nvPr>
-        </p:nvSpPr>
-        <p:spPr/>
-        <p:txBody>
-          <a:bodyPr/>
-          <a:lstStyle/>
-          <a:p>
-            <a:r>
-              <a:rPr lang="en-GB"/>
-              <a:t>PPT Template 2.0</a:t>
-            </a:r>
-            <a:endParaRPr lang="en-GB" dirty="0"/>
-          </a:p>
-        </p:txBody>
-      </p:sp>
       <p:graphicFrame>
         <p:nvGraphicFramePr>
-          <p:cNvPr id="6" name="PoC Table"/>
+          <p:cNvPr id="9" name="Tabulka 8">
+            <a:extLst>
+              <a:ext uri="{FF2B5EF4-FFF2-40B4-BE49-F238E27FC236}">
+                <a16:creationId xmlns:a16="http://schemas.microsoft.com/office/drawing/2014/main" id="{D4186184-C4D4-466B-4617-FC516FD581CD}"/>
+              </a:ext>
+            </a:extLst>
+          </p:cNvPr>
           <p:cNvGraphicFramePr>
             <a:graphicFrameLocks noGrp="1"/>
           </p:cNvGraphicFramePr>
           <p:nvPr>
             <p:extLst>
               <p:ext uri="{D42A27DB-BD31-4B8C-83A1-F6EECF244321}">
-                <p14:modId xmlns:p14="http://schemas.microsoft.com/office/powerpoint/2010/main" val="85457532"/>
+                <p14:modId xmlns:p14="http://schemas.microsoft.com/office/powerpoint/2010/main" val="350214465"/>
               </p:ext>
             </p:extLst>
           </p:nvPr>
         </p:nvGraphicFramePr>
         <p:xfrm>
-          <a:off x="390000" y="1900000"/>
-          <a:ext cx="11410000" cy="1350000"/>
+          <a:off x="391000" y="5086290"/>
+          <a:ext cx="11410000" cy="900000"/>
         </p:xfrm>
         <a:graphic>
           <a:graphicData uri="http://schemas.openxmlformats.org/drawingml/2006/table">
@@ -23691,35 +20479,35 @@
                 <a:gridCol w="3400000">
                   <a:extLst>
                     <a:ext uri="{9D8B030D-6E8A-4147-A177-3AD203B41FA5}">
-                      <a16:colId xmlns:a16="http://schemas.microsoft.com/office/drawing/2014/main" val="20000"/>
+                      <a16:colId xmlns:a16="http://schemas.microsoft.com/office/drawing/2014/main" val="1998996038"/>
                     </a:ext>
                   </a:extLst>
                 </a:gridCol>
                 <a:gridCol w="2002500">
                   <a:extLst>
                     <a:ext uri="{9D8B030D-6E8A-4147-A177-3AD203B41FA5}">
-                      <a16:colId xmlns:a16="http://schemas.microsoft.com/office/drawing/2014/main" val="20001"/>
+                      <a16:colId xmlns:a16="http://schemas.microsoft.com/office/drawing/2014/main" val="1555601505"/>
                     </a:ext>
                   </a:extLst>
                 </a:gridCol>
                 <a:gridCol w="2002500">
                   <a:extLst>
                     <a:ext uri="{9D8B030D-6E8A-4147-A177-3AD203B41FA5}">
-                      <a16:colId xmlns:a16="http://schemas.microsoft.com/office/drawing/2014/main" val="20002"/>
+                      <a16:colId xmlns:a16="http://schemas.microsoft.com/office/drawing/2014/main" val="814687421"/>
                     </a:ext>
                   </a:extLst>
                 </a:gridCol>
                 <a:gridCol w="2002500">
                   <a:extLst>
                     <a:ext uri="{9D8B030D-6E8A-4147-A177-3AD203B41FA5}">
-                      <a16:colId xmlns:a16="http://schemas.microsoft.com/office/drawing/2014/main" val="20003"/>
+                      <a16:colId xmlns:a16="http://schemas.microsoft.com/office/drawing/2014/main" val="3669385599"/>
                     </a:ext>
                   </a:extLst>
                 </a:gridCol>
                 <a:gridCol w="2002500">
                   <a:extLst>
                     <a:ext uri="{9D8B030D-6E8A-4147-A177-3AD203B41FA5}">
-                      <a16:colId xmlns:a16="http://schemas.microsoft.com/office/drawing/2014/main" val="20004"/>
+                      <a16:colId xmlns:a16="http://schemas.microsoft.com/office/drawing/2014/main" val="1178793350"/>
                     </a:ext>
                   </a:extLst>
                 </a:gridCol>
@@ -23789,7 +20577,7 @@
                 </a:tc>
                 <a:extLst>
                   <a:ext uri="{0D108BD9-81ED-4DB2-BD59-A6C34878D82A}">
-                    <a16:rowId xmlns:a16="http://schemas.microsoft.com/office/drawing/2014/main" val="10000"/>
+                    <a16:rowId xmlns:a16="http://schemas.microsoft.com/office/drawing/2014/main" val="3350132267"/>
                   </a:ext>
                 </a:extLst>
               </a:tr>
@@ -23865,79 +20653,7 @@
                 </a:tc>
                 <a:extLst>
                   <a:ext uri="{0D108BD9-81ED-4DB2-BD59-A6C34878D82A}">
-                    <a16:rowId xmlns:a16="http://schemas.microsoft.com/office/drawing/2014/main" val="10001"/>
-                  </a:ext>
-                </a:extLst>
-              </a:tr>
-              <a:tr h="450000">
-                <a:tc>
-                  <a:txBody>
-                    <a:bodyPr/>
-                    <a:lstStyle/>
-                    <a:p>
-                      <a:r>
-                        <a:rPr lang="en-GB" sz="1200" dirty="0"/>
-                        <a:t>CyberArk integration and password rotation</a:t>
-                      </a:r>
-                    </a:p>
-                  </a:txBody>
-                  <a:tcPr/>
-                </a:tc>
-                <a:tc>
-                  <a:txBody>
-                    <a:bodyPr/>
-                    <a:lstStyle/>
-                    <a:p>
-                      <a:r>
-                        <a:rPr lang="en-GB" sz="1200" dirty="0"/>
-                        <a:t>validated</a:t>
-                      </a:r>
-                    </a:p>
-                  </a:txBody>
-                  <a:tcPr/>
-                </a:tc>
-                <a:tc>
-                  <a:txBody>
-                    <a:bodyPr/>
-                    <a:lstStyle/>
-                    <a:p>
-                      <a:r>
-                        <a:rPr lang="en-GB" sz="1200" dirty="0"/>
-                        <a:t>validated</a:t>
-                      </a:r>
-                    </a:p>
-                  </a:txBody>
-                  <a:tcPr/>
-                </a:tc>
-                <a:tc>
-                  <a:txBody>
-                    <a:bodyPr/>
-                    <a:lstStyle/>
-                    <a:p>
-                      <a:r>
-                        <a:rPr lang="en-GB" sz="1200" dirty="0"/>
-                        <a:t>issues identified</a:t>
-                      </a:r>
-                    </a:p>
-                  </a:txBody>
-                  <a:tcPr/>
-                </a:tc>
-                <a:tc>
-                  <a:txBody>
-                    <a:bodyPr/>
-                    <a:lstStyle/>
-                    <a:p>
-                      <a:r>
-                        <a:rPr lang="en-GB" sz="1200" dirty="0"/>
-                        <a:t>not verified</a:t>
-                      </a:r>
-                    </a:p>
-                  </a:txBody>
-                  <a:tcPr/>
-                </a:tc>
-                <a:extLst>
-                  <a:ext uri="{0D108BD9-81ED-4DB2-BD59-A6C34878D82A}">
-                    <a16:rowId xmlns:a16="http://schemas.microsoft.com/office/drawing/2014/main" val="10002"/>
+                    <a16:rowId xmlns:a16="http://schemas.microsoft.com/office/drawing/2014/main" val="2990967776"/>
                   </a:ext>
                 </a:extLst>
               </a:tr>
@@ -23948,1694 +20664,7 @@
     </p:spTree>
     <p:extLst>
       <p:ext uri="{BB962C8B-B14F-4D97-AF65-F5344CB8AC3E}">
-        <p14:creationId xmlns:p14="http://schemas.microsoft.com/office/powerpoint/2010/main" val="1100000106"/>
-      </p:ext>
-    </p:extLst>
-  </p:cSld>
-  <p:clrMapOvr>
-    <a:masterClrMapping/>
-  </p:clrMapOvr>
-</p:sld>
-</file>
-
-<file path=ppt/slides/slide37.xml><?xml version="1.0" encoding="utf-8"?>
-<p:sld xmlns:a="http://schemas.openxmlformats.org/drawingml/2006/main" xmlns:r="http://schemas.openxmlformats.org/officeDocument/2006/relationships" xmlns:p="http://schemas.openxmlformats.org/presentationml/2006/main">
-  <p:cSld>
-    <p:spTree>
-      <p:nvGrpSpPr>
-        <p:cNvPr id="1" name=""/>
-        <p:cNvGrpSpPr/>
-        <p:nvPr/>
-      </p:nvGrpSpPr>
-      <p:grpSpPr>
-        <a:xfrm>
-          <a:off x="0" y="0"/>
-          <a:ext cx="0" cy="0"/>
-          <a:chOff x="0" y="0"/>
-          <a:chExt cx="0" cy="0"/>
-        </a:xfrm>
-      </p:grpSpPr>
-      <p:sp>
-        <p:nvSpPr>
-          <p:cNvPr id="2" name="Slide Number Placeholder"/>
-          <p:cNvSpPr>
-            <a:spLocks noGrp="1"/>
-          </p:cNvSpPr>
-          <p:nvPr>
-            <p:ph type="sldNum" sz="quarter" idx="12"/>
-          </p:nvPr>
-        </p:nvSpPr>
-        <p:spPr/>
-        <p:txBody>
-          <a:bodyPr/>
-          <a:lstStyle/>
-          <a:p>
-            <a:fld id="{5AF2E7C1-CA82-F241-8934-AACDE30393F4}" type="slidenum">
-              <a:rPr lang="en-GB" smtClean="0"/>
-              <a:pPr/>
-              <a:t>37</a:t>
-            </a:fld>
-            <a:endParaRPr lang="en-GB" dirty="0"/>
-          </a:p>
-        </p:txBody>
-      </p:sp>
-      <p:sp>
-        <p:nvSpPr>
-          <p:cNvPr id="3" name="Title Placeholder"/>
-          <p:cNvSpPr>
-            <a:spLocks noGrp="1"/>
-          </p:cNvSpPr>
-          <p:nvPr>
-            <p:ph type="body" sz="quarter" idx="13"/>
-          </p:nvPr>
-        </p:nvSpPr>
-        <p:spPr/>
-        <p:txBody>
-          <a:bodyPr/>
-          <a:lstStyle/>
-          <a:p>
-            <a:pPr lvl="0"/>
-            <a:r>
-              <a:rPr lang="en-GB" dirty="0"/>
-              <a:t>Airflow to Kubernetes via REST API</a:t>
-            </a:r>
-          </a:p>
-        </p:txBody>
-      </p:sp>
-      <p:sp>
-        <p:nvSpPr>
-          <p:cNvPr id="4" name="Subtitle Placeholder"/>
-          <p:cNvSpPr>
-            <a:spLocks noGrp="1"/>
-          </p:cNvSpPr>
-          <p:nvPr>
-            <p:ph type="body" sz="quarter" idx="14"/>
-          </p:nvPr>
-        </p:nvSpPr>
-        <p:spPr/>
-        <p:txBody>
-          <a:bodyPr/>
-          <a:lstStyle/>
-          <a:p>
-            <a:pPr lvl="0"/>
-            <a:r>
-              <a:rPr lang="en-GB" dirty="0"/>
-              <a:t>A standard, reusable integration pattern</a:t>
-            </a:r>
-          </a:p>
-        </p:txBody>
-      </p:sp>
-      <p:sp>
-        <p:nvSpPr>
-          <p:cNvPr id="5" name="Footer Placeholder"/>
-          <p:cNvSpPr>
-            <a:spLocks noGrp="1"/>
-          </p:cNvSpPr>
-          <p:nvPr>
-            <p:ph type="ftr" sz="quarter" idx="15"/>
-          </p:nvPr>
-        </p:nvSpPr>
-        <p:spPr/>
-        <p:txBody>
-          <a:bodyPr/>
-          <a:lstStyle/>
-          <a:p>
-            <a:r>
-              <a:rPr lang="en-GB"/>
-              <a:t>PPT Template 2.0</a:t>
-            </a:r>
-            <a:endParaRPr lang="en-GB" dirty="0"/>
-          </a:p>
-        </p:txBody>
-      </p:sp>
-      <p:sp>
-        <p:nvSpPr>
-          <p:cNvPr id="6" name="Body Left Placeholder"/>
-          <p:cNvSpPr>
-            <a:spLocks noGrp="1"/>
-          </p:cNvSpPr>
-          <p:nvPr>
-            <p:ph type="body" sz="quarter" idx="16"/>
-          </p:nvPr>
-        </p:nvSpPr>
-        <p:spPr/>
-        <p:txBody>
-          <a:bodyPr>
-            <a:normAutofit/>
-          </a:bodyPr>
-          <a:lstStyle/>
-          <a:p>
-            <a:pPr lvl="4"/>
-            <a:r>
-              <a:rPr lang="en-GB" dirty="0"/>
-              <a:t>Airflow’s KubernetesPodOperator communicates with the Kubernetes API server using a standard REST API</a:t>
-            </a:r>
-          </a:p>
-          <a:p>
-            <a:pPr lvl="4"/>
-            <a:r>
-              <a:rPr lang="en-GB" dirty="0"/>
-              <a:t>The connection between SOGE Airflow and Kubernetes in the KB environment is implemented purely as HTTPS REST calls, with no special protocol required</a:t>
-            </a:r>
-          </a:p>
-          <a:p>
-            <a:pPr lvl="4"/>
-            <a:r>
-              <a:rPr lang="en-GB" dirty="0"/>
-              <a:t>HTTPS REST API should already be permitted on the network pass-throughs between SOGE and KB</a:t>
-            </a:r>
-          </a:p>
-          <a:p>
-            <a:pPr lvl="4"/>
-            <a:r>
-              <a:rPr lang="en-GB" dirty="0"/>
-              <a:t>Security is generally favorable toward REST API</a:t>
-            </a:r>
-          </a:p>
-          <a:p>
-            <a:pPr lvl="4"/>
-            <a:r>
-              <a:rPr lang="en-GB" dirty="0"/>
-              <a:t>This could become a general pattern for connecting SOGE Airflow with the KB environment</a:t>
-            </a:r>
-          </a:p>
-        </p:txBody>
-      </p:sp>
-      <p:sp>
-        <p:nvSpPr>
-          <p:cNvPr id="7" name="Code Card"/>
-          <p:cNvSpPr/>
-          <p:nvPr/>
-        </p:nvSpPr>
-        <p:spPr>
-          <a:xfrm>
-            <a:off x="6173167" y="1109013"/>
-            <a:ext cx="5715000" cy="4200000"/>
-          </a:xfrm>
-          <a:prstGeom prst="roundRect">
-            <a:avLst>
-              <a:gd name="adj" fmla="val 4281"/>
-            </a:avLst>
-          </a:prstGeom>
-          <a:solidFill>
-            <a:srgbClr val="F5F5F5"/>
-          </a:solidFill>
-          <a:ln>
-            <a:solidFill>
-              <a:srgbClr val="D9D9D9"/>
-            </a:solidFill>
-          </a:ln>
-        </p:spPr>
-        <p:txBody>
-          <a:bodyPr wrap="square" lIns="180000" tIns="180000" rIns="180000" bIns="180000" anchor="t">
-            <a:normAutofit/>
-          </a:bodyPr>
-          <a:lstStyle/>
-          <a:p>
-            <a:pPr>
-              <a:buNone/>
-            </a:pPr>
-            <a:r>
-              <a:rPr lang="en-GB" sz="1050" dirty="0">
-                <a:latin typeface="Consolas" panose="020B0609020204030204" pitchFamily="49" charset="0"/>
-                <a:cs typeface="Consolas" panose="020B0609020204030204" pitchFamily="49" charset="0"/>
-              </a:rPr>
-              <a:t>from airflow.providers.cncf.kubernetes.operators.pod \</a:t>
-            </a:r>
-          </a:p>
-          <a:p>
-            <a:pPr>
-              <a:buNone/>
-            </a:pPr>
-            <a:r>
-              <a:rPr lang="en-GB" sz="1050" dirty="0">
-                <a:latin typeface="Consolas" panose="020B0609020204030204" pitchFamily="49" charset="0"/>
-                <a:cs typeface="Consolas" panose="020B0609020204030204" pitchFamily="49" charset="0"/>
-              </a:rPr>
-              <a:t>    import KubernetesPodOperator</a:t>
-            </a:r>
-          </a:p>
-          <a:p>
-            <a:pPr>
-              <a:buNone/>
-            </a:pPr>
-            <a:endParaRPr lang="en-GB" sz="1050" dirty="0">
-              <a:latin typeface="Consolas" panose="020B0609020204030204" pitchFamily="49" charset="0"/>
-              <a:cs typeface="Consolas" panose="020B0609020204030204" pitchFamily="49" charset="0"/>
-            </a:endParaRPr>
-          </a:p>
-          <a:p>
-            <a:pPr>
-              <a:buNone/>
-            </a:pPr>
-            <a:r>
-              <a:rPr lang="en-GB" sz="1050" dirty="0">
-                <a:latin typeface="Consolas" panose="020B0609020204030204" pitchFamily="49" charset="0"/>
-                <a:cs typeface="Consolas" panose="020B0609020204030204" pitchFamily="49" charset="0"/>
-              </a:rPr>
-              <a:t>run_minifi = KubernetesPodOperator(</a:t>
-            </a:r>
-          </a:p>
-          <a:p>
-            <a:pPr>
-              <a:buNone/>
-            </a:pPr>
-            <a:r>
-              <a:rPr lang="en-GB" sz="1050" dirty="0">
-                <a:latin typeface="Consolas" panose="020B0609020204030204" pitchFamily="49" charset="0"/>
-                <a:cs typeface="Consolas" panose="020B0609020204030204" pitchFamily="49" charset="0"/>
-              </a:rPr>
-              <a:t>    task_id="run_minifi_crm_export",</a:t>
-            </a:r>
-          </a:p>
-          <a:p>
-            <a:pPr>
-              <a:buNone/>
-            </a:pPr>
-            <a:r>
-              <a:rPr lang="en-GB" sz="1050" dirty="0">
-                <a:latin typeface="Consolas" panose="020B0609020204030204" pitchFamily="49" charset="0"/>
-                <a:cs typeface="Consolas" panose="020B0609020204030204" pitchFamily="49" charset="0"/>
-              </a:rPr>
-              <a:t>    namespace="crm-squad-ns",</a:t>
-            </a:r>
-          </a:p>
-          <a:p>
-            <a:pPr>
-              <a:buNone/>
-            </a:pPr>
-            <a:r>
-              <a:rPr lang="en-GB" sz="1050" dirty="0">
-                <a:latin typeface="Consolas" panose="020B0609020204030204" pitchFamily="49" charset="0"/>
-                <a:cs typeface="Consolas" panose="020B0609020204030204" pitchFamily="49" charset="0"/>
-              </a:rPr>
-              <a:t>    image="harbor.kb.cz/minifi/minifi-template:1.4.0",</a:t>
-            </a:r>
-          </a:p>
-          <a:p>
-            <a:pPr>
-              <a:buNone/>
-            </a:pPr>
-            <a:r>
-              <a:rPr lang="en-GB" sz="1050" dirty="0">
-                <a:latin typeface="Consolas" panose="020B0609020204030204" pitchFamily="49" charset="0"/>
-                <a:cs typeface="Consolas" panose="020B0609020204030204" pitchFamily="49" charset="0"/>
-              </a:rPr>
-              <a:t>    cmds=["/opt/minifi/bin/run.sh"],</a:t>
-            </a:r>
-          </a:p>
-          <a:p>
-            <a:pPr>
-              <a:buNone/>
-            </a:pPr>
-            <a:r>
-              <a:rPr lang="en-GB" sz="1050" dirty="0">
-                <a:latin typeface="Consolas" panose="020B0609020204030204" pitchFamily="49" charset="0"/>
-                <a:cs typeface="Consolas" panose="020B0609020204030204" pitchFamily="49" charset="0"/>
-              </a:rPr>
-              <a:t>    arguments=["--config", "/config/exports.yaml"],</a:t>
-            </a:r>
-          </a:p>
-          <a:p>
-            <a:pPr>
-              <a:buNone/>
-            </a:pPr>
-            <a:r>
-              <a:rPr lang="en-GB" sz="1050" dirty="0">
-                <a:latin typeface="Consolas" panose="020B0609020204030204" pitchFamily="49" charset="0"/>
-                <a:cs typeface="Consolas" panose="020B0609020204030204" pitchFamily="49" charset="0"/>
-              </a:rPr>
-              <a:t>    kubernetes_conn_id="kb_onprem_k8s",</a:t>
-            </a:r>
-          </a:p>
-          <a:p>
-            <a:pPr>
-              <a:buNone/>
-            </a:pPr>
-            <a:r>
-              <a:rPr lang="en-GB" sz="1050" dirty="0">
-                <a:latin typeface="Consolas" panose="020B0609020204030204" pitchFamily="49" charset="0"/>
-                <a:cs typeface="Consolas" panose="020B0609020204030204" pitchFamily="49" charset="0"/>
-              </a:rPr>
-              <a:t>    get_logs=True,</a:t>
-            </a:r>
-          </a:p>
-          <a:p>
-            <a:pPr>
-              <a:buNone/>
-            </a:pPr>
-            <a:r>
-              <a:rPr lang="en-GB" sz="1050" dirty="0">
-                <a:latin typeface="Consolas" panose="020B0609020204030204" pitchFamily="49" charset="0"/>
-                <a:cs typeface="Consolas" panose="020B0609020204030204" pitchFamily="49" charset="0"/>
-              </a:rPr>
-              <a:t>    is_delete_operator_pod=True,</a:t>
-            </a:r>
-          </a:p>
-          <a:p>
-            <a:pPr>
-              <a:buNone/>
-            </a:pPr>
-            <a:r>
-              <a:rPr lang="en-GB" sz="1050" dirty="0">
-                <a:latin typeface="Consolas" panose="020B0609020204030204" pitchFamily="49" charset="0"/>
-                <a:cs typeface="Consolas" panose="020B0609020204030204" pitchFamily="49" charset="0"/>
-              </a:rPr>
-              <a:t>)</a:t>
-            </a:r>
-          </a:p>
-        </p:txBody>
-      </p:sp>
-      <p:sp>
-        <p:nvSpPr>
-          <p:cNvPr id="8" name="Live Demo Note"/>
-          <p:cNvSpPr txBox="1"/>
-          <p:nvPr/>
-        </p:nvSpPr>
-        <p:spPr>
-          <a:xfrm>
-            <a:off x="6173167" y="5400000"/>
-            <a:ext cx="5715000" cy="650000"/>
-          </a:xfrm>
-          <a:prstGeom prst="rect">
-            <a:avLst/>
-          </a:prstGeom>
-        </p:spPr>
-        <p:txBody>
-          <a:bodyPr wrap="square">
-            <a:normAutofit/>
-          </a:bodyPr>
-          <a:lstStyle/>
-          <a:p>
-            <a:r>
-              <a:rPr lang="en-GB" sz="1200" i="1" dirty="0"/>
-              <a:t>Live demo: a real DAG will be run in Airflow to show a task spinning up a pod in Kubernetes.</a:t>
-            </a:r>
-          </a:p>
-        </p:txBody>
-      </p:sp>
-    </p:spTree>
-    <p:extLst>
-      <p:ext uri="{BB962C8B-B14F-4D97-AF65-F5344CB8AC3E}">
-        <p14:creationId xmlns:p14="http://schemas.microsoft.com/office/powerpoint/2010/main" val="1100000107"/>
-      </p:ext>
-    </p:extLst>
-  </p:cSld>
-  <p:clrMapOvr>
-    <a:masterClrMapping/>
-  </p:clrMapOvr>
-</p:sld>
-</file>
-
-<file path=ppt/slides/slide38.xml><?xml version="1.0" encoding="utf-8"?>
-<p:sld xmlns:a="http://schemas.openxmlformats.org/drawingml/2006/main" xmlns:r="http://schemas.openxmlformats.org/officeDocument/2006/relationships" xmlns:p="http://schemas.openxmlformats.org/presentationml/2006/main">
-  <p:cSld>
-    <p:spTree>
-      <p:nvGrpSpPr>
-        <p:cNvPr id="1" name=""/>
-        <p:cNvGrpSpPr/>
-        <p:nvPr/>
-      </p:nvGrpSpPr>
-      <p:grpSpPr>
-        <a:xfrm>
-          <a:off x="0" y="0"/>
-          <a:ext cx="0" cy="0"/>
-          <a:chOff x="0" y="0"/>
-          <a:chExt cx="0" cy="0"/>
-        </a:xfrm>
-      </p:grpSpPr>
-      <p:sp>
-        <p:nvSpPr>
-          <p:cNvPr id="2" name="Slide Number Placeholder"/>
-          <p:cNvSpPr>
-            <a:spLocks noGrp="1"/>
-          </p:cNvSpPr>
-          <p:nvPr>
-            <p:ph type="sldNum" sz="quarter" idx="12"/>
-          </p:nvPr>
-        </p:nvSpPr>
-        <p:spPr/>
-        <p:txBody>
-          <a:bodyPr/>
-          <a:lstStyle/>
-          <a:p>
-            <a:fld id="{5AF2E7C1-CA82-F241-8934-AACDE30393F4}" type="slidenum">
-              <a:rPr lang="en-GB" smtClean="0"/>
-              <a:pPr/>
-              <a:t>38</a:t>
-            </a:fld>
-            <a:endParaRPr lang="en-GB" dirty="0"/>
-          </a:p>
-        </p:txBody>
-      </p:sp>
-      <p:sp>
-        <p:nvSpPr>
-          <p:cNvPr id="3" name="Title Placeholder"/>
-          <p:cNvSpPr>
-            <a:spLocks noGrp="1"/>
-          </p:cNvSpPr>
-          <p:nvPr>
-            <p:ph type="body" sz="quarter" idx="13"/>
-          </p:nvPr>
-        </p:nvSpPr>
-        <p:spPr/>
-        <p:txBody>
-          <a:bodyPr/>
-          <a:lstStyle/>
-          <a:p>
-            <a:pPr lvl="0"/>
-            <a:r>
-              <a:rPr lang="en-GB" dirty="0"/>
-              <a:t>Recommendation</a:t>
-            </a:r>
-          </a:p>
-        </p:txBody>
-      </p:sp>
-      <p:sp>
-        <p:nvSpPr>
-          <p:cNvPr id="4" name="Subtitle Placeholder"/>
-          <p:cNvSpPr>
-            <a:spLocks noGrp="1"/>
-          </p:cNvSpPr>
-          <p:nvPr>
-            <p:ph type="body" sz="quarter" idx="14"/>
-          </p:nvPr>
-        </p:nvSpPr>
-        <p:spPr/>
-        <p:txBody>
-          <a:bodyPr/>
-          <a:lstStyle/>
-          <a:p>
-            <a:pPr lvl="0"/>
-            <a:r>
-              <a:rPr lang="en-GB" dirty="0"/>
-              <a:t>Target tool and next step</a:t>
-            </a:r>
-          </a:p>
-        </p:txBody>
-      </p:sp>
-      <p:sp>
-        <p:nvSpPr>
-          <p:cNvPr id="5" name="Footer Placeholder"/>
-          <p:cNvSpPr>
-            <a:spLocks noGrp="1"/>
-          </p:cNvSpPr>
-          <p:nvPr>
-            <p:ph type="ftr" sz="quarter" idx="15"/>
-          </p:nvPr>
-        </p:nvSpPr>
-        <p:spPr/>
-        <p:txBody>
-          <a:bodyPr/>
-          <a:lstStyle/>
-          <a:p>
-            <a:r>
-              <a:rPr lang="en-GB"/>
-              <a:t>PPT Template 2.0</a:t>
-            </a:r>
-            <a:endParaRPr lang="en-GB" dirty="0"/>
-          </a:p>
-        </p:txBody>
-      </p:sp>
-      <p:sp>
-        <p:nvSpPr>
-          <p:cNvPr id="6" name="Body Left Placeholder"/>
-          <p:cNvSpPr>
-            <a:spLocks noGrp="1"/>
-          </p:cNvSpPr>
-          <p:nvPr>
-            <p:ph type="body" sz="quarter" idx="16"/>
-          </p:nvPr>
-        </p:nvSpPr>
-        <p:spPr/>
-        <p:txBody>
-          <a:bodyPr>
-            <a:normAutofit fontScale="92500" lnSpcReduction="10000"/>
-          </a:bodyPr>
-          <a:lstStyle/>
-          <a:p>
-            <a:pPr lvl="4"/>
-            <a:r>
-              <a:rPr lang="en-GB" b="1" dirty="0"/>
-              <a:t>Recommended tool: Apache MiNiFi (Java agent), run as a pod in Kubernetes, started per run from SOGE Airflow</a:t>
-            </a:r>
-            <a:r>
-              <a:rPr lang="en-GB" dirty="0"/>
-              <a:t> — replacing the previously recommended AirPy</a:t>
-            </a:r>
-          </a:p>
-          <a:p>
-            <a:pPr lvl="4"/>
-            <a:r>
-              <a:rPr lang="en-GB" dirty="0"/>
-              <a:t>A single tool for all sources, including Kafka and Elasticsearch — no combination of two tools</a:t>
-            </a:r>
-          </a:p>
-          <a:p>
-            <a:pPr lvl="4"/>
-            <a:r>
-              <a:rPr lang="en-GB" dirty="0"/>
-              <a:t>Ready-made components instead of a custom framework in Airflow</a:t>
-            </a:r>
-          </a:p>
-          <a:p>
-            <a:pPr lvl="4"/>
-            <a:r>
-              <a:rPr lang="en-GB" dirty="0"/>
-              <a:t>Best result in Functional Capabilities, strong CI/CD and Git integration</a:t>
-            </a:r>
-          </a:p>
-          <a:p>
-            <a:pPr lvl="4"/>
-            <a:r>
-              <a:rPr lang="en-GB" dirty="0"/>
-              <a:t>No licensing costs, good alignment with the target architecture (K8s, Airflow, S3, Versioned Template Library)</a:t>
-            </a:r>
-          </a:p>
-          <a:p>
-            <a:pPr lvl="4"/>
-            <a:r>
-              <a:rPr lang="en-GB" dirty="0"/>
-              <a:t>AirPy remains a technically strong alternative, or fallback option, should the open validation items not be fulfilled</a:t>
-            </a:r>
-          </a:p>
-          <a:p>
-            <a:pPr lvl="4"/>
-            <a:r>
-              <a:rPr lang="en-GB" b="1" dirty="0"/>
-              <a:t>Requested decision: approve MiNiFi as the target solution and proceed with validating the open items</a:t>
-            </a:r>
-          </a:p>
-        </p:txBody>
-      </p:sp>
-    </p:spTree>
-    <p:extLst>
-      <p:ext uri="{BB962C8B-B14F-4D97-AF65-F5344CB8AC3E}">
-        <p14:creationId xmlns:p14="http://schemas.microsoft.com/office/powerpoint/2010/main" val="1100000108"/>
-      </p:ext>
-    </p:extLst>
-  </p:cSld>
-  <p:clrMapOvr>
-    <a:masterClrMapping/>
-  </p:clrMapOvr>
-</p:sld>
-</file>
-
-<file path=ppt/slides/slide39.xml><?xml version="1.0" encoding="utf-8"?>
-<p:sld xmlns:a="http://schemas.openxmlformats.org/drawingml/2006/main" xmlns:r="http://schemas.openxmlformats.org/officeDocument/2006/relationships" xmlns:p="http://schemas.openxmlformats.org/presentationml/2006/main">
-  <p:cSld>
-    <p:spTree>
-      <p:nvGrpSpPr>
-        <p:cNvPr id="1" name=""/>
-        <p:cNvGrpSpPr/>
-        <p:nvPr/>
-      </p:nvGrpSpPr>
-      <p:grpSpPr>
-        <a:xfrm>
-          <a:off x="0" y="0"/>
-          <a:ext cx="0" cy="0"/>
-          <a:chOff x="0" y="0"/>
-          <a:chExt cx="0" cy="0"/>
-        </a:xfrm>
-      </p:grpSpPr>
-      <p:sp>
-        <p:nvSpPr>
-          <p:cNvPr id="2" name="Slide Number Placeholder"/>
-          <p:cNvSpPr>
-            <a:spLocks noGrp="1"/>
-          </p:cNvSpPr>
-          <p:nvPr>
-            <p:ph type="sldNum" sz="quarter" idx="12"/>
-          </p:nvPr>
-        </p:nvSpPr>
-        <p:spPr/>
-        <p:txBody>
-          <a:bodyPr/>
-          <a:lstStyle/>
-          <a:p>
-            <a:fld id="{5AF2E7C1-CA82-F241-8934-AACDE30393F4}" type="slidenum">
-              <a:rPr lang="en-GB" smtClean="0"/>
-              <a:pPr/>
-              <a:t>39</a:t>
-            </a:fld>
-            <a:endParaRPr lang="en-GB" dirty="0"/>
-          </a:p>
-        </p:txBody>
-      </p:sp>
-      <p:sp>
-        <p:nvSpPr>
-          <p:cNvPr id="3" name="Title Placeholder"/>
-          <p:cNvSpPr>
-            <a:spLocks noGrp="1"/>
-          </p:cNvSpPr>
-          <p:nvPr>
-            <p:ph type="body" sz="quarter" idx="13"/>
-          </p:nvPr>
-        </p:nvSpPr>
-        <p:spPr/>
-        <p:txBody>
-          <a:bodyPr/>
-          <a:lstStyle/>
-          <a:p>
-            <a:pPr lvl="0"/>
-            <a:r>
-              <a:rPr lang="en-GB" dirty="0"/>
-              <a:t>Planned Next Steps</a:t>
-            </a:r>
-          </a:p>
-        </p:txBody>
-      </p:sp>
-      <p:sp>
-        <p:nvSpPr>
-          <p:cNvPr id="4" name="Subtitle Placeholder"/>
-          <p:cNvSpPr>
-            <a:spLocks noGrp="1"/>
-          </p:cNvSpPr>
-          <p:nvPr>
-            <p:ph type="body" sz="quarter" idx="14"/>
-          </p:nvPr>
-        </p:nvSpPr>
-        <p:spPr/>
-        <p:txBody>
-          <a:bodyPr/>
-          <a:lstStyle/>
-          <a:p>
-            <a:pPr lvl="0"/>
-            <a:r>
-              <a:rPr lang="en-GB" dirty="0"/>
-              <a:t>From technical validation to a go/no-go decision</a:t>
-            </a:r>
-          </a:p>
-        </p:txBody>
-      </p:sp>
-      <p:sp>
-        <p:nvSpPr>
-          <p:cNvPr id="5" name="Footer Placeholder"/>
-          <p:cNvSpPr>
-            <a:spLocks noGrp="1"/>
-          </p:cNvSpPr>
-          <p:nvPr>
-            <p:ph type="ftr" sz="quarter" idx="15"/>
-          </p:nvPr>
-        </p:nvSpPr>
-        <p:spPr/>
-        <p:txBody>
-          <a:bodyPr/>
-          <a:lstStyle/>
-          <a:p>
-            <a:r>
-              <a:rPr lang="en-GB"/>
-              <a:t>PPT Template 2.0</a:t>
-            </a:r>
-            <a:endParaRPr lang="en-GB" dirty="0"/>
-          </a:p>
-        </p:txBody>
-      </p:sp>
-      <p:sp>
-        <p:nvSpPr>
-          <p:cNvPr id="6" name="Tile1 Body idx16"/>
-          <p:cNvSpPr>
-            <a:spLocks noGrp="1"/>
-          </p:cNvSpPr>
-          <p:nvPr>
-            <p:ph type="body" sz="quarter" idx="16"/>
-          </p:nvPr>
-        </p:nvSpPr>
-        <p:spPr/>
-        <p:txBody>
-          <a:bodyPr>
-            <a:normAutofit fontScale="92500" lnSpcReduction="10000"/>
-          </a:bodyPr>
-          <a:lstStyle/>
-          <a:p>
-            <a:pPr lvl="4"/>
-            <a:r>
-              <a:rPr lang="en-GB" dirty="0"/>
-              <a:t>CyberArk integration and password rotation (Airflow → Secret → env var)</a:t>
-            </a:r>
-          </a:p>
-          <a:p>
-            <a:pPr lvl="4"/>
-            <a:r>
-              <a:rPr lang="en-GB" dirty="0"/>
-              <a:t>Pod lifecycle (wrapper / NiFi Stateless) — reliable detection of run completion</a:t>
-            </a:r>
-          </a:p>
-          <a:p>
-            <a:pPr lvl="4"/>
-            <a:r>
-              <a:rPr lang="en-GB" dirty="0"/>
-              <a:t>Availability of processors (Parquet, Kafka, Elasticsearch, AWS/S3) in the MiNiFi Java distribution</a:t>
-            </a:r>
-          </a:p>
-        </p:txBody>
-      </p:sp>
-      <p:sp>
-        <p:nvSpPr>
-          <p:cNvPr id="7" name="Tile3 Body idx17"/>
-          <p:cNvSpPr>
-            <a:spLocks noGrp="1"/>
-          </p:cNvSpPr>
-          <p:nvPr>
-            <p:ph type="body" sz="quarter" idx="17"/>
-          </p:nvPr>
-        </p:nvSpPr>
-        <p:spPr/>
-        <p:txBody>
-          <a:bodyPr>
-            <a:normAutofit lnSpcReduction="10000"/>
-          </a:bodyPr>
-          <a:lstStyle/>
-          <a:p>
-            <a:pPr lvl="2"/>
-            <a:r>
-              <a:rPr lang="en-GB" dirty="0"/>
-              <a:t>Confirming compliance with the Société Générale Greenbook</a:t>
-            </a:r>
-          </a:p>
-          <a:p>
-            <a:pPr lvl="2"/>
-            <a:r>
-              <a:rPr lang="en-GB" dirty="0"/>
-              <a:t>Effort estimate in person-days (environment setup, upskilling, migration)</a:t>
-            </a:r>
-          </a:p>
-          <a:p>
-            <a:pPr lvl="2"/>
-            <a:r>
-              <a:rPr lang="en-GB" dirty="0"/>
-              <a:t>Squad onboarding process (namespace, ServiceAccount, Conjur) with the Platform team</a:t>
-            </a:r>
-          </a:p>
-        </p:txBody>
-      </p:sp>
-      <p:sp>
-        <p:nvSpPr>
-          <p:cNvPr id="8" name="Tile1 Header idx18"/>
-          <p:cNvSpPr>
-            <a:spLocks noGrp="1"/>
-          </p:cNvSpPr>
-          <p:nvPr>
-            <p:ph type="body" sz="quarter" idx="18"/>
-          </p:nvPr>
-        </p:nvSpPr>
-        <p:spPr/>
-        <p:txBody>
-          <a:bodyPr/>
-          <a:lstStyle/>
-          <a:p>
-            <a:pPr lvl="0"/>
-            <a:r>
-              <a:rPr lang="en-GB" dirty="0"/>
-              <a:t>Phase 1 — Technical Validation (PoC)</a:t>
-            </a:r>
-          </a:p>
-        </p:txBody>
-      </p:sp>
-      <p:sp>
-        <p:nvSpPr>
-          <p:cNvPr id="9" name="Tile3 Header idx19"/>
-          <p:cNvSpPr>
-            <a:spLocks noGrp="1"/>
-          </p:cNvSpPr>
-          <p:nvPr>
-            <p:ph type="body" sz="quarter" idx="19"/>
-          </p:nvPr>
-        </p:nvSpPr>
-        <p:spPr/>
-        <p:txBody>
-          <a:bodyPr/>
-          <a:lstStyle/>
-          <a:p>
-            <a:pPr lvl="0"/>
-            <a:r>
-              <a:rPr lang="en-GB" dirty="0"/>
-              <a:t>Phase 3 — Governance and Compliance</a:t>
-            </a:r>
-          </a:p>
-        </p:txBody>
-      </p:sp>
-      <p:sp>
-        <p:nvSpPr>
-          <p:cNvPr id="10" name="Tile2 Body idx20"/>
-          <p:cNvSpPr>
-            <a:spLocks noGrp="1"/>
-          </p:cNvSpPr>
-          <p:nvPr>
-            <p:ph type="body" sz="quarter" idx="20"/>
-          </p:nvPr>
-        </p:nvSpPr>
-        <p:spPr/>
-        <p:txBody>
-          <a:bodyPr>
-            <a:normAutofit/>
-          </a:bodyPr>
-          <a:lstStyle/>
-          <a:p>
-            <a:pPr lvl="4"/>
-            <a:r>
-              <a:rPr lang="en-GB" dirty="0"/>
-              <a:t>Testing on larger data volumes</a:t>
-            </a:r>
-          </a:p>
-          <a:p>
-            <a:pPr lvl="4"/>
-            <a:r>
-              <a:rPr lang="en-GB" dirty="0"/>
-              <a:t>Teradata connectivity and performance</a:t>
-            </a:r>
-          </a:p>
-          <a:p>
-            <a:pPr lvl="4"/>
-            <a:r>
-              <a:rPr lang="en-GB" dirty="0"/>
-              <a:t>Validating the execution granularity model (pod per flow vs. per object) in real operation</a:t>
-            </a:r>
-          </a:p>
-        </p:txBody>
-      </p:sp>
-      <p:sp>
-        <p:nvSpPr>
-          <p:cNvPr id="11" name="Tile4 Body idx21"/>
-          <p:cNvSpPr>
-            <a:spLocks noGrp="1"/>
-          </p:cNvSpPr>
-          <p:nvPr>
-            <p:ph type="body" sz="quarter" idx="21"/>
-          </p:nvPr>
-        </p:nvSpPr>
-        <p:spPr/>
-        <p:txBody>
-          <a:bodyPr>
-            <a:normAutofit/>
-          </a:bodyPr>
-          <a:lstStyle/>
-          <a:p>
-            <a:pPr lvl="2"/>
-            <a:r>
-              <a:rPr lang="en-GB" dirty="0"/>
-              <a:t>Summary of PoC results → go/no-go decision for full migration</a:t>
-            </a:r>
-          </a:p>
-        </p:txBody>
-      </p:sp>
-      <p:sp>
-        <p:nvSpPr>
-          <p:cNvPr id="12" name="Tile4 Header idx22"/>
-          <p:cNvSpPr>
-            <a:spLocks noGrp="1"/>
-          </p:cNvSpPr>
-          <p:nvPr>
-            <p:ph type="body" sz="quarter" idx="22"/>
-          </p:nvPr>
-        </p:nvSpPr>
-        <p:spPr/>
-        <p:txBody>
-          <a:bodyPr/>
-          <a:lstStyle/>
-          <a:p>
-            <a:pPr lvl="0"/>
-            <a:r>
-              <a:rPr lang="en-GB" dirty="0"/>
-              <a:t>Decision Checkpoint</a:t>
-            </a:r>
-          </a:p>
-        </p:txBody>
-      </p:sp>
-      <p:sp>
-        <p:nvSpPr>
-          <p:cNvPr id="13" name="Tile2 Header idx23"/>
-          <p:cNvSpPr>
-            <a:spLocks noGrp="1"/>
-          </p:cNvSpPr>
-          <p:nvPr>
-            <p:ph type="body" sz="quarter" idx="23"/>
-          </p:nvPr>
-        </p:nvSpPr>
-        <p:spPr/>
-        <p:txBody>
-          <a:bodyPr/>
-          <a:lstStyle/>
-          <a:p>
-            <a:pPr lvl="0"/>
-            <a:r>
-              <a:rPr lang="en-GB" dirty="0"/>
-              <a:t>Phase 2 — Performance and Scale</a:t>
-            </a:r>
-          </a:p>
-        </p:txBody>
-      </p:sp>
-    </p:spTree>
-    <p:extLst>
-      <p:ext uri="{BB962C8B-B14F-4D97-AF65-F5344CB8AC3E}">
-        <p14:creationId xmlns:p14="http://schemas.microsoft.com/office/powerpoint/2010/main" val="1100000109"/>
-      </p:ext>
-    </p:extLst>
-  </p:cSld>
-  <p:clrMapOvr>
-    <a:masterClrMapping/>
-  </p:clrMapOvr>
-</p:sld>
-</file>
-
-<file path=ppt/slides/slide4.xml><?xml version="1.0" encoding="utf-8"?>
-<p:sld xmlns:a="http://schemas.openxmlformats.org/drawingml/2006/main" xmlns:r="http://schemas.openxmlformats.org/officeDocument/2006/relationships" xmlns:p="http://schemas.openxmlformats.org/presentationml/2006/main">
-  <p:cSld>
-    <p:spTree>
-      <p:nvGrpSpPr>
-        <p:cNvPr id="1" name=""/>
-        <p:cNvGrpSpPr/>
-        <p:nvPr/>
-      </p:nvGrpSpPr>
-      <p:grpSpPr>
-        <a:xfrm>
-          <a:off x="0" y="0"/>
-          <a:ext cx="0" cy="0"/>
-          <a:chOff x="0" y="0"/>
-          <a:chExt cx="0" cy="0"/>
-        </a:xfrm>
-      </p:grpSpPr>
-      <p:sp>
-        <p:nvSpPr>
-          <p:cNvPr id="2" name="Text Placeholder 1">
-            <a:extLst>
-              <a:ext uri="{FF2B5EF4-FFF2-40B4-BE49-F238E27FC236}">
-                <a16:creationId xmlns:a16="http://schemas.microsoft.com/office/drawing/2014/main" id="{FE2AE5D8-3725-9A2F-7A4B-2B931D1EBCAF}"/>
-              </a:ext>
-            </a:extLst>
-          </p:cNvPr>
-          <p:cNvSpPr>
-            <a:spLocks noGrp="1"/>
-          </p:cNvSpPr>
-          <p:nvPr>
-            <p:ph type="body" sz="quarter" idx="12"/>
-          </p:nvPr>
-        </p:nvSpPr>
-        <p:spPr/>
-        <p:txBody>
-          <a:bodyPr/>
-          <a:lstStyle/>
-          <a:p>
-            <a:endParaRPr lang="en-CZ"/>
-          </a:p>
-        </p:txBody>
-      </p:sp>
-      <p:sp>
-        <p:nvSpPr>
-          <p:cNvPr id="3" name="Text Placeholder 2">
-            <a:extLst>
-              <a:ext uri="{FF2B5EF4-FFF2-40B4-BE49-F238E27FC236}">
-                <a16:creationId xmlns:a16="http://schemas.microsoft.com/office/drawing/2014/main" id="{A3532EC6-CA30-69C9-859E-50D9E229D2D5}"/>
-              </a:ext>
-            </a:extLst>
-          </p:cNvPr>
-          <p:cNvSpPr>
-            <a:spLocks noGrp="1"/>
-          </p:cNvSpPr>
-          <p:nvPr>
-            <p:ph type="body" sz="quarter" idx="14"/>
-          </p:nvPr>
-        </p:nvSpPr>
-        <p:spPr/>
-        <p:txBody>
-          <a:bodyPr/>
-          <a:lstStyle/>
-          <a:p>
-            <a:endParaRPr lang="en-CZ"/>
-          </a:p>
-        </p:txBody>
-      </p:sp>
-    </p:spTree>
-    <p:extLst>
-      <p:ext uri="{BB962C8B-B14F-4D97-AF65-F5344CB8AC3E}">
-        <p14:creationId xmlns:p14="http://schemas.microsoft.com/office/powerpoint/2010/main" val="2493199657"/>
-      </p:ext>
-    </p:extLst>
-  </p:cSld>
-  <p:clrMapOvr>
-    <a:masterClrMapping/>
-  </p:clrMapOvr>
-</p:sld>
-</file>
-
-<file path=ppt/slides/slide5.xml><?xml version="1.0" encoding="utf-8"?>
-<p:sld xmlns:a="http://schemas.openxmlformats.org/drawingml/2006/main" xmlns:r="http://schemas.openxmlformats.org/officeDocument/2006/relationships" xmlns:p="http://schemas.openxmlformats.org/presentationml/2006/main">
-  <p:cSld>
-    <p:spTree>
-      <p:nvGrpSpPr>
-        <p:cNvPr id="1" name=""/>
-        <p:cNvGrpSpPr/>
-        <p:nvPr/>
-      </p:nvGrpSpPr>
-      <p:grpSpPr>
-        <a:xfrm>
-          <a:off x="0" y="0"/>
-          <a:ext cx="0" cy="0"/>
-          <a:chOff x="0" y="0"/>
-          <a:chExt cx="0" cy="0"/>
-        </a:xfrm>
-      </p:grpSpPr>
-      <p:sp>
-        <p:nvSpPr>
-          <p:cNvPr id="2" name="Slide Number Placeholder 1">
-            <a:extLst>
-              <a:ext uri="{FF2B5EF4-FFF2-40B4-BE49-F238E27FC236}">
-                <a16:creationId xmlns:a16="http://schemas.microsoft.com/office/drawing/2014/main" id="{A72C5324-091D-7F17-98EC-E12DF0976D38}"/>
-              </a:ext>
-            </a:extLst>
-          </p:cNvPr>
-          <p:cNvSpPr>
-            <a:spLocks noGrp="1"/>
-          </p:cNvSpPr>
-          <p:nvPr>
-            <p:ph type="sldNum" sz="quarter" idx="12"/>
-          </p:nvPr>
-        </p:nvSpPr>
-        <p:spPr/>
-        <p:txBody>
-          <a:bodyPr/>
-          <a:lstStyle/>
-          <a:p>
-            <a:fld id="{5AF2E7C1-CA82-F241-8934-AACDE30393F4}" type="slidenum">
-              <a:rPr lang="en-CZ" smtClean="0"/>
-              <a:pPr/>
-              <a:t>5</a:t>
-            </a:fld>
-            <a:endParaRPr lang="en-CZ" dirty="0"/>
-          </a:p>
-        </p:txBody>
-      </p:sp>
-      <p:sp>
-        <p:nvSpPr>
-          <p:cNvPr id="3" name="Text Placeholder 2">
-            <a:extLst>
-              <a:ext uri="{FF2B5EF4-FFF2-40B4-BE49-F238E27FC236}">
-                <a16:creationId xmlns:a16="http://schemas.microsoft.com/office/drawing/2014/main" id="{459596A2-8431-695E-0D18-4A2F7C22C79C}"/>
-              </a:ext>
-            </a:extLst>
-          </p:cNvPr>
-          <p:cNvSpPr>
-            <a:spLocks noGrp="1"/>
-          </p:cNvSpPr>
-          <p:nvPr>
-            <p:ph type="body" sz="quarter" idx="13"/>
-          </p:nvPr>
-        </p:nvSpPr>
-        <p:spPr/>
-        <p:txBody>
-          <a:bodyPr/>
-          <a:lstStyle/>
-          <a:p>
-            <a:endParaRPr lang="en-CZ"/>
-          </a:p>
-        </p:txBody>
-      </p:sp>
-      <p:sp>
-        <p:nvSpPr>
-          <p:cNvPr id="4" name="Text Placeholder 3">
-            <a:extLst>
-              <a:ext uri="{FF2B5EF4-FFF2-40B4-BE49-F238E27FC236}">
-                <a16:creationId xmlns:a16="http://schemas.microsoft.com/office/drawing/2014/main" id="{960BC374-3B34-E415-DF98-906CE3056B04}"/>
-              </a:ext>
-            </a:extLst>
-          </p:cNvPr>
-          <p:cNvSpPr>
-            <a:spLocks noGrp="1"/>
-          </p:cNvSpPr>
-          <p:nvPr>
-            <p:ph type="body" sz="quarter" idx="14"/>
-          </p:nvPr>
-        </p:nvSpPr>
-        <p:spPr/>
-        <p:txBody>
-          <a:bodyPr/>
-          <a:lstStyle/>
-          <a:p>
-            <a:endParaRPr lang="en-CZ"/>
-          </a:p>
-        </p:txBody>
-      </p:sp>
-      <p:sp>
-        <p:nvSpPr>
-          <p:cNvPr id="5" name="Footer Placeholder 4">
-            <a:extLst>
-              <a:ext uri="{FF2B5EF4-FFF2-40B4-BE49-F238E27FC236}">
-                <a16:creationId xmlns:a16="http://schemas.microsoft.com/office/drawing/2014/main" id="{FDCFF02E-FA20-03A1-8065-FA59521189F6}"/>
-              </a:ext>
-            </a:extLst>
-          </p:cNvPr>
-          <p:cNvSpPr>
-            <a:spLocks noGrp="1"/>
-          </p:cNvSpPr>
-          <p:nvPr>
-            <p:ph type="ftr" sz="quarter" idx="15"/>
-          </p:nvPr>
-        </p:nvSpPr>
-        <p:spPr/>
-        <p:txBody>
-          <a:bodyPr/>
-          <a:lstStyle/>
-          <a:p>
-            <a:r>
-              <a:rPr lang="en-GB"/>
-              <a:t>PPT Template 2.0</a:t>
-            </a:r>
-            <a:endParaRPr lang="en-CZ" dirty="0"/>
-          </a:p>
-        </p:txBody>
-      </p:sp>
-    </p:spTree>
-    <p:extLst>
-      <p:ext uri="{BB962C8B-B14F-4D97-AF65-F5344CB8AC3E}">
-        <p14:creationId xmlns:p14="http://schemas.microsoft.com/office/powerpoint/2010/main" val="2114116007"/>
-      </p:ext>
-    </p:extLst>
-  </p:cSld>
-  <p:clrMapOvr>
-    <a:masterClrMapping/>
-  </p:clrMapOvr>
-</p:sld>
-</file>
-
-<file path=ppt/slides/slide6.xml><?xml version="1.0" encoding="utf-8"?>
-<p:sld xmlns:a="http://schemas.openxmlformats.org/drawingml/2006/main" xmlns:r="http://schemas.openxmlformats.org/officeDocument/2006/relationships" xmlns:p="http://schemas.openxmlformats.org/presentationml/2006/main">
-  <p:cSld>
-    <p:spTree>
-      <p:nvGrpSpPr>
-        <p:cNvPr id="1" name=""/>
-        <p:cNvGrpSpPr/>
-        <p:nvPr/>
-      </p:nvGrpSpPr>
-      <p:grpSpPr>
-        <a:xfrm>
-          <a:off x="0" y="0"/>
-          <a:ext cx="0" cy="0"/>
-          <a:chOff x="0" y="0"/>
-          <a:chExt cx="0" cy="0"/>
-        </a:xfrm>
-      </p:grpSpPr>
-      <p:sp>
-        <p:nvSpPr>
-          <p:cNvPr id="2" name="Slide Number Placeholder 1">
-            <a:extLst>
-              <a:ext uri="{FF2B5EF4-FFF2-40B4-BE49-F238E27FC236}">
-                <a16:creationId xmlns:a16="http://schemas.microsoft.com/office/drawing/2014/main" id="{72781BD9-0B81-42F3-D59F-6E6A15D7ECD7}"/>
-              </a:ext>
-            </a:extLst>
-          </p:cNvPr>
-          <p:cNvSpPr>
-            <a:spLocks noGrp="1"/>
-          </p:cNvSpPr>
-          <p:nvPr>
-            <p:ph type="sldNum" sz="quarter" idx="12"/>
-          </p:nvPr>
-        </p:nvSpPr>
-        <p:spPr/>
-        <p:txBody>
-          <a:bodyPr/>
-          <a:lstStyle/>
-          <a:p>
-            <a:fld id="{5AF2E7C1-CA82-F241-8934-AACDE30393F4}" type="slidenum">
-              <a:rPr lang="en-CZ" smtClean="0"/>
-              <a:pPr/>
-              <a:t>6</a:t>
-            </a:fld>
-            <a:endParaRPr lang="en-CZ" dirty="0"/>
-          </a:p>
-        </p:txBody>
-      </p:sp>
-      <p:sp>
-        <p:nvSpPr>
-          <p:cNvPr id="3" name="Text Placeholder 2">
-            <a:extLst>
-              <a:ext uri="{FF2B5EF4-FFF2-40B4-BE49-F238E27FC236}">
-                <a16:creationId xmlns:a16="http://schemas.microsoft.com/office/drawing/2014/main" id="{6AC70404-B784-0B43-D696-42B4C3A04A30}"/>
-              </a:ext>
-            </a:extLst>
-          </p:cNvPr>
-          <p:cNvSpPr>
-            <a:spLocks noGrp="1"/>
-          </p:cNvSpPr>
-          <p:nvPr>
-            <p:ph type="body" sz="quarter" idx="13"/>
-          </p:nvPr>
-        </p:nvSpPr>
-        <p:spPr/>
-        <p:txBody>
-          <a:bodyPr/>
-          <a:lstStyle/>
-          <a:p>
-            <a:endParaRPr lang="en-CZ"/>
-          </a:p>
-        </p:txBody>
-      </p:sp>
-      <p:sp>
-        <p:nvSpPr>
-          <p:cNvPr id="4" name="Text Placeholder 3">
-            <a:extLst>
-              <a:ext uri="{FF2B5EF4-FFF2-40B4-BE49-F238E27FC236}">
-                <a16:creationId xmlns:a16="http://schemas.microsoft.com/office/drawing/2014/main" id="{D342068A-8A7F-5C84-B110-EA405BF76C52}"/>
-              </a:ext>
-            </a:extLst>
-          </p:cNvPr>
-          <p:cNvSpPr>
-            <a:spLocks noGrp="1"/>
-          </p:cNvSpPr>
-          <p:nvPr>
-            <p:ph type="body" sz="quarter" idx="14"/>
-          </p:nvPr>
-        </p:nvSpPr>
-        <p:spPr/>
-        <p:txBody>
-          <a:bodyPr/>
-          <a:lstStyle/>
-          <a:p>
-            <a:endParaRPr lang="en-CZ"/>
-          </a:p>
-        </p:txBody>
-      </p:sp>
-      <p:sp>
-        <p:nvSpPr>
-          <p:cNvPr id="5" name="Footer Placeholder 4">
-            <a:extLst>
-              <a:ext uri="{FF2B5EF4-FFF2-40B4-BE49-F238E27FC236}">
-                <a16:creationId xmlns:a16="http://schemas.microsoft.com/office/drawing/2014/main" id="{7A2C3E3F-BD05-3F1A-2481-7098C7F081A7}"/>
-              </a:ext>
-            </a:extLst>
-          </p:cNvPr>
-          <p:cNvSpPr>
-            <a:spLocks noGrp="1"/>
-          </p:cNvSpPr>
-          <p:nvPr>
-            <p:ph type="ftr" sz="quarter" idx="15"/>
-          </p:nvPr>
-        </p:nvSpPr>
-        <p:spPr/>
-        <p:txBody>
-          <a:bodyPr/>
-          <a:lstStyle/>
-          <a:p>
-            <a:r>
-              <a:rPr lang="en-GB"/>
-              <a:t>PPT Template 2.0</a:t>
-            </a:r>
-            <a:endParaRPr lang="en-CZ" dirty="0"/>
-          </a:p>
-        </p:txBody>
-      </p:sp>
-      <p:sp>
-        <p:nvSpPr>
-          <p:cNvPr id="6" name="Text Placeholder 5">
-            <a:extLst>
-              <a:ext uri="{FF2B5EF4-FFF2-40B4-BE49-F238E27FC236}">
-                <a16:creationId xmlns:a16="http://schemas.microsoft.com/office/drawing/2014/main" id="{66317B37-0FB1-F6F3-9D09-8569B4B45DF5}"/>
-              </a:ext>
-            </a:extLst>
-          </p:cNvPr>
-          <p:cNvSpPr>
-            <a:spLocks noGrp="1"/>
-          </p:cNvSpPr>
-          <p:nvPr>
-            <p:ph type="body" sz="quarter" idx="16"/>
-          </p:nvPr>
-        </p:nvSpPr>
-        <p:spPr/>
-        <p:txBody>
-          <a:bodyPr/>
-          <a:lstStyle/>
-          <a:p>
-            <a:endParaRPr lang="en-CZ"/>
-          </a:p>
-        </p:txBody>
-      </p:sp>
-      <p:sp>
-        <p:nvSpPr>
-          <p:cNvPr id="7" name="Text Placeholder 6">
-            <a:extLst>
-              <a:ext uri="{FF2B5EF4-FFF2-40B4-BE49-F238E27FC236}">
-                <a16:creationId xmlns:a16="http://schemas.microsoft.com/office/drawing/2014/main" id="{6F5E6B7F-E67F-ECDF-9B79-3BA89DCFD76C}"/>
-              </a:ext>
-            </a:extLst>
-          </p:cNvPr>
-          <p:cNvSpPr>
-            <a:spLocks noGrp="1"/>
-          </p:cNvSpPr>
-          <p:nvPr>
-            <p:ph type="body" sz="quarter" idx="17"/>
-          </p:nvPr>
-        </p:nvSpPr>
-        <p:spPr/>
-        <p:txBody>
-          <a:bodyPr/>
-          <a:lstStyle/>
-          <a:p>
-            <a:endParaRPr lang="en-CZ"/>
-          </a:p>
-        </p:txBody>
-      </p:sp>
-      <p:sp>
-        <p:nvSpPr>
-          <p:cNvPr id="8" name="Text Placeholder 7">
-            <a:extLst>
-              <a:ext uri="{FF2B5EF4-FFF2-40B4-BE49-F238E27FC236}">
-                <a16:creationId xmlns:a16="http://schemas.microsoft.com/office/drawing/2014/main" id="{0B15C748-10E7-3B46-E75A-44BB24099164}"/>
-              </a:ext>
-            </a:extLst>
-          </p:cNvPr>
-          <p:cNvSpPr>
-            <a:spLocks noGrp="1"/>
-          </p:cNvSpPr>
-          <p:nvPr>
-            <p:ph type="body" sz="quarter" idx="18"/>
-          </p:nvPr>
-        </p:nvSpPr>
-        <p:spPr/>
-        <p:txBody>
-          <a:bodyPr/>
-          <a:lstStyle/>
-          <a:p>
-            <a:endParaRPr lang="en-CZ"/>
-          </a:p>
-        </p:txBody>
-      </p:sp>
-      <p:sp>
-        <p:nvSpPr>
-          <p:cNvPr id="9" name="Text Placeholder 8">
-            <a:extLst>
-              <a:ext uri="{FF2B5EF4-FFF2-40B4-BE49-F238E27FC236}">
-                <a16:creationId xmlns:a16="http://schemas.microsoft.com/office/drawing/2014/main" id="{DAEDD25E-E5AA-10B9-6E53-211E5E4CD330}"/>
-              </a:ext>
-            </a:extLst>
-          </p:cNvPr>
-          <p:cNvSpPr>
-            <a:spLocks noGrp="1"/>
-          </p:cNvSpPr>
-          <p:nvPr>
-            <p:ph type="body" sz="quarter" idx="19"/>
-          </p:nvPr>
-        </p:nvSpPr>
-        <p:spPr/>
-        <p:txBody>
-          <a:bodyPr/>
-          <a:lstStyle/>
-          <a:p>
-            <a:endParaRPr lang="en-CZ"/>
-          </a:p>
-        </p:txBody>
-      </p:sp>
-    </p:spTree>
-    <p:extLst>
-      <p:ext uri="{BB962C8B-B14F-4D97-AF65-F5344CB8AC3E}">
-        <p14:creationId xmlns:p14="http://schemas.microsoft.com/office/powerpoint/2010/main" val="2388951615"/>
-      </p:ext>
-    </p:extLst>
-  </p:cSld>
-  <p:clrMapOvr>
-    <a:masterClrMapping/>
-  </p:clrMapOvr>
-</p:sld>
-</file>
-
-<file path=ppt/slides/slide7.xml><?xml version="1.0" encoding="utf-8"?>
-<p:sld xmlns:a="http://schemas.openxmlformats.org/drawingml/2006/main" xmlns:r="http://schemas.openxmlformats.org/officeDocument/2006/relationships" xmlns:p="http://schemas.openxmlformats.org/presentationml/2006/main">
-  <p:cSld>
-    <p:spTree>
-      <p:nvGrpSpPr>
-        <p:cNvPr id="1" name=""/>
-        <p:cNvGrpSpPr/>
-        <p:nvPr/>
-      </p:nvGrpSpPr>
-      <p:grpSpPr>
-        <a:xfrm>
-          <a:off x="0" y="0"/>
-          <a:ext cx="0" cy="0"/>
-          <a:chOff x="0" y="0"/>
-          <a:chExt cx="0" cy="0"/>
-        </a:xfrm>
-      </p:grpSpPr>
-      <p:sp>
-        <p:nvSpPr>
-          <p:cNvPr id="2" name="Slide Number Placeholder 1">
-            <a:extLst>
-              <a:ext uri="{FF2B5EF4-FFF2-40B4-BE49-F238E27FC236}">
-                <a16:creationId xmlns:a16="http://schemas.microsoft.com/office/drawing/2014/main" id="{82138133-860B-97FC-B1BB-11549A6D1635}"/>
-              </a:ext>
-            </a:extLst>
-          </p:cNvPr>
-          <p:cNvSpPr>
-            <a:spLocks noGrp="1"/>
-          </p:cNvSpPr>
-          <p:nvPr>
-            <p:ph type="sldNum" sz="quarter" idx="12"/>
-          </p:nvPr>
-        </p:nvSpPr>
-        <p:spPr/>
-        <p:txBody>
-          <a:bodyPr/>
-          <a:lstStyle/>
-          <a:p>
-            <a:fld id="{5AF2E7C1-CA82-F241-8934-AACDE30393F4}" type="slidenum">
-              <a:rPr lang="en-CZ" smtClean="0"/>
-              <a:pPr/>
-              <a:t>7</a:t>
-            </a:fld>
-            <a:endParaRPr lang="en-CZ" dirty="0"/>
-          </a:p>
-        </p:txBody>
-      </p:sp>
-      <p:sp>
-        <p:nvSpPr>
-          <p:cNvPr id="3" name="Text Placeholder 2">
-            <a:extLst>
-              <a:ext uri="{FF2B5EF4-FFF2-40B4-BE49-F238E27FC236}">
-                <a16:creationId xmlns:a16="http://schemas.microsoft.com/office/drawing/2014/main" id="{D9F73078-FDCE-B669-5C77-18879F222E0B}"/>
-              </a:ext>
-            </a:extLst>
-          </p:cNvPr>
-          <p:cNvSpPr>
-            <a:spLocks noGrp="1"/>
-          </p:cNvSpPr>
-          <p:nvPr>
-            <p:ph type="body" sz="quarter" idx="13"/>
-          </p:nvPr>
-        </p:nvSpPr>
-        <p:spPr/>
-        <p:txBody>
-          <a:bodyPr/>
-          <a:lstStyle/>
-          <a:p>
-            <a:endParaRPr lang="en-CZ"/>
-          </a:p>
-        </p:txBody>
-      </p:sp>
-      <p:sp>
-        <p:nvSpPr>
-          <p:cNvPr id="4" name="Text Placeholder 3">
-            <a:extLst>
-              <a:ext uri="{FF2B5EF4-FFF2-40B4-BE49-F238E27FC236}">
-                <a16:creationId xmlns:a16="http://schemas.microsoft.com/office/drawing/2014/main" id="{3AF559B8-ACF3-70EB-1275-FB8F215B47D8}"/>
-              </a:ext>
-            </a:extLst>
-          </p:cNvPr>
-          <p:cNvSpPr>
-            <a:spLocks noGrp="1"/>
-          </p:cNvSpPr>
-          <p:nvPr>
-            <p:ph type="body" sz="quarter" idx="14"/>
-          </p:nvPr>
-        </p:nvSpPr>
-        <p:spPr/>
-        <p:txBody>
-          <a:bodyPr/>
-          <a:lstStyle/>
-          <a:p>
-            <a:endParaRPr lang="en-CZ"/>
-          </a:p>
-        </p:txBody>
-      </p:sp>
-      <p:sp>
-        <p:nvSpPr>
-          <p:cNvPr id="5" name="Footer Placeholder 4">
-            <a:extLst>
-              <a:ext uri="{FF2B5EF4-FFF2-40B4-BE49-F238E27FC236}">
-                <a16:creationId xmlns:a16="http://schemas.microsoft.com/office/drawing/2014/main" id="{588E222E-285D-E79A-138C-DD92E7EF1134}"/>
-              </a:ext>
-            </a:extLst>
-          </p:cNvPr>
-          <p:cNvSpPr>
-            <a:spLocks noGrp="1"/>
-          </p:cNvSpPr>
-          <p:nvPr>
-            <p:ph type="ftr" sz="quarter" idx="15"/>
-          </p:nvPr>
-        </p:nvSpPr>
-        <p:spPr/>
-        <p:txBody>
-          <a:bodyPr/>
-          <a:lstStyle/>
-          <a:p>
-            <a:r>
-              <a:rPr lang="en-GB"/>
-              <a:t>PPT Template 2.0</a:t>
-            </a:r>
-            <a:endParaRPr lang="en-CZ" dirty="0"/>
-          </a:p>
-        </p:txBody>
-      </p:sp>
-      <p:sp>
-        <p:nvSpPr>
-          <p:cNvPr id="6" name="Text Placeholder 5">
-            <a:extLst>
-              <a:ext uri="{FF2B5EF4-FFF2-40B4-BE49-F238E27FC236}">
-                <a16:creationId xmlns:a16="http://schemas.microsoft.com/office/drawing/2014/main" id="{0F23D365-E001-B133-87EE-AF672D358683}"/>
-              </a:ext>
-            </a:extLst>
-          </p:cNvPr>
-          <p:cNvSpPr>
-            <a:spLocks noGrp="1"/>
-          </p:cNvSpPr>
-          <p:nvPr>
-            <p:ph type="body" sz="quarter" idx="16"/>
-          </p:nvPr>
-        </p:nvSpPr>
-        <p:spPr/>
-        <p:txBody>
-          <a:bodyPr/>
-          <a:lstStyle/>
-          <a:p>
-            <a:endParaRPr lang="en-CZ"/>
-          </a:p>
-        </p:txBody>
-      </p:sp>
-      <p:sp>
-        <p:nvSpPr>
-          <p:cNvPr id="7" name="Text Placeholder 6">
-            <a:extLst>
-              <a:ext uri="{FF2B5EF4-FFF2-40B4-BE49-F238E27FC236}">
-                <a16:creationId xmlns:a16="http://schemas.microsoft.com/office/drawing/2014/main" id="{99B74C09-0606-78A4-3CEF-E1D58703B1FF}"/>
-              </a:ext>
-            </a:extLst>
-          </p:cNvPr>
-          <p:cNvSpPr>
-            <a:spLocks noGrp="1"/>
-          </p:cNvSpPr>
-          <p:nvPr>
-            <p:ph type="body" sz="quarter" idx="17"/>
-          </p:nvPr>
-        </p:nvSpPr>
-        <p:spPr/>
-        <p:txBody>
-          <a:bodyPr/>
-          <a:lstStyle/>
-          <a:p>
-            <a:endParaRPr lang="en-CZ"/>
-          </a:p>
-        </p:txBody>
-      </p:sp>
-      <p:sp>
-        <p:nvSpPr>
-          <p:cNvPr id="8" name="Text Placeholder 7">
-            <a:extLst>
-              <a:ext uri="{FF2B5EF4-FFF2-40B4-BE49-F238E27FC236}">
-                <a16:creationId xmlns:a16="http://schemas.microsoft.com/office/drawing/2014/main" id="{025512F3-9524-85B9-C756-A62557C96645}"/>
-              </a:ext>
-            </a:extLst>
-          </p:cNvPr>
-          <p:cNvSpPr>
-            <a:spLocks noGrp="1"/>
-          </p:cNvSpPr>
-          <p:nvPr>
-            <p:ph type="body" sz="quarter" idx="19"/>
-          </p:nvPr>
-        </p:nvSpPr>
-        <p:spPr/>
-        <p:txBody>
-          <a:bodyPr/>
-          <a:lstStyle/>
-          <a:p>
-            <a:endParaRPr lang="en-CZ"/>
-          </a:p>
-        </p:txBody>
-      </p:sp>
-      <p:sp>
-        <p:nvSpPr>
-          <p:cNvPr id="9" name="Text Placeholder 8">
-            <a:extLst>
-              <a:ext uri="{FF2B5EF4-FFF2-40B4-BE49-F238E27FC236}">
-                <a16:creationId xmlns:a16="http://schemas.microsoft.com/office/drawing/2014/main" id="{CECD617E-B235-B787-BAF7-45C6EDD246C4}"/>
-              </a:ext>
-            </a:extLst>
-          </p:cNvPr>
-          <p:cNvSpPr>
-            <a:spLocks noGrp="1"/>
-          </p:cNvSpPr>
-          <p:nvPr>
-            <p:ph type="body" sz="quarter" idx="20"/>
-          </p:nvPr>
-        </p:nvSpPr>
-        <p:spPr/>
-        <p:txBody>
-          <a:bodyPr/>
-          <a:lstStyle/>
-          <a:p>
-            <a:endParaRPr lang="en-CZ"/>
-          </a:p>
-        </p:txBody>
-      </p:sp>
-      <p:sp>
-        <p:nvSpPr>
-          <p:cNvPr id="10" name="Text Placeholder 9">
-            <a:extLst>
-              <a:ext uri="{FF2B5EF4-FFF2-40B4-BE49-F238E27FC236}">
-                <a16:creationId xmlns:a16="http://schemas.microsoft.com/office/drawing/2014/main" id="{69BF5F13-CD36-8D97-E8A9-D30E68582553}"/>
-              </a:ext>
-            </a:extLst>
-          </p:cNvPr>
-          <p:cNvSpPr>
-            <a:spLocks noGrp="1"/>
-          </p:cNvSpPr>
-          <p:nvPr>
-            <p:ph type="body" sz="quarter" idx="21"/>
-          </p:nvPr>
-        </p:nvSpPr>
-        <p:spPr/>
-        <p:txBody>
-          <a:bodyPr/>
-          <a:lstStyle/>
-          <a:p>
-            <a:endParaRPr lang="en-CZ"/>
-          </a:p>
-        </p:txBody>
-      </p:sp>
-      <p:sp>
-        <p:nvSpPr>
-          <p:cNvPr id="11" name="Text Placeholder 10">
-            <a:extLst>
-              <a:ext uri="{FF2B5EF4-FFF2-40B4-BE49-F238E27FC236}">
-                <a16:creationId xmlns:a16="http://schemas.microsoft.com/office/drawing/2014/main" id="{50CC4D10-05F7-B2BA-0907-5E8A1CC7D735}"/>
-              </a:ext>
-            </a:extLst>
-          </p:cNvPr>
-          <p:cNvSpPr>
-            <a:spLocks noGrp="1"/>
-          </p:cNvSpPr>
-          <p:nvPr>
-            <p:ph type="body" sz="quarter" idx="18"/>
-          </p:nvPr>
-        </p:nvSpPr>
-        <p:spPr/>
-        <p:txBody>
-          <a:bodyPr/>
-          <a:lstStyle/>
-          <a:p>
-            <a:endParaRPr lang="en-CZ"/>
-          </a:p>
-        </p:txBody>
-      </p:sp>
-    </p:spTree>
-    <p:extLst>
-      <p:ext uri="{BB962C8B-B14F-4D97-AF65-F5344CB8AC3E}">
-        <p14:creationId xmlns:p14="http://schemas.microsoft.com/office/powerpoint/2010/main" val="775810288"/>
+        <p14:creationId xmlns:p14="http://schemas.microsoft.com/office/powerpoint/2010/main" val="1100000104"/>
       </p:ext>
     </p:extLst>
   </p:cSld>
@@ -25650,7 +20679,13 @@
   <p:cSld>
     <p:spTree>
       <p:nvGrpSpPr>
-        <p:cNvPr id="1" name=""/>
+        <p:cNvPr id="1" name="">
+          <a:extLst>
+            <a:ext uri="{FF2B5EF4-FFF2-40B4-BE49-F238E27FC236}">
+              <a16:creationId xmlns:a16="http://schemas.microsoft.com/office/drawing/2014/main" id="{3AC58098-C6BB-5440-CE6F-0F3E54A8E956}"/>
+            </a:ext>
+          </a:extLst>
+        </p:cNvPr>
         <p:cNvGrpSpPr/>
         <p:nvPr/>
       </p:nvGrpSpPr>
@@ -25667,7 +20702,7 @@
           <p:cNvPr id="2" name="Slide Number Placeholder 1">
             <a:extLst>
               <a:ext uri="{FF2B5EF4-FFF2-40B4-BE49-F238E27FC236}">
-                <a16:creationId xmlns:a16="http://schemas.microsoft.com/office/drawing/2014/main" id="{54243604-FDDA-EDB5-A81A-D78FF03EAD25}"/>
+                <a16:creationId xmlns:a16="http://schemas.microsoft.com/office/drawing/2014/main" id="{B377F382-3891-E901-A2E6-B91B517A6A08}"/>
               </a:ext>
             </a:extLst>
           </p:cNvPr>
@@ -25697,7 +20732,7 @@
           <p:cNvPr id="3" name="Text Placeholder 2">
             <a:extLst>
               <a:ext uri="{FF2B5EF4-FFF2-40B4-BE49-F238E27FC236}">
-                <a16:creationId xmlns:a16="http://schemas.microsoft.com/office/drawing/2014/main" id="{AB9CC1F9-10BA-1C1F-F3FE-E6F963C9DB10}"/>
+                <a16:creationId xmlns:a16="http://schemas.microsoft.com/office/drawing/2014/main" id="{F55A95CD-EB2D-9D29-DBFA-90570B84A60A}"/>
               </a:ext>
             </a:extLst>
           </p:cNvPr>
@@ -25713,24 +20748,36 @@
           <a:bodyPr/>
           <a:lstStyle/>
           <a:p>
-            <a:endParaRPr lang="en-CZ"/>
-          </a:p>
-        </p:txBody>
-      </p:sp>
-      <p:sp>
-        <p:nvSpPr>
-          <p:cNvPr id="4" name="Text Placeholder 3">
-            <a:extLst>
-              <a:ext uri="{FF2B5EF4-FFF2-40B4-BE49-F238E27FC236}">
-                <a16:creationId xmlns:a16="http://schemas.microsoft.com/office/drawing/2014/main" id="{9F302889-68F1-A236-28B9-A7E3419F89B5}"/>
-              </a:ext>
-            </a:extLst>
-          </p:cNvPr>
-          <p:cNvSpPr>
-            <a:spLocks noGrp="1"/>
-          </p:cNvSpPr>
-          <p:nvPr>
-            <p:ph type="body" sz="quarter" idx="14"/>
+            <a:r>
+              <a:rPr lang="en-US" dirty="0"/>
+              <a:t>Airflow + K8S + </a:t>
+            </a:r>
+            <a:r>
+              <a:rPr lang="en-US" dirty="0" err="1"/>
+              <a:t>MiNiFi</a:t>
+            </a:r>
+            <a:r>
+              <a:rPr lang="en-US" dirty="0"/>
+              <a:t> architecture</a:t>
+            </a:r>
+            <a:endParaRPr lang="en-CZ" dirty="0"/>
+          </a:p>
+        </p:txBody>
+      </p:sp>
+      <p:sp>
+        <p:nvSpPr>
+          <p:cNvPr id="5" name="Footer Placeholder 4">
+            <a:extLst>
+              <a:ext uri="{FF2B5EF4-FFF2-40B4-BE49-F238E27FC236}">
+                <a16:creationId xmlns:a16="http://schemas.microsoft.com/office/drawing/2014/main" id="{1FE3E348-413F-049F-7911-F291C7A1AFA6}"/>
+              </a:ext>
+            </a:extLst>
+          </p:cNvPr>
+          <p:cNvSpPr>
+            <a:spLocks noGrp="1"/>
+          </p:cNvSpPr>
+          <p:nvPr>
+            <p:ph type="ftr" sz="quarter" idx="15"/>
           </p:nvPr>
         </p:nvSpPr>
         <p:spPr/>
@@ -25738,31 +20785,6 @@
           <a:bodyPr/>
           <a:lstStyle/>
           <a:p>
-            <a:endParaRPr lang="en-CZ"/>
-          </a:p>
-        </p:txBody>
-      </p:sp>
-      <p:sp>
-        <p:nvSpPr>
-          <p:cNvPr id="5" name="Footer Placeholder 4">
-            <a:extLst>
-              <a:ext uri="{FF2B5EF4-FFF2-40B4-BE49-F238E27FC236}">
-                <a16:creationId xmlns:a16="http://schemas.microsoft.com/office/drawing/2014/main" id="{1ECDD9F1-6DC7-C002-5752-EBA9755FDCDD}"/>
-              </a:ext>
-            </a:extLst>
-          </p:cNvPr>
-          <p:cNvSpPr>
-            <a:spLocks noGrp="1"/>
-          </p:cNvSpPr>
-          <p:nvPr>
-            <p:ph type="ftr" sz="quarter" idx="15"/>
-          </p:nvPr>
-        </p:nvSpPr>
-        <p:spPr/>
-        <p:txBody>
-          <a:bodyPr/>
-          <a:lstStyle/>
-          <a:p>
             <a:r>
               <a:rPr lang="en-GB"/>
               <a:t>PPT Template 2.0</a:t>
@@ -25771,210 +20793,78 @@
           </a:p>
         </p:txBody>
       </p:sp>
-      <p:sp>
-        <p:nvSpPr>
-          <p:cNvPr id="6" name="Text Placeholder 5">
-            <a:extLst>
-              <a:ext uri="{FF2B5EF4-FFF2-40B4-BE49-F238E27FC236}">
-                <a16:creationId xmlns:a16="http://schemas.microsoft.com/office/drawing/2014/main" id="{2A01B112-E210-EAD1-E9A4-020948471E5D}"/>
-              </a:ext>
-            </a:extLst>
-          </p:cNvPr>
-          <p:cNvSpPr>
-            <a:spLocks noGrp="1"/>
-          </p:cNvSpPr>
-          <p:nvPr>
-            <p:ph type="body" sz="quarter" idx="16"/>
-          </p:nvPr>
-        </p:nvSpPr>
-        <p:spPr/>
-        <p:txBody>
-          <a:bodyPr/>
+      <p:pic>
+        <p:nvPicPr>
+          <p:cNvPr id="7" name="Obrázek 6">
+            <a:extLst>
+              <a:ext uri="{FF2B5EF4-FFF2-40B4-BE49-F238E27FC236}">
+                <a16:creationId xmlns:a16="http://schemas.microsoft.com/office/drawing/2014/main" id="{4C4FE0FF-D75C-2DA4-2120-61D2DF077D88}"/>
+              </a:ext>
+            </a:extLst>
+          </p:cNvPr>
+          <p:cNvPicPr>
+            <a:picLocks noChangeAspect="1"/>
+          </p:cNvPicPr>
+          <p:nvPr/>
+        </p:nvPicPr>
+        <p:blipFill>
+          <a:blip r:embed="rId2"/>
+          <a:stretch>
+            <a:fillRect/>
+          </a:stretch>
+        </p:blipFill>
+        <p:spPr>
+          <a:xfrm>
+            <a:off x="1055412" y="802222"/>
+            <a:ext cx="9174980" cy="5253555"/>
+          </a:xfrm>
+          <a:prstGeom prst="rect">
+            <a:avLst/>
+          </a:prstGeom>
+        </p:spPr>
+      </p:pic>
+      <p:sp>
+        <p:nvSpPr>
+          <p:cNvPr id="9" name="TextovéPole 8">
+            <a:extLst>
+              <a:ext uri="{FF2B5EF4-FFF2-40B4-BE49-F238E27FC236}">
+                <a16:creationId xmlns:a16="http://schemas.microsoft.com/office/drawing/2014/main" id="{ADDAA267-5113-19FD-CFB2-29A0ECEF954C}"/>
+              </a:ext>
+            </a:extLst>
+          </p:cNvPr>
+          <p:cNvSpPr txBox="1"/>
+          <p:nvPr/>
+        </p:nvSpPr>
+        <p:spPr>
+          <a:xfrm>
+            <a:off x="1075004" y="6023820"/>
+            <a:ext cx="7848560" cy="338554"/>
+          </a:xfrm>
+          <a:prstGeom prst="rect">
+            <a:avLst/>
+          </a:prstGeom>
+          <a:noFill/>
+        </p:spPr>
+        <p:txBody>
+          <a:bodyPr wrap="square">
+            <a:spAutoFit/>
+          </a:bodyPr>
           <a:lstStyle/>
           <a:p>
-            <a:endParaRPr lang="en-CZ"/>
-          </a:p>
-        </p:txBody>
-      </p:sp>
-      <p:sp>
-        <p:nvSpPr>
-          <p:cNvPr id="7" name="Text Placeholder 6">
-            <a:extLst>
-              <a:ext uri="{FF2B5EF4-FFF2-40B4-BE49-F238E27FC236}">
-                <a16:creationId xmlns:a16="http://schemas.microsoft.com/office/drawing/2014/main" id="{2B31C1EE-747B-49D7-B34F-989C335BDF44}"/>
-              </a:ext>
-            </a:extLst>
-          </p:cNvPr>
-          <p:cNvSpPr>
-            <a:spLocks noGrp="1"/>
-          </p:cNvSpPr>
-          <p:nvPr>
-            <p:ph type="body" sz="quarter" idx="17"/>
-          </p:nvPr>
-        </p:nvSpPr>
-        <p:spPr/>
-        <p:txBody>
-          <a:bodyPr/>
-          <a:lstStyle/>
-          <a:p>
-            <a:endParaRPr lang="en-CZ"/>
-          </a:p>
-        </p:txBody>
-      </p:sp>
-      <p:sp>
-        <p:nvSpPr>
-          <p:cNvPr id="8" name="Text Placeholder 7">
-            <a:extLst>
-              <a:ext uri="{FF2B5EF4-FFF2-40B4-BE49-F238E27FC236}">
-                <a16:creationId xmlns:a16="http://schemas.microsoft.com/office/drawing/2014/main" id="{71A9F46A-B16D-3DEC-A329-070AB0A078C5}"/>
-              </a:ext>
-            </a:extLst>
-          </p:cNvPr>
-          <p:cNvSpPr>
-            <a:spLocks noGrp="1"/>
-          </p:cNvSpPr>
-          <p:nvPr>
-            <p:ph type="body" sz="quarter" idx="19"/>
-          </p:nvPr>
-        </p:nvSpPr>
-        <p:spPr/>
-        <p:txBody>
-          <a:bodyPr/>
-          <a:lstStyle/>
-          <a:p>
-            <a:endParaRPr lang="en-CZ"/>
-          </a:p>
-        </p:txBody>
-      </p:sp>
-      <p:sp>
-        <p:nvSpPr>
-          <p:cNvPr id="9" name="Text Placeholder 8">
-            <a:extLst>
-              <a:ext uri="{FF2B5EF4-FFF2-40B4-BE49-F238E27FC236}">
-                <a16:creationId xmlns:a16="http://schemas.microsoft.com/office/drawing/2014/main" id="{3B3CD643-678C-C5E3-E45D-D3C1119BA7F3}"/>
-              </a:ext>
-            </a:extLst>
-          </p:cNvPr>
-          <p:cNvSpPr>
-            <a:spLocks noGrp="1"/>
-          </p:cNvSpPr>
-          <p:nvPr>
-            <p:ph type="body" sz="quarter" idx="18"/>
-          </p:nvPr>
-        </p:nvSpPr>
-        <p:spPr/>
-        <p:txBody>
-          <a:bodyPr/>
-          <a:lstStyle/>
-          <a:p>
-            <a:endParaRPr lang="en-CZ"/>
-          </a:p>
-        </p:txBody>
-      </p:sp>
-      <p:sp>
-        <p:nvSpPr>
-          <p:cNvPr id="10" name="Text Placeholder 9">
-            <a:extLst>
-              <a:ext uri="{FF2B5EF4-FFF2-40B4-BE49-F238E27FC236}">
-                <a16:creationId xmlns:a16="http://schemas.microsoft.com/office/drawing/2014/main" id="{943DBF58-94C9-CD92-1BC5-FA38496D0797}"/>
-              </a:ext>
-            </a:extLst>
-          </p:cNvPr>
-          <p:cNvSpPr>
-            <a:spLocks noGrp="1"/>
-          </p:cNvSpPr>
-          <p:nvPr>
-            <p:ph type="body" sz="quarter" idx="20"/>
-          </p:nvPr>
-        </p:nvSpPr>
-        <p:spPr/>
-        <p:txBody>
-          <a:bodyPr/>
-          <a:lstStyle/>
-          <a:p>
-            <a:endParaRPr lang="en-CZ"/>
-          </a:p>
-        </p:txBody>
-      </p:sp>
-      <p:sp>
-        <p:nvSpPr>
-          <p:cNvPr id="11" name="Text Placeholder 10">
-            <a:extLst>
-              <a:ext uri="{FF2B5EF4-FFF2-40B4-BE49-F238E27FC236}">
-                <a16:creationId xmlns:a16="http://schemas.microsoft.com/office/drawing/2014/main" id="{03B12BBA-623E-A1FD-CBB3-854E93BC3CC7}"/>
-              </a:ext>
-            </a:extLst>
-          </p:cNvPr>
-          <p:cNvSpPr>
-            <a:spLocks noGrp="1"/>
-          </p:cNvSpPr>
-          <p:nvPr>
-            <p:ph type="body" sz="quarter" idx="21"/>
-          </p:nvPr>
-        </p:nvSpPr>
-        <p:spPr/>
-        <p:txBody>
-          <a:bodyPr/>
-          <a:lstStyle/>
-          <a:p>
-            <a:endParaRPr lang="en-CZ"/>
-          </a:p>
-        </p:txBody>
-      </p:sp>
-      <p:sp>
-        <p:nvSpPr>
-          <p:cNvPr id="12" name="Text Placeholder 11">
-            <a:extLst>
-              <a:ext uri="{FF2B5EF4-FFF2-40B4-BE49-F238E27FC236}">
-                <a16:creationId xmlns:a16="http://schemas.microsoft.com/office/drawing/2014/main" id="{F455ED64-418C-A2CC-D958-A3F06618EE06}"/>
-              </a:ext>
-            </a:extLst>
-          </p:cNvPr>
-          <p:cNvSpPr>
-            <a:spLocks noGrp="1"/>
-          </p:cNvSpPr>
-          <p:nvPr>
-            <p:ph type="body" sz="quarter" idx="22"/>
-          </p:nvPr>
-        </p:nvSpPr>
-        <p:spPr/>
-        <p:txBody>
-          <a:bodyPr/>
-          <a:lstStyle/>
-          <a:p>
-            <a:endParaRPr lang="en-CZ"/>
-          </a:p>
-        </p:txBody>
-      </p:sp>
-      <p:sp>
-        <p:nvSpPr>
-          <p:cNvPr id="13" name="Text Placeholder 12">
-            <a:extLst>
-              <a:ext uri="{FF2B5EF4-FFF2-40B4-BE49-F238E27FC236}">
-                <a16:creationId xmlns:a16="http://schemas.microsoft.com/office/drawing/2014/main" id="{AF9A218A-7B0C-7B36-CB7D-BA374ED712A7}"/>
-              </a:ext>
-            </a:extLst>
-          </p:cNvPr>
-          <p:cNvSpPr>
-            <a:spLocks noGrp="1"/>
-          </p:cNvSpPr>
-          <p:nvPr>
-            <p:ph type="body" sz="quarter" idx="23"/>
-          </p:nvPr>
-        </p:nvSpPr>
-        <p:spPr/>
-        <p:txBody>
-          <a:bodyPr/>
-          <a:lstStyle/>
-          <a:p>
-            <a:endParaRPr lang="en-CZ"/>
+            <a:r>
+              <a:rPr lang="cs-CZ" sz="1600" dirty="0">
+                <a:hlinkClick r:id="rId3"/>
+              </a:rPr>
+              <a:t>https://wiki.kb.cz/spaces/ODP/pages/1539252271/MiNiFi+k8s+DRAFT</a:t>
+            </a:r>
+            <a:endParaRPr lang="cs-CZ" sz="1600" dirty="0"/>
           </a:p>
         </p:txBody>
       </p:sp>
     </p:spTree>
     <p:extLst>
       <p:ext uri="{BB962C8B-B14F-4D97-AF65-F5344CB8AC3E}">
-        <p14:creationId xmlns:p14="http://schemas.microsoft.com/office/powerpoint/2010/main" val="3933930705"/>
+        <p14:creationId xmlns:p14="http://schemas.microsoft.com/office/powerpoint/2010/main" val="162557400"/>
       </p:ext>
     </p:extLst>
   </p:cSld>
@@ -26003,13 +20893,7 @@
       </p:grpSpPr>
       <p:sp>
         <p:nvSpPr>
-          <p:cNvPr id="2" name="Slide Number Placeholder 1">
-            <a:extLst>
-              <a:ext uri="{FF2B5EF4-FFF2-40B4-BE49-F238E27FC236}">
-                <a16:creationId xmlns:a16="http://schemas.microsoft.com/office/drawing/2014/main" id="{F7A10156-37A6-0EBA-6430-4DDDA4B1135A}"/>
-              </a:ext>
-            </a:extLst>
-          </p:cNvPr>
+          <p:cNvPr id="2" name="Slide Number Placeholder"/>
           <p:cNvSpPr>
             <a:spLocks noGrp="1"/>
           </p:cNvSpPr>
@@ -26023,23 +20907,17 @@
           <a:lstStyle/>
           <a:p>
             <a:fld id="{5AF2E7C1-CA82-F241-8934-AACDE30393F4}" type="slidenum">
-              <a:rPr lang="en-CZ" smtClean="0"/>
+              <a:rPr lang="en-GB" smtClean="0"/>
               <a:pPr/>
               <a:t>9</a:t>
             </a:fld>
-            <a:endParaRPr lang="en-CZ" dirty="0"/>
-          </a:p>
-        </p:txBody>
-      </p:sp>
-      <p:sp>
-        <p:nvSpPr>
-          <p:cNvPr id="3" name="Text Placeholder 2">
-            <a:extLst>
-              <a:ext uri="{FF2B5EF4-FFF2-40B4-BE49-F238E27FC236}">
-                <a16:creationId xmlns:a16="http://schemas.microsoft.com/office/drawing/2014/main" id="{35C383B3-A3ED-A8D6-C685-72AE90084409}"/>
-              </a:ext>
-            </a:extLst>
-          </p:cNvPr>
+            <a:endParaRPr lang="en-GB" dirty="0"/>
+          </a:p>
+        </p:txBody>
+      </p:sp>
+      <p:sp>
+        <p:nvSpPr>
+          <p:cNvPr id="3" name="Title Placeholder"/>
           <p:cNvSpPr>
             <a:spLocks noGrp="1"/>
           </p:cNvSpPr>
@@ -26052,19 +20930,17 @@
           <a:bodyPr/>
           <a:lstStyle/>
           <a:p>
-            <a:endParaRPr lang="en-CZ"/>
-          </a:p>
-        </p:txBody>
-      </p:sp>
-      <p:sp>
-        <p:nvSpPr>
-          <p:cNvPr id="4" name="Text Placeholder 3">
-            <a:extLst>
-              <a:ext uri="{FF2B5EF4-FFF2-40B4-BE49-F238E27FC236}">
-                <a16:creationId xmlns:a16="http://schemas.microsoft.com/office/drawing/2014/main" id="{4EB19E0F-F4A0-BC17-AE6A-FEB780E2D480}"/>
-              </a:ext>
-            </a:extLst>
-          </p:cNvPr>
+            <a:pPr lvl="0"/>
+            <a:r>
+              <a:rPr lang="en-GB" dirty="0"/>
+              <a:t>Airflow to Kubernetes via REST API</a:t>
+            </a:r>
+          </a:p>
+        </p:txBody>
+      </p:sp>
+      <p:sp>
+        <p:nvSpPr>
+          <p:cNvPr id="4" name="Subtitle Placeholder"/>
           <p:cNvSpPr>
             <a:spLocks noGrp="1"/>
           </p:cNvSpPr>
@@ -26077,19 +20953,17 @@
           <a:bodyPr/>
           <a:lstStyle/>
           <a:p>
-            <a:endParaRPr lang="en-CZ"/>
-          </a:p>
-        </p:txBody>
-      </p:sp>
-      <p:sp>
-        <p:nvSpPr>
-          <p:cNvPr id="5" name="Footer Placeholder 4">
-            <a:extLst>
-              <a:ext uri="{FF2B5EF4-FFF2-40B4-BE49-F238E27FC236}">
-                <a16:creationId xmlns:a16="http://schemas.microsoft.com/office/drawing/2014/main" id="{3693883B-09D3-7EC2-4B46-8D2C31E8D936}"/>
-              </a:ext>
-            </a:extLst>
-          </p:cNvPr>
+            <a:pPr lvl="0"/>
+            <a:r>
+              <a:rPr lang="en-GB" dirty="0"/>
+              <a:t>A standard, reusable integration pattern</a:t>
+            </a:r>
+          </a:p>
+        </p:txBody>
+      </p:sp>
+      <p:sp>
+        <p:nvSpPr>
+          <p:cNvPr id="5" name="Footer Placeholder"/>
           <p:cNvSpPr>
             <a:spLocks noGrp="1"/>
           </p:cNvSpPr>
@@ -26106,139 +20980,259 @@
               <a:rPr lang="en-GB"/>
               <a:t>PPT Template 2.0</a:t>
             </a:r>
-            <a:endParaRPr lang="en-CZ" dirty="0"/>
-          </a:p>
-        </p:txBody>
-      </p:sp>
-      <p:sp>
-        <p:nvSpPr>
-          <p:cNvPr id="6" name="Text Placeholder 5">
-            <a:extLst>
-              <a:ext uri="{FF2B5EF4-FFF2-40B4-BE49-F238E27FC236}">
-                <a16:creationId xmlns:a16="http://schemas.microsoft.com/office/drawing/2014/main" id="{24671AE0-F218-0EC1-D3DA-84ACA03AAD40}"/>
-              </a:ext>
-            </a:extLst>
-          </p:cNvPr>
-          <p:cNvSpPr>
-            <a:spLocks noGrp="1"/>
-          </p:cNvSpPr>
-          <p:nvPr>
-            <p:ph type="body" sz="quarter" idx="19"/>
+            <a:endParaRPr lang="en-GB" dirty="0"/>
+          </a:p>
+        </p:txBody>
+      </p:sp>
+      <p:sp>
+        <p:nvSpPr>
+          <p:cNvPr id="6" name="Body Left Placeholder"/>
+          <p:cNvSpPr>
+            <a:spLocks noGrp="1"/>
+          </p:cNvSpPr>
+          <p:nvPr>
+            <p:ph type="body" sz="quarter" idx="16"/>
           </p:nvPr>
         </p:nvSpPr>
         <p:spPr/>
         <p:txBody>
-          <a:bodyPr/>
+          <a:bodyPr>
+            <a:normAutofit/>
+          </a:bodyPr>
           <a:lstStyle/>
           <a:p>
-            <a:endParaRPr lang="en-CZ"/>
-          </a:p>
-        </p:txBody>
-      </p:sp>
-      <p:sp>
-        <p:nvSpPr>
-          <p:cNvPr id="7" name="Text Placeholder 6">
-            <a:extLst>
-              <a:ext uri="{FF2B5EF4-FFF2-40B4-BE49-F238E27FC236}">
-                <a16:creationId xmlns:a16="http://schemas.microsoft.com/office/drawing/2014/main" id="{6D96B597-AD5C-0DD8-9631-04CD6833A996}"/>
-              </a:ext>
-            </a:extLst>
-          </p:cNvPr>
-          <p:cNvSpPr>
-            <a:spLocks noGrp="1"/>
-          </p:cNvSpPr>
-          <p:nvPr>
-            <p:ph type="body" sz="quarter" idx="20"/>
-          </p:nvPr>
-        </p:nvSpPr>
-        <p:spPr/>
-        <p:txBody>
-          <a:bodyPr/>
+            <a:pPr lvl="4"/>
+            <a:r>
+              <a:rPr lang="en-GB" dirty="0"/>
+              <a:t>Airflow’s KubernetesPodOperator communicates with the Kubernetes API server using a standard REST API</a:t>
+            </a:r>
+          </a:p>
+          <a:p>
+            <a:pPr lvl="4"/>
+            <a:r>
+              <a:rPr lang="en-GB" dirty="0"/>
+              <a:t>The connection between SOGE Airflow and Kubernetes in the KB environment is implemented purely as HTTPS REST calls, with no special protocol required</a:t>
+            </a:r>
+          </a:p>
+          <a:p>
+            <a:pPr lvl="4"/>
+            <a:r>
+              <a:rPr lang="en-GB" dirty="0"/>
+              <a:t>HTTPS REST API should already be permitted on the network pass-throughs between SOGE and KB</a:t>
+            </a:r>
+          </a:p>
+          <a:p>
+            <a:pPr lvl="4"/>
+            <a:r>
+              <a:rPr lang="en-GB" dirty="0"/>
+              <a:t>Security is generally favorable toward REST API</a:t>
+            </a:r>
+          </a:p>
+          <a:p>
+            <a:pPr lvl="4"/>
+            <a:r>
+              <a:rPr lang="en-GB" dirty="0"/>
+              <a:t>This could become a general pattern for connecting SOGE Airflow with the KB environment</a:t>
+            </a:r>
+          </a:p>
+        </p:txBody>
+      </p:sp>
+      <p:sp>
+        <p:nvSpPr>
+          <p:cNvPr id="7" name="Code Card"/>
+          <p:cNvSpPr/>
+          <p:nvPr/>
+        </p:nvSpPr>
+        <p:spPr>
+          <a:xfrm>
+            <a:off x="6173167" y="1109013"/>
+            <a:ext cx="5715000" cy="4200000"/>
+          </a:xfrm>
+          <a:prstGeom prst="roundRect">
+            <a:avLst>
+              <a:gd name="adj" fmla="val 4281"/>
+            </a:avLst>
+          </a:prstGeom>
+          <a:solidFill>
+            <a:srgbClr val="F5F5F5"/>
+          </a:solidFill>
+          <a:ln>
+            <a:solidFill>
+              <a:srgbClr val="D9D9D9"/>
+            </a:solidFill>
+          </a:ln>
+        </p:spPr>
+        <p:txBody>
+          <a:bodyPr wrap="square" lIns="180000" tIns="180000" rIns="180000" bIns="180000" anchor="t">
+            <a:normAutofit/>
+          </a:bodyPr>
           <a:lstStyle/>
           <a:p>
-            <a:endParaRPr lang="en-CZ"/>
-          </a:p>
-        </p:txBody>
-      </p:sp>
-      <p:sp>
-        <p:nvSpPr>
-          <p:cNvPr id="8" name="Text Placeholder 7">
-            <a:extLst>
-              <a:ext uri="{FF2B5EF4-FFF2-40B4-BE49-F238E27FC236}">
-                <a16:creationId xmlns:a16="http://schemas.microsoft.com/office/drawing/2014/main" id="{722BBF1B-A418-6B75-4F36-B279416F4869}"/>
-              </a:ext>
-            </a:extLst>
-          </p:cNvPr>
-          <p:cNvSpPr>
-            <a:spLocks noGrp="1"/>
-          </p:cNvSpPr>
-          <p:nvPr>
-            <p:ph type="body" sz="quarter" idx="21"/>
-          </p:nvPr>
-        </p:nvSpPr>
-        <p:spPr/>
-        <p:txBody>
-          <a:bodyPr/>
+            <a:pPr>
+              <a:buNone/>
+            </a:pPr>
+            <a:endParaRPr lang="en-GB" sz="1050" dirty="0">
+              <a:latin typeface="Consolas" panose="020B0609020204030204" pitchFamily="49" charset="0"/>
+              <a:cs typeface="Consolas" panose="020B0609020204030204" pitchFamily="49" charset="0"/>
+            </a:endParaRPr>
+          </a:p>
+          <a:p>
+            <a:pPr>
+              <a:buNone/>
+            </a:pPr>
+            <a:r>
+              <a:rPr lang="en-GB" sz="1050" dirty="0">
+                <a:latin typeface="Consolas" panose="020B0609020204030204" pitchFamily="49" charset="0"/>
+                <a:cs typeface="Consolas" panose="020B0609020204030204" pitchFamily="49" charset="0"/>
+              </a:rPr>
+              <a:t>run_minifi = KubernetesPodOperator(</a:t>
+            </a:r>
+          </a:p>
+          <a:p>
+            <a:pPr>
+              <a:buNone/>
+            </a:pPr>
+            <a:r>
+              <a:rPr lang="en-GB" sz="1050" dirty="0">
+                <a:latin typeface="Consolas" panose="020B0609020204030204" pitchFamily="49" charset="0"/>
+                <a:cs typeface="Consolas" panose="020B0609020204030204" pitchFamily="49" charset="0"/>
+              </a:rPr>
+              <a:t>    task_id="run_minifi_crm_export",</a:t>
+            </a:r>
+          </a:p>
+          <a:p>
+            <a:pPr>
+              <a:buNone/>
+            </a:pPr>
+            <a:r>
+              <a:rPr lang="en-GB" sz="1050" dirty="0">
+                <a:latin typeface="Consolas" panose="020B0609020204030204" pitchFamily="49" charset="0"/>
+                <a:cs typeface="Consolas" panose="020B0609020204030204" pitchFamily="49" charset="0"/>
+              </a:rPr>
+              <a:t>    namespace="crm-squad-ns",</a:t>
+            </a:r>
+          </a:p>
+          <a:p>
+            <a:pPr>
+              <a:buNone/>
+            </a:pPr>
+            <a:r>
+              <a:rPr lang="en-GB" sz="1050" dirty="0">
+                <a:latin typeface="Consolas" panose="020B0609020204030204" pitchFamily="49" charset="0"/>
+                <a:cs typeface="Consolas" panose="020B0609020204030204" pitchFamily="49" charset="0"/>
+              </a:rPr>
+              <a:t>    image="harbor.kb.cz/minifi/minifi-template:1.4.0",</a:t>
+            </a:r>
+          </a:p>
+          <a:p>
+            <a:pPr>
+              <a:buNone/>
+            </a:pPr>
+            <a:r>
+              <a:rPr lang="en-GB" sz="1050" dirty="0">
+                <a:latin typeface="Consolas" panose="020B0609020204030204" pitchFamily="49" charset="0"/>
+                <a:cs typeface="Consolas" panose="020B0609020204030204" pitchFamily="49" charset="0"/>
+              </a:rPr>
+              <a:t>    cmds=["/opt/minifi/bin/run.sh"],</a:t>
+            </a:r>
+          </a:p>
+          <a:p>
+            <a:pPr>
+              <a:buNone/>
+            </a:pPr>
+            <a:r>
+              <a:rPr lang="en-GB" sz="1050" dirty="0">
+                <a:latin typeface="Consolas" panose="020B0609020204030204" pitchFamily="49" charset="0"/>
+                <a:cs typeface="Consolas" panose="020B0609020204030204" pitchFamily="49" charset="0"/>
+              </a:rPr>
+              <a:t>    arguments=["--config", "/config/exports.yaml"],</a:t>
+            </a:r>
+          </a:p>
+          <a:p>
+            <a:pPr>
+              <a:buNone/>
+            </a:pPr>
+            <a:r>
+              <a:rPr lang="en-GB" sz="1050" dirty="0">
+                <a:latin typeface="Consolas" panose="020B0609020204030204" pitchFamily="49" charset="0"/>
+                <a:cs typeface="Consolas" panose="020B0609020204030204" pitchFamily="49" charset="0"/>
+              </a:rPr>
+              <a:t>    kubernetes_conn_id="kb_onprem_k8s",</a:t>
+            </a:r>
+          </a:p>
+          <a:p>
+            <a:pPr>
+              <a:buNone/>
+            </a:pPr>
+            <a:r>
+              <a:rPr lang="en-GB" sz="1050" dirty="0">
+                <a:latin typeface="Consolas" panose="020B0609020204030204" pitchFamily="49" charset="0"/>
+                <a:cs typeface="Consolas" panose="020B0609020204030204" pitchFamily="49" charset="0"/>
+              </a:rPr>
+              <a:t>    get_logs=True,</a:t>
+            </a:r>
+          </a:p>
+          <a:p>
+            <a:pPr>
+              <a:buNone/>
+            </a:pPr>
+            <a:r>
+              <a:rPr lang="en-GB" sz="1050" dirty="0">
+                <a:latin typeface="Consolas" panose="020B0609020204030204" pitchFamily="49" charset="0"/>
+                <a:cs typeface="Consolas" panose="020B0609020204030204" pitchFamily="49" charset="0"/>
+              </a:rPr>
+              <a:t>    is_delete_operator_pod=True,</a:t>
+            </a:r>
+          </a:p>
+          <a:p>
+            <a:pPr>
+              <a:buNone/>
+            </a:pPr>
+            <a:r>
+              <a:rPr lang="en-GB" sz="1050" dirty="0">
+                <a:latin typeface="Consolas" panose="020B0609020204030204" pitchFamily="49" charset="0"/>
+                <a:cs typeface="Consolas" panose="020B0609020204030204" pitchFamily="49" charset="0"/>
+              </a:rPr>
+              <a:t>)</a:t>
+            </a:r>
+          </a:p>
+        </p:txBody>
+      </p:sp>
+      <p:sp>
+        <p:nvSpPr>
+          <p:cNvPr id="8" name="Live Demo Note"/>
+          <p:cNvSpPr txBox="1"/>
+          <p:nvPr/>
+        </p:nvSpPr>
+        <p:spPr>
+          <a:xfrm>
+            <a:off x="6173167" y="5400000"/>
+            <a:ext cx="5715000" cy="650000"/>
+          </a:xfrm>
+          <a:prstGeom prst="rect">
+            <a:avLst/>
+          </a:prstGeom>
+        </p:spPr>
+        <p:txBody>
+          <a:bodyPr wrap="square">
+            <a:normAutofit/>
+          </a:bodyPr>
           <a:lstStyle/>
           <a:p>
-            <a:endParaRPr lang="en-CZ"/>
-          </a:p>
-        </p:txBody>
-      </p:sp>
-      <p:sp>
-        <p:nvSpPr>
-          <p:cNvPr id="9" name="Text Placeholder 8">
-            <a:extLst>
-              <a:ext uri="{FF2B5EF4-FFF2-40B4-BE49-F238E27FC236}">
-                <a16:creationId xmlns:a16="http://schemas.microsoft.com/office/drawing/2014/main" id="{0085A1F0-EB5F-E16B-45BA-F50B9BC3A06E}"/>
-              </a:ext>
-            </a:extLst>
-          </p:cNvPr>
-          <p:cNvSpPr>
-            <a:spLocks noGrp="1"/>
-          </p:cNvSpPr>
-          <p:nvPr>
-            <p:ph type="body" sz="quarter" idx="22"/>
-          </p:nvPr>
-        </p:nvSpPr>
-        <p:spPr/>
-        <p:txBody>
-          <a:bodyPr/>
-          <a:lstStyle/>
-          <a:p>
-            <a:endParaRPr lang="en-CZ"/>
-          </a:p>
-        </p:txBody>
-      </p:sp>
-      <p:sp>
-        <p:nvSpPr>
-          <p:cNvPr id="10" name="Text Placeholder 9">
-            <a:extLst>
-              <a:ext uri="{FF2B5EF4-FFF2-40B4-BE49-F238E27FC236}">
-                <a16:creationId xmlns:a16="http://schemas.microsoft.com/office/drawing/2014/main" id="{40F68289-7F1F-A8CE-5624-4A4E6B049FF4}"/>
-              </a:ext>
-            </a:extLst>
-          </p:cNvPr>
-          <p:cNvSpPr>
-            <a:spLocks noGrp="1"/>
-          </p:cNvSpPr>
-          <p:nvPr>
-            <p:ph type="body" sz="quarter" idx="23"/>
-          </p:nvPr>
-        </p:nvSpPr>
-        <p:spPr/>
-        <p:txBody>
-          <a:bodyPr/>
-          <a:lstStyle/>
-          <a:p>
-            <a:endParaRPr lang="en-CZ"/>
+            <a:r>
+              <a:rPr lang="en-GB" sz="1200" i="1" dirty="0">
+                <a:hlinkClick r:id="rId2"/>
+              </a:rPr>
+              <a:t>https://airflow-dev.kb.cz/dags/k8s_pod_demo_pje</a:t>
+            </a:r>
+            <a:endParaRPr lang="en-GB" sz="1200" i="1" dirty="0"/>
           </a:p>
         </p:txBody>
       </p:sp>
     </p:spTree>
     <p:extLst>
       <p:ext uri="{BB962C8B-B14F-4D97-AF65-F5344CB8AC3E}">
-        <p14:creationId xmlns:p14="http://schemas.microsoft.com/office/powerpoint/2010/main" val="2726349409"/>
+        <p14:creationId xmlns:p14="http://schemas.microsoft.com/office/powerpoint/2010/main" val="1100000107"/>
       </p:ext>
     </p:extLst>
   </p:cSld>
